--- a/docs/AUTHOR.pptx
+++ b/docs/AUTHOR.pptx
@@ -16,6 +16,8 @@
     <p:sldId id="264" r:id="rId15"/>
     <p:sldId id="265" r:id="rId16"/>
     <p:sldId id="266" r:id="rId17"/>
+    <p:sldId id="267" r:id="rId18"/>
+    <p:sldId id="268" r:id="rId19"/>
   </p:sldIdLst>
   <p:sldSz cx="12191695" cy="6858000" type="screen4x3"/>
   <p:notesSz cx="6858000" cy="9144000"/>
@@ -3106,8 +3108,8 @@
         </p:nvSpPr>
         <p:spPr>
           <a:xfrm>
-            <a:off x="0" y="2194560"/>
-            <a:ext cx="12191695" cy="1371600"/>
+            <a:off x="0" y="2103120"/>
+            <a:ext cx="12191695" cy="1463040"/>
           </a:xfrm>
           <a:prstGeom prst="rect">
             <a:avLst/>
@@ -3118,6 +3120,7 @@
           <a:ln>
             <a:noFill/>
           </a:ln>
+          <a:effectLst/>
         </p:spPr>
         <p:style>
           <a:lnRef idx="1">
@@ -3134,12 +3137,12 @@
           </a:fontRef>
         </p:style>
         <p:txBody>
-          <a:bodyPr rtlCol="0" anchor="ctr" wrap="square"/>
+          <a:bodyPr rtlCol="0" anchor="ctr"/>
           <a:lstStyle/>
           <a:p>
             <a:pPr algn="ctr"/>
             <a:r>
-              <a:rPr sz="4600" b="1">
+              <a:rPr sz="4800" b="1">
                 <a:solidFill>
                   <a:srgbClr val="FFFFFF"/>
                 </a:solidFill>
@@ -3157,8 +3160,8 @@
         </p:nvSpPr>
         <p:spPr>
           <a:xfrm>
-            <a:off x="914400" y="3749039"/>
-            <a:ext cx="10360152" cy="1463040"/>
+            <a:off x="731520" y="3794760"/>
+            <a:ext cx="10698480" cy="1737360"/>
           </a:xfrm>
           <a:prstGeom prst="rect">
             <a:avLst/>
@@ -3173,14 +3176,34 @@
           <a:p>
             <a:pPr algn="ctr"/>
             <a:r>
-              <a:rPr sz="2000">
+              <a:rPr sz="1800" b="1">
+                <a:solidFill>
+                  <a:srgbClr val="1F3A5F"/>
+                </a:solidFill>
+              </a:rPr>
+              <a:t>Agentic Understanding for Thesis, Hypothesis, and Objective Research</a:t>
+            </a:r>
+          </a:p>
+          <a:p>
+            <a:pPr algn="ctr"/>
+            <a:r>
+              <a:rPr sz="1500" b="0">
                 <a:solidFill>
                   <a:srgbClr val="444444"/>
                 </a:solidFill>
               </a:rPr>
-              <a:t>Agentic Understanding for Thesis, Hypothesis, and Objective Research
-One host-invocable package across the whole scientific-paper lifecycle:
-read → understand → verify citations → review → plan → write → illustrate → export</a:t>
+              <a:t>One host-invocable package across the whole scientific-paper lifecycle:</a:t>
+            </a:r>
+          </a:p>
+          <a:p>
+            <a:pPr algn="ctr"/>
+            <a:r>
+              <a:rPr sz="1500" b="0">
+                <a:solidFill>
+                  <a:srgbClr val="444444"/>
+                </a:solidFill>
+              </a:rPr>
+              <a:t>read -&gt; understand -&gt; verify citations -&gt; review -&gt; plan -&gt; write -&gt; illustrate -&gt; export</a:t>
             </a:r>
           </a:p>
         </p:txBody>
@@ -3193,8 +3216,8 @@
         </p:nvSpPr>
         <p:spPr>
           <a:xfrm>
-            <a:off x="914400" y="5852160"/>
-            <a:ext cx="10360152" cy="640080"/>
+            <a:off x="731520" y="5943600"/>
+            <a:ext cx="10698480" cy="640080"/>
           </a:xfrm>
           <a:prstGeom prst="rect">
             <a:avLst/>
@@ -3214,7 +3237,7 @@
                   <a:srgbClr val="2E7D32"/>
                 </a:solidFill>
               </a:rPr>
-              <a:t>Invoked by the CLIO agent as a subagent  ·  18 actions  ·  grounded, not hallucinated</a:t>
+              <a:t>Invoked by the CLIO agent as a subagent   .   18 actions   .   grounded, not hallucinated</a:t>
             </a:r>
           </a:p>
         </p:txBody>
@@ -3257,6 +3280,7 @@
           <a:ln>
             <a:noFill/>
           </a:ln>
+          <a:effectLst/>
         </p:spPr>
         <p:style>
           <a:lnRef idx="1">
@@ -3273,17 +3297,17 @@
           </a:fontRef>
         </p:style>
         <p:txBody>
-          <a:bodyPr rtlCol="0" anchor="ctr" wrap="square" lIns="365760"/>
+          <a:bodyPr rtlCol="0" anchor="ctr" lIns="365760"/>
           <a:lstStyle/>
           <a:p>
             <a:pPr algn="ctr"/>
             <a:r>
-              <a:rPr sz="2600" b="1">
+              <a:rPr sz="2500" b="1">
                 <a:solidFill>
                   <a:srgbClr val="FFFFFF"/>
                 </a:solidFill>
               </a:rPr>
-              <a:t>9 · Justification — why this is worth doing</a:t>
+              <a:t>7 . Design - how it's put together</a:t>
             </a:r>
           </a:p>
         </p:txBody>
@@ -3296,8 +3320,8 @@
         </p:nvSpPr>
         <p:spPr>
           <a:xfrm>
-            <a:off x="548640" y="1097280"/>
-            <a:ext cx="11064240" cy="5486400"/>
+            <a:off x="11430000" y="6446520"/>
+            <a:ext cx="640080" cy="365760"/>
           </a:xfrm>
           <a:prstGeom prst="rect">
             <a:avLst/>
@@ -3310,118 +3334,89 @@
           </a:bodyPr>
           <a:lstStyle/>
           <a:p>
-            <a:pPr>
-              <a:spcAft>
-                <a:spcPts val="800"/>
-              </a:spcAft>
-            </a:pPr>
-            <a:r>
-              <a:rPr sz="1700" b="1">
+            <a:r>
+              <a:rPr sz="1100">
+                <a:solidFill>
+                  <a:srgbClr val="444444"/>
+                </a:solidFill>
+              </a:rPr>
+              <a:t>9</a:t>
+            </a:r>
+          </a:p>
+        </p:txBody>
+      </p:sp>
+      <p:sp>
+        <p:nvSpPr>
+          <p:cNvPr id="4" name="TextBox 3"/>
+          <p:cNvSpPr txBox="1"/>
+          <p:nvPr/>
+        </p:nvSpPr>
+        <p:spPr>
+          <a:xfrm>
+            <a:off x="548640" y="1143000"/>
+            <a:ext cx="11064240" cy="3566160"/>
+          </a:xfrm>
+          <a:prstGeom prst="rect">
+            <a:avLst/>
+          </a:prstGeom>
+          <a:noFill/>
+        </p:spPr>
+        <p:txBody>
+          <a:bodyPr wrap="square">
+            <a:spAutoFit/>
+          </a:bodyPr>
+          <a:lstStyle/>
+          <a:p>
+            <a:r>
+              <a:rPr sz="1300">
                 <a:solidFill>
                   <a:srgbClr val="1F3A5F"/>
                 </a:solidFill>
-              </a:rPr>
-              <a:t>• A real, unoccupied gap:</a:t>
-            </a:r>
-            <a:r>
-              <a:rPr sz="1700">
+                <a:latin typeface="Courier New"/>
+              </a:rPr>
+              <a:t>host (CLIO)  ---&gt;  ClioAuthorSubagent   (capabilities + run; JSON; never-raises)
+                        |
+                   Main agent (router)  +  orchestrate (goal -&gt; plan -&gt; execute)
+                        |
+    expert agents:  ingestor . paper_qa . citation . reviewer/meta .
+    planner . writer/editor . polish . coherence . figure_agent . kg .
+    compose . export
+                        |
+    backends:  retrieval (RAG + scholarly cascade) . vision (Gemini) .
+    SafeFiles (read/write/edit, sandboxed) . LLM (claude/codex/ollama/echo)</a:t>
+            </a:r>
+          </a:p>
+        </p:txBody>
+      </p:sp>
+      <p:sp>
+        <p:nvSpPr>
+          <p:cNvPr id="5" name="TextBox 4"/>
+          <p:cNvSpPr txBox="1"/>
+          <p:nvPr/>
+        </p:nvSpPr>
+        <p:spPr>
+          <a:xfrm>
+            <a:off x="548640" y="4937760"/>
+            <a:ext cx="11064240" cy="1554480"/>
+          </a:xfrm>
+          <a:prstGeom prst="rect">
+            <a:avLst/>
+          </a:prstGeom>
+          <a:noFill/>
+        </p:spPr>
+        <p:txBody>
+          <a:bodyPr wrap="square">
+            <a:spAutoFit/>
+          </a:bodyPr>
+          <a:lstStyle/>
+          <a:p>
+            <a:r>
+              <a:rPr sz="1400">
                 <a:solidFill>
                   <a:srgbClr val="444444"/>
                 </a:solidFill>
               </a:rPr>
-              <a:t> surveyed 20+ systems; none unify the lifecycle as one grounded, host-invocable package (slides 3–4).</a:t>
-            </a:r>
-          </a:p>
-          <a:p>
-            <a:pPr>
-              <a:spcAft>
-                <a:spcPts val="800"/>
-              </a:spcAft>
-            </a:pPr>
-            <a:r>
-              <a:rPr sz="1700" b="1">
-                <a:solidFill>
-                  <a:srgbClr val="1F3A5F"/>
-                </a:solidFill>
-              </a:rPr>
-              <a:t>• Fixes the trust problem:</a:t>
-            </a:r>
-            <a:r>
-              <a:rPr sz="1700">
-                <a:solidFill>
-                  <a:srgbClr val="444444"/>
-                </a:solidFill>
-              </a:rPr>
-              <a:t> verification + source-grounded writing vs hallucination-prone generators.</a:t>
-            </a:r>
-          </a:p>
-          <a:p>
-            <a:pPr>
-              <a:spcAft>
-                <a:spcPts val="800"/>
-              </a:spcAft>
-            </a:pPr>
-            <a:r>
-              <a:rPr sz="1700" b="1">
-                <a:solidFill>
-                  <a:srgbClr val="1F3A5F"/>
-                </a:solidFill>
-              </a:rPr>
-              <a:t>• A reusable substrate, not a one-off:</a:t>
-            </a:r>
-            <a:r>
-              <a:rPr sz="1700">
-                <a:solidFill>
-                  <a:srgbClr val="444444"/>
-                </a:solidFill>
-              </a:rPr>
-              <a:t> a host (CLIO) gains paper read/review/write as composable, on-demand capabilities; experts compose in any order.</a:t>
-            </a:r>
-          </a:p>
-          <a:p>
-            <a:pPr>
-              <a:spcAft>
-                <a:spcPts val="800"/>
-              </a:spcAft>
-            </a:pPr>
-            <a:r>
-              <a:rPr sz="1700" b="1">
-                <a:solidFill>
-                  <a:srgbClr val="1F3A5F"/>
-                </a:solidFill>
-              </a:rPr>
-              <a:t>• Already real:</a:t>
-            </a:r>
-            <a:r>
-              <a:rPr sz="1700">
-                <a:solidFill>
-                  <a:srgbClr val="444444"/>
-                </a:solidFill>
-              </a:rPr>
-              <a:t> built, tested, demonstrable today; the benchmark plan turns the claim into numbers a reviewer will accept.</a:t>
-            </a:r>
-          </a:p>
-          <a:p>
-            <a:pPr>
-              <a:spcAft>
-                <a:spcPts val="800"/>
-              </a:spcAft>
-            </a:pPr>
-            <a:r>
-              <a:rPr sz="1700" b="1">
-                <a:solidFill>
-                  <a:srgbClr val="1F3A5F"/>
-                </a:solidFill>
-              </a:rPr>
-              <a:t>• Objection — 'isn't this just tool orchestration?':</a:t>
-            </a:r>
-            <a:r>
-              <a:rPr sz="1700">
-                <a:solidFill>
-                  <a:srgbClr val="444444"/>
-                </a:solidFill>
-              </a:rPr>
-              <a:t> frameworks (MCP, LangGraph) are domain-agnostic plumbing that ship zero paper-lifecycle capability. AUTHOR is the missing domain package; MCP is just how a host reaches it.</a:t>
+              <a:t>Principles: expert agents + retrieval + read/write/edit tools  .  grounded (verify, source-bound)  .  standalone harness, thin host bridge  .  hermetic-first (offline echo model; heavy paths gated).</a:t>
             </a:r>
           </a:p>
         </p:txBody>
@@ -3464,6 +3459,7 @@
           <a:ln>
             <a:noFill/>
           </a:ln>
+          <a:effectLst/>
         </p:spPr>
         <p:style>
           <a:lnRef idx="1">
@@ -3480,17 +3476,17 @@
           </a:fontRef>
         </p:style>
         <p:txBody>
-          <a:bodyPr rtlCol="0" anchor="ctr" wrap="square" lIns="365760"/>
+          <a:bodyPr rtlCol="0" anchor="ctr" lIns="365760"/>
           <a:lstStyle/>
           <a:p>
             <a:pPr algn="ctr"/>
             <a:r>
-              <a:rPr sz="2600" b="1">
+              <a:rPr sz="2500" b="1">
                 <a:solidFill>
                   <a:srgbClr val="FFFFFF"/>
                 </a:solidFill>
               </a:rPr>
-              <a:t>10 · Status &amp; next steps</a:t>
+              <a:t>8 . How we'll prove it - evaluation plan</a:t>
             </a:r>
           </a:p>
         </p:txBody>
@@ -3503,8 +3499,8 @@
         </p:nvSpPr>
         <p:spPr>
           <a:xfrm>
-            <a:off x="548640" y="1097280"/>
-            <a:ext cx="11064240" cy="5486400"/>
+            <a:off x="11430000" y="6446520"/>
+            <a:ext cx="640080" cy="365760"/>
           </a:xfrm>
           <a:prstGeom prst="rect">
             <a:avLst/>
@@ -3517,44 +3513,936 @@
           </a:bodyPr>
           <a:lstStyle/>
           <a:p>
+            <a:r>
+              <a:rPr sz="1100">
+                <a:solidFill>
+                  <a:srgbClr val="444444"/>
+                </a:solidFill>
+              </a:rPr>
+              <a:t>10</a:t>
+            </a:r>
+          </a:p>
+        </p:txBody>
+      </p:sp>
+      <p:graphicFrame>
+        <p:nvGraphicFramePr>
+          <p:cNvPr id="4" name="Table 3"/>
+          <p:cNvGraphicFramePr>
+            <a:graphicFrameLocks noGrp="1"/>
+          </p:cNvGraphicFramePr>
+          <p:nvPr/>
+        </p:nvGraphicFramePr>
+        <p:xfrm>
+          <a:off x="457200" y="1143000"/>
+          <a:ext cx="11274552" cy="2688336"/>
+        </p:xfrm>
+        <a:graphic>
+          <a:graphicData uri="http://schemas.openxmlformats.org/drawingml/2006/table">
+            <a:tbl>
+              <a:tblPr firstRow="1" bandRow="1">
+                <a:tableStyleId>{5C22544A-7EE6-4342-B048-85BDC9FD1C3A}</a:tableStyleId>
+              </a:tblPr>
+              <a:tblGrid>
+                <a:gridCol w="3758184"/>
+                <a:gridCol w="3758184"/>
+                <a:gridCol w="3758184"/>
+              </a:tblGrid>
+              <a:tr h="384048">
+                <a:tc>
+                  <a:txBody>
+                    <a:bodyPr/>
+                    <a:lstStyle/>
+                    <a:p>
+                      <a:r>
+                        <a:rPr sz="1200" b="1">
+                          <a:solidFill>
+                            <a:srgbClr val="FFFFFF"/>
+                          </a:solidFill>
+                        </a:rPr>
+                        <a:t>Track</a:t>
+                      </a:r>
+                    </a:p>
+                  </a:txBody>
+                  <a:tcPr>
+                    <a:solidFill>
+                      <a:srgbClr val="1F3A5F"/>
+                    </a:solidFill>
+                  </a:tcPr>
+                </a:tc>
+                <a:tc>
+                  <a:txBody>
+                    <a:bodyPr/>
+                    <a:lstStyle/>
+                    <a:p>
+                      <a:r>
+                        <a:rPr sz="1200" b="1">
+                          <a:solidFill>
+                            <a:srgbClr val="FFFFFF"/>
+                          </a:solidFill>
+                        </a:rPr>
+                        <a:t>Why we need it</a:t>
+                      </a:r>
+                    </a:p>
+                  </a:txBody>
+                  <a:tcPr>
+                    <a:solidFill>
+                      <a:srgbClr val="1F3A5F"/>
+                    </a:solidFill>
+                  </a:tcPr>
+                </a:tc>
+                <a:tc>
+                  <a:txBody>
+                    <a:bodyPr/>
+                    <a:lstStyle/>
+                    <a:p>
+                      <a:r>
+                        <a:rPr sz="1200" b="1">
+                          <a:solidFill>
+                            <a:srgbClr val="FFFFFF"/>
+                          </a:solidFill>
+                        </a:rPr>
+                        <a:t>Baselines</a:t>
+                      </a:r>
+                    </a:p>
+                  </a:txBody>
+                  <a:tcPr>
+                    <a:solidFill>
+                      <a:srgbClr val="1F3A5F"/>
+                    </a:solidFill>
+                  </a:tcPr>
+                </a:tc>
+              </a:tr>
+              <a:tr h="384048">
+                <a:tc>
+                  <a:txBody>
+                    <a:bodyPr/>
+                    <a:lstStyle/>
+                    <a:p>
+                      <a:r>
+                        <a:rPr sz="1200" b="1">
+                          <a:solidFill>
+                            <a:srgbClr val="1F3A5F"/>
+                          </a:solidFill>
+                        </a:rPr>
+                        <a:t>PDF-&gt;MD fidelity</a:t>
+                      </a:r>
+                    </a:p>
+                  </a:txBody>
+                  <a:tcPr>
+                    <a:solidFill>
+                      <a:srgbClr val="FFFFFF"/>
+                    </a:solidFill>
+                  </a:tcPr>
+                </a:tc>
+                <a:tc>
+                  <a:txBody>
+                    <a:bodyPr/>
+                    <a:lstStyle/>
+                    <a:p>
+                      <a:r>
+                        <a:rPr sz="1200">
+                          <a:solidFill>
+                            <a:srgbClr val="444444"/>
+                          </a:solidFill>
+                        </a:rPr>
+                        <a:t>ingest errors propagate to every action</a:t>
+                      </a:r>
+                    </a:p>
+                  </a:txBody>
+                  <a:tcPr>
+                    <a:solidFill>
+                      <a:srgbClr val="FFFFFF"/>
+                    </a:solidFill>
+                  </a:tcPr>
+                </a:tc>
+                <a:tc>
+                  <a:txBody>
+                    <a:bodyPr/>
+                    <a:lstStyle/>
+                    <a:p>
+                      <a:r>
+                        <a:rPr sz="1200">
+                          <a:solidFill>
+                            <a:srgbClr val="444444"/>
+                          </a:solidFill>
+                        </a:rPr>
+                        <a:t>paper-to-md, Docling, MinerU</a:t>
+                      </a:r>
+                    </a:p>
+                  </a:txBody>
+                  <a:tcPr>
+                    <a:solidFill>
+                      <a:srgbClr val="FFFFFF"/>
+                    </a:solidFill>
+                  </a:tcPr>
+                </a:tc>
+              </a:tr>
+              <a:tr h="384048">
+                <a:tc>
+                  <a:txBody>
+                    <a:bodyPr/>
+                    <a:lstStyle/>
+                    <a:p>
+                      <a:r>
+                        <a:rPr sz="1200" b="1">
+                          <a:solidFill>
+                            <a:srgbClr val="1F3A5F"/>
+                          </a:solidFill>
+                        </a:rPr>
+                        <a:t>Figures</a:t>
+                      </a:r>
+                    </a:p>
+                  </a:txBody>
+                  <a:tcPr>
+                    <a:solidFill>
+                      <a:srgbClr val="EEF2F7"/>
+                    </a:solidFill>
+                  </a:tcPr>
+                </a:tc>
+                <a:tc>
+                  <a:txBody>
+                    <a:bodyPr/>
+                    <a:lstStyle/>
+                    <a:p>
+                      <a:r>
+                        <a:rPr sz="1200">
+                          <a:solidFill>
+                            <a:srgbClr val="444444"/>
+                          </a:solidFill>
+                        </a:rPr>
+                        <a:t>high-bar, easily-judged; backs 'writes a paper'</a:t>
+                      </a:r>
+                    </a:p>
+                  </a:txBody>
+                  <a:tcPr>
+                    <a:solidFill>
+                      <a:srgbClr val="EEF2F7"/>
+                    </a:solidFill>
+                  </a:tcPr>
+                </a:tc>
+                <a:tc>
+                  <a:txBody>
+                    <a:bodyPr/>
+                    <a:lstStyle/>
+                    <a:p>
+                      <a:r>
+                        <a:rPr sz="1200">
+                          <a:solidFill>
+                            <a:srgbClr val="444444"/>
+                          </a:solidFill>
+                        </a:rPr>
+                        <a:t>PaperBanana, DeTikZify</a:t>
+                      </a:r>
+                    </a:p>
+                  </a:txBody>
+                  <a:tcPr>
+                    <a:solidFill>
+                      <a:srgbClr val="EEF2F7"/>
+                    </a:solidFill>
+                  </a:tcPr>
+                </a:tc>
+              </a:tr>
+              <a:tr h="384048">
+                <a:tc>
+                  <a:txBody>
+                    <a:bodyPr/>
+                    <a:lstStyle/>
+                    <a:p>
+                      <a:r>
+                        <a:rPr sz="1200" b="1">
+                          <a:solidFill>
+                            <a:srgbClr val="1F3A5F"/>
+                          </a:solidFill>
+                        </a:rPr>
+                        <a:t>Citation verify</a:t>
+                      </a:r>
+                    </a:p>
+                  </a:txBody>
+                  <a:tcPr>
+                    <a:solidFill>
+                      <a:srgbClr val="FFFFFF"/>
+                    </a:solidFill>
+                  </a:tcPr>
+                </a:tc>
+                <a:tc>
+                  <a:txBody>
+                    <a:bodyPr/>
+                    <a:lstStyle/>
+                    <a:p>
+                      <a:r>
+                        <a:rPr sz="1200">
+                          <a:solidFill>
+                            <a:srgbClr val="444444"/>
+                          </a:solidFill>
+                        </a:rPr>
+                        <a:t>the grounding claim; hallucination is the top failure</a:t>
+                      </a:r>
+                    </a:p>
+                  </a:txBody>
+                  <a:tcPr>
+                    <a:solidFill>
+                      <a:srgbClr val="FFFFFF"/>
+                    </a:solidFill>
+                  </a:tcPr>
+                </a:tc>
+                <a:tc>
+                  <a:txBody>
+                    <a:bodyPr/>
+                    <a:lstStyle/>
+                    <a:p>
+                      <a:r>
+                        <a:rPr sz="1200">
+                          <a:solidFill>
+                            <a:srgbClr val="444444"/>
+                          </a:solidFill>
+                        </a:rPr>
+                        <a:t>CiteCheck, PaperOrchestra</a:t>
+                      </a:r>
+                    </a:p>
+                  </a:txBody>
+                  <a:tcPr>
+                    <a:solidFill>
+                      <a:srgbClr val="FFFFFF"/>
+                    </a:solidFill>
+                  </a:tcPr>
+                </a:tc>
+              </a:tr>
+              <a:tr h="384048">
+                <a:tc>
+                  <a:txBody>
+                    <a:bodyPr/>
+                    <a:lstStyle/>
+                    <a:p>
+                      <a:r>
+                        <a:rPr sz="1200" b="1">
+                          <a:solidFill>
+                            <a:srgbClr val="1F3A5F"/>
+                          </a:solidFill>
+                        </a:rPr>
+                        <a:t>Review</a:t>
+                      </a:r>
+                    </a:p>
+                  </a:txBody>
+                  <a:tcPr>
+                    <a:solidFill>
+                      <a:srgbClr val="EEF2F7"/>
+                    </a:solidFill>
+                  </a:tcPr>
+                </a:tc>
+                <a:tc>
+                  <a:txBody>
+                    <a:bodyPr/>
+                    <a:lstStyle/>
+                    <a:p>
+                      <a:r>
+                        <a:rPr sz="1200">
+                          <a:solidFill>
+                            <a:srgbClr val="444444"/>
+                          </a:solidFill>
+                        </a:rPr>
+                        <a:t>must track ground-truth decisions; does --ground help?</a:t>
+                      </a:r>
+                    </a:p>
+                  </a:txBody>
+                  <a:tcPr>
+                    <a:solidFill>
+                      <a:srgbClr val="EEF2F7"/>
+                    </a:solidFill>
+                  </a:tcPr>
+                </a:tc>
+                <a:tc>
+                  <a:txBody>
+                    <a:bodyPr/>
+                    <a:lstStyle/>
+                    <a:p>
+                      <a:r>
+                        <a:rPr sz="1200">
+                          <a:solidFill>
+                            <a:srgbClr val="444444"/>
+                          </a:solidFill>
+                        </a:rPr>
+                        <a:t>AgentReview, DeepReview</a:t>
+                      </a:r>
+                    </a:p>
+                  </a:txBody>
+                  <a:tcPr>
+                    <a:solidFill>
+                      <a:srgbClr val="EEF2F7"/>
+                    </a:solidFill>
+                  </a:tcPr>
+                </a:tc>
+              </a:tr>
+              <a:tr h="384048">
+                <a:tc>
+                  <a:txBody>
+                    <a:bodyPr/>
+                    <a:lstStyle/>
+                    <a:p>
+                      <a:r>
+                        <a:rPr sz="1200" b="1">
+                          <a:solidFill>
+                            <a:srgbClr val="1F3A5F"/>
+                          </a:solidFill>
+                        </a:rPr>
+                        <a:t>Writing</a:t>
+                      </a:r>
+                    </a:p>
+                  </a:txBody>
+                  <a:tcPr>
+                    <a:solidFill>
+                      <a:srgbClr val="FFFFFF"/>
+                    </a:solidFill>
+                  </a:tcPr>
+                </a:tc>
+                <a:tc>
+                  <a:txBody>
+                    <a:bodyPr/>
+                    <a:lstStyle/>
+                    <a:p>
+                      <a:r>
+                        <a:rPr sz="1200">
+                          <a:solidFill>
+                            <a:srgbClr val="444444"/>
+                          </a:solidFill>
+                        </a:rPr>
+                        <a:t>most visible output; parity = credible, not marketing</a:t>
+                      </a:r>
+                    </a:p>
+                  </a:txBody>
+                  <a:tcPr>
+                    <a:solidFill>
+                      <a:srgbClr val="FFFFFF"/>
+                    </a:solidFill>
+                  </a:tcPr>
+                </a:tc>
+                <a:tc>
+                  <a:txBody>
+                    <a:bodyPr/>
+                    <a:lstStyle/>
+                    <a:p>
+                      <a:r>
+                        <a:rPr sz="1200">
+                          <a:solidFill>
+                            <a:srgbClr val="444444"/>
+                          </a:solidFill>
+                        </a:rPr>
+                        <a:t>PaperOrchestra, AutoSurvey</a:t>
+                      </a:r>
+                    </a:p>
+                  </a:txBody>
+                  <a:tcPr>
+                    <a:solidFill>
+                      <a:srgbClr val="FFFFFF"/>
+                    </a:solidFill>
+                  </a:tcPr>
+                </a:tc>
+              </a:tr>
+              <a:tr h="384048">
+                <a:tc>
+                  <a:txBody>
+                    <a:bodyPr/>
+                    <a:lstStyle/>
+                    <a:p>
+                      <a:r>
+                        <a:rPr sz="1200" b="1">
+                          <a:solidFill>
+                            <a:srgbClr val="1F3A5F"/>
+                          </a:solidFill>
+                        </a:rPr>
+                        <a:t>Orchestration + cost</a:t>
+                      </a:r>
+                    </a:p>
+                  </a:txBody>
+                  <a:tcPr>
+                    <a:solidFill>
+                      <a:srgbClr val="EEF2F7"/>
+                    </a:solidFill>
+                  </a:tcPr>
+                </a:tc>
+                <a:tc>
+                  <a:txBody>
+                    <a:bodyPr/>
+                    <a:lstStyle/>
+                    <a:p>
+                      <a:r>
+                        <a:rPr sz="1200">
+                          <a:solidFill>
+                            <a:srgbClr val="444444"/>
+                          </a:solidFill>
+                        </a:rPr>
+                        <a:t>composability is part of the novelty; budgets</a:t>
+                      </a:r>
+                    </a:p>
+                  </a:txBody>
+                  <a:tcPr>
+                    <a:solidFill>
+                      <a:srgbClr val="EEF2F7"/>
+                    </a:solidFill>
+                  </a:tcPr>
+                </a:tc>
+                <a:tc>
+                  <a:txBody>
+                    <a:bodyPr/>
+                    <a:lstStyle/>
+                    <a:p>
+                      <a:r>
+                        <a:rPr sz="1200">
+                          <a:solidFill>
+                            <a:srgbClr val="444444"/>
+                          </a:solidFill>
+                        </a:rPr>
+                        <a:t>-</a:t>
+                      </a:r>
+                    </a:p>
+                  </a:txBody>
+                  <a:tcPr>
+                    <a:solidFill>
+                      <a:srgbClr val="EEF2F7"/>
+                    </a:solidFill>
+                  </a:tcPr>
+                </a:tc>
+              </a:tr>
+            </a:tbl>
+          </a:graphicData>
+        </a:graphic>
+      </p:graphicFrame>
+      <p:sp>
+        <p:nvSpPr>
+          <p:cNvPr id="5" name="TextBox 4"/>
+          <p:cNvSpPr txBox="1"/>
+          <p:nvPr/>
+        </p:nvSpPr>
+        <p:spPr>
+          <a:xfrm>
+            <a:off x="457200" y="3968496"/>
+            <a:ext cx="11274552" cy="1097280"/>
+          </a:xfrm>
+          <a:prstGeom prst="rect">
+            <a:avLst/>
+          </a:prstGeom>
+          <a:noFill/>
+        </p:spPr>
+        <p:txBody>
+          <a:bodyPr wrap="square">
+            <a:spAutoFit/>
+          </a:bodyPr>
+          <a:lstStyle/>
+          <a:p>
+            <a:r>
+              <a:rPr sz="1200" i="1">
+                <a:solidFill>
+                  <a:srgbClr val="2E7D32"/>
+                </a:solidFill>
+              </a:rPr>
+              <a:t>Phasing: Phase 0 automated metrics (now) -&gt; Phase 1 LLM/VLM-as-Judge -&gt; Phase 2 human win-rates.  Full plan: docs/BENCHMARK-PLAN.md</a:t>
+            </a:r>
+          </a:p>
+        </p:txBody>
+      </p:sp>
+    </p:spTree>
+  </p:cSld>
+  <p:clrMapOvr>
+    <a:masterClrMapping/>
+  </p:clrMapOvr>
+</p:sld>
+</file>
+
+<file path=ppt/slides/slide12.xml><?xml version="1.0" encoding="utf-8"?>
+<p:sld xmlns:a="http://schemas.openxmlformats.org/drawingml/2006/main" xmlns:p="http://schemas.openxmlformats.org/presentationml/2006/main" xmlns:r="http://schemas.openxmlformats.org/officeDocument/2006/relationships">
+  <p:cSld>
+    <p:spTree>
+      <p:nvGrpSpPr>
+        <p:cNvPr id="1" name=""/>
+        <p:cNvGrpSpPr/>
+        <p:nvPr/>
+      </p:nvGrpSpPr>
+      <p:grpSpPr/>
+      <p:sp>
+        <p:nvSpPr>
+          <p:cNvPr id="2" name="Rectangle 1"/>
+          <p:cNvSpPr/>
+          <p:nvPr/>
+        </p:nvSpPr>
+        <p:spPr>
+          <a:xfrm>
+            <a:off x="0" y="0"/>
+            <a:ext cx="12191695" cy="868680"/>
+          </a:xfrm>
+          <a:prstGeom prst="rect">
+            <a:avLst/>
+          </a:prstGeom>
+          <a:solidFill>
+            <a:srgbClr val="1F3A5F"/>
+          </a:solidFill>
+          <a:ln>
+            <a:noFill/>
+          </a:ln>
+          <a:effectLst/>
+        </p:spPr>
+        <p:style>
+          <a:lnRef idx="1">
+            <a:schemeClr val="accent1"/>
+          </a:lnRef>
+          <a:fillRef idx="3">
+            <a:schemeClr val="accent1"/>
+          </a:fillRef>
+          <a:effectRef idx="2">
+            <a:schemeClr val="accent1"/>
+          </a:effectRef>
+          <a:fontRef idx="minor">
+            <a:schemeClr val="lt1"/>
+          </a:fontRef>
+        </p:style>
+        <p:txBody>
+          <a:bodyPr rtlCol="0" anchor="ctr" lIns="365760"/>
+          <a:lstStyle/>
+          <a:p>
+            <a:pPr algn="ctr"/>
+            <a:r>
+              <a:rPr sz="2500" b="1">
+                <a:solidFill>
+                  <a:srgbClr val="FFFFFF"/>
+                </a:solidFill>
+              </a:rPr>
+              <a:t>9 . Justification - why this is worth doing</a:t>
+            </a:r>
+          </a:p>
+        </p:txBody>
+      </p:sp>
+      <p:sp>
+        <p:nvSpPr>
+          <p:cNvPr id="3" name="TextBox 2"/>
+          <p:cNvSpPr txBox="1"/>
+          <p:nvPr/>
+        </p:nvSpPr>
+        <p:spPr>
+          <a:xfrm>
+            <a:off x="11430000" y="6446520"/>
+            <a:ext cx="640080" cy="365760"/>
+          </a:xfrm>
+          <a:prstGeom prst="rect">
+            <a:avLst/>
+          </a:prstGeom>
+          <a:noFill/>
+        </p:spPr>
+        <p:txBody>
+          <a:bodyPr wrap="square">
+            <a:spAutoFit/>
+          </a:bodyPr>
+          <a:lstStyle/>
+          <a:p>
+            <a:r>
+              <a:rPr sz="1100">
+                <a:solidFill>
+                  <a:srgbClr val="444444"/>
+                </a:solidFill>
+              </a:rPr>
+              <a:t>11</a:t>
+            </a:r>
+          </a:p>
+        </p:txBody>
+      </p:sp>
+      <p:sp>
+        <p:nvSpPr>
+          <p:cNvPr id="4" name="TextBox 3"/>
+          <p:cNvSpPr txBox="1"/>
+          <p:nvPr/>
+        </p:nvSpPr>
+        <p:spPr>
+          <a:xfrm>
+            <a:off x="548640" y="1097280"/>
+            <a:ext cx="11064240" cy="5394960"/>
+          </a:xfrm>
+          <a:prstGeom prst="rect">
+            <a:avLst/>
+          </a:prstGeom>
+          <a:noFill/>
+        </p:spPr>
+        <p:txBody>
+          <a:bodyPr wrap="square">
+            <a:spAutoFit/>
+          </a:bodyPr>
+          <a:lstStyle/>
+          <a:p>
             <a:pPr>
               <a:spcAft>
-                <a:spcPts val="800"/>
+                <a:spcPts val="700"/>
               </a:spcAft>
             </a:pPr>
             <a:r>
-              <a:rPr sz="1700" b="1">
+              <a:rPr b="1" sz="1600">
                 <a:solidFill>
                   <a:srgbClr val="1F3A5F"/>
                 </a:solidFill>
               </a:rPr>
-              <a:t>• Done:</a:t>
-            </a:r>
-            <a:r>
-              <a:rPr sz="1700">
+              <a:t>-  A real, unoccupied gap:</a:t>
+            </a:r>
+            <a:r>
+              <a:rPr sz="1600">
                 <a:solidFill>
                   <a:srgbClr val="444444"/>
                 </a:solidFill>
               </a:rPr>
-              <a:t> 18 actions · ~460 hermetic tests + CI · live-validated (Claude/Codex/Ollama/Gemini, real citation backends) · motivation + benchmark plan · dynamic orchestrate.</a:t>
+              <a:t> surveyed 20+ systems; none unify the lifecycle as one grounded, host-invocable package (slides 3-4).</a:t>
             </a:r>
           </a:p>
           <a:p>
             <a:pPr>
               <a:spcAft>
-                <a:spcPts val="800"/>
+                <a:spcPts val="700"/>
               </a:spcAft>
             </a:pPr>
             <a:r>
-              <a:rPr sz="1700" b="1">
+              <a:rPr b="1" sz="1600">
                 <a:solidFill>
                   <a:srgbClr val="1F3A5F"/>
                 </a:solidFill>
               </a:rPr>
-              <a:t>• Next:</a:t>
-            </a:r>
-            <a:r>
-              <a:rPr sz="1700">
+              <a:t>-  Fixes the trust problem:</a:t>
+            </a:r>
+            <a:r>
+              <a:rPr sz="1600">
+                <a:solidFill>
+                  <a:srgbClr val="444444"/>
+                </a:solidFill>
+              </a:rPr>
+              <a:t> verification + source-grounded writing vs hallucination-prone generators.</a:t>
+            </a:r>
+          </a:p>
+          <a:p>
+            <a:pPr>
+              <a:spcAft>
+                <a:spcPts val="700"/>
+              </a:spcAft>
+            </a:pPr>
+            <a:r>
+              <a:rPr b="1" sz="1600">
+                <a:solidFill>
+                  <a:srgbClr val="1F3A5F"/>
+                </a:solidFill>
+              </a:rPr>
+              <a:t>-  A reusable substrate, not a one-off:</a:t>
+            </a:r>
+            <a:r>
+              <a:rPr sz="1600">
+                <a:solidFill>
+                  <a:srgbClr val="444444"/>
+                </a:solidFill>
+              </a:rPr>
+              <a:t> a host (CLIO) gains paper read/review/write as composable, on-demand capabilities; experts compose in any order.</a:t>
+            </a:r>
+          </a:p>
+          <a:p>
+            <a:pPr>
+              <a:spcAft>
+                <a:spcPts val="700"/>
+              </a:spcAft>
+            </a:pPr>
+            <a:r>
+              <a:rPr b="1" sz="1600">
+                <a:solidFill>
+                  <a:srgbClr val="1F3A5F"/>
+                </a:solidFill>
+              </a:rPr>
+              <a:t>-  Already real:</a:t>
+            </a:r>
+            <a:r>
+              <a:rPr sz="1600">
+                <a:solidFill>
+                  <a:srgbClr val="444444"/>
+                </a:solidFill>
+              </a:rPr>
+              <a:t> built, tested, demonstrable today; the benchmark plan turns the claim into numbers a reviewer will accept.</a:t>
+            </a:r>
+          </a:p>
+          <a:p>
+            <a:pPr>
+              <a:spcAft>
+                <a:spcPts val="700"/>
+              </a:spcAft>
+            </a:pPr>
+            <a:r>
+              <a:rPr b="1" sz="1600">
+                <a:solidFill>
+                  <a:srgbClr val="1F3A5F"/>
+                </a:solidFill>
+              </a:rPr>
+              <a:t>-  Objection - 'isn't this just tool orchestration?':</a:t>
+            </a:r>
+            <a:r>
+              <a:rPr sz="1600">
+                <a:solidFill>
+                  <a:srgbClr val="444444"/>
+                </a:solidFill>
+              </a:rPr>
+              <a:t> frameworks (MCP, LangGraph) are domain-agnostic plumbing that ship zero paper-lifecycle capability. AUTHOR is the missing domain package; MCP is just how a host reaches it.</a:t>
+            </a:r>
+          </a:p>
+        </p:txBody>
+      </p:sp>
+    </p:spTree>
+  </p:cSld>
+  <p:clrMapOvr>
+    <a:masterClrMapping/>
+  </p:clrMapOvr>
+</p:sld>
+</file>
+
+<file path=ppt/slides/slide13.xml><?xml version="1.0" encoding="utf-8"?>
+<p:sld xmlns:a="http://schemas.openxmlformats.org/drawingml/2006/main" xmlns:p="http://schemas.openxmlformats.org/presentationml/2006/main" xmlns:r="http://schemas.openxmlformats.org/officeDocument/2006/relationships">
+  <p:cSld>
+    <p:spTree>
+      <p:nvGrpSpPr>
+        <p:cNvPr id="1" name=""/>
+        <p:cNvGrpSpPr/>
+        <p:nvPr/>
+      </p:nvGrpSpPr>
+      <p:grpSpPr/>
+      <p:sp>
+        <p:nvSpPr>
+          <p:cNvPr id="2" name="Rectangle 1"/>
+          <p:cNvSpPr/>
+          <p:nvPr/>
+        </p:nvSpPr>
+        <p:spPr>
+          <a:xfrm>
+            <a:off x="0" y="0"/>
+            <a:ext cx="12191695" cy="868680"/>
+          </a:xfrm>
+          <a:prstGeom prst="rect">
+            <a:avLst/>
+          </a:prstGeom>
+          <a:solidFill>
+            <a:srgbClr val="1F3A5F"/>
+          </a:solidFill>
+          <a:ln>
+            <a:noFill/>
+          </a:ln>
+          <a:effectLst/>
+        </p:spPr>
+        <p:style>
+          <a:lnRef idx="1">
+            <a:schemeClr val="accent1"/>
+          </a:lnRef>
+          <a:fillRef idx="3">
+            <a:schemeClr val="accent1"/>
+          </a:fillRef>
+          <a:effectRef idx="2">
+            <a:schemeClr val="accent1"/>
+          </a:effectRef>
+          <a:fontRef idx="minor">
+            <a:schemeClr val="lt1"/>
+          </a:fontRef>
+        </p:style>
+        <p:txBody>
+          <a:bodyPr rtlCol="0" anchor="ctr" lIns="365760"/>
+          <a:lstStyle/>
+          <a:p>
+            <a:pPr algn="ctr"/>
+            <a:r>
+              <a:rPr sz="2500" b="1">
+                <a:solidFill>
+                  <a:srgbClr val="FFFFFF"/>
+                </a:solidFill>
+              </a:rPr>
+              <a:t>10 . Status &amp; next steps</a:t>
+            </a:r>
+          </a:p>
+        </p:txBody>
+      </p:sp>
+      <p:sp>
+        <p:nvSpPr>
+          <p:cNvPr id="3" name="TextBox 2"/>
+          <p:cNvSpPr txBox="1"/>
+          <p:nvPr/>
+        </p:nvSpPr>
+        <p:spPr>
+          <a:xfrm>
+            <a:off x="11430000" y="6446520"/>
+            <a:ext cx="640080" cy="365760"/>
+          </a:xfrm>
+          <a:prstGeom prst="rect">
+            <a:avLst/>
+          </a:prstGeom>
+          <a:noFill/>
+        </p:spPr>
+        <p:txBody>
+          <a:bodyPr wrap="square">
+            <a:spAutoFit/>
+          </a:bodyPr>
+          <a:lstStyle/>
+          <a:p>
+            <a:r>
+              <a:rPr sz="1100">
+                <a:solidFill>
+                  <a:srgbClr val="444444"/>
+                </a:solidFill>
+              </a:rPr>
+              <a:t>12</a:t>
+            </a:r>
+          </a:p>
+        </p:txBody>
+      </p:sp>
+      <p:sp>
+        <p:nvSpPr>
+          <p:cNvPr id="4" name="TextBox 3"/>
+          <p:cNvSpPr txBox="1"/>
+          <p:nvPr/>
+        </p:nvSpPr>
+        <p:spPr>
+          <a:xfrm>
+            <a:off x="548640" y="1097280"/>
+            <a:ext cx="11064240" cy="5394960"/>
+          </a:xfrm>
+          <a:prstGeom prst="rect">
+            <a:avLst/>
+          </a:prstGeom>
+          <a:noFill/>
+        </p:spPr>
+        <p:txBody>
+          <a:bodyPr wrap="square">
+            <a:spAutoFit/>
+          </a:bodyPr>
+          <a:lstStyle/>
+          <a:p>
+            <a:pPr>
+              <a:spcAft>
+                <a:spcPts val="700"/>
+              </a:spcAft>
+            </a:pPr>
+            <a:r>
+              <a:rPr b="1" sz="1600">
+                <a:solidFill>
+                  <a:srgbClr val="1F3A5F"/>
+                </a:solidFill>
+              </a:rPr>
+              <a:t>-  Done:</a:t>
+            </a:r>
+            <a:r>
+              <a:rPr sz="1600">
+                <a:solidFill>
+                  <a:srgbClr val="444444"/>
+                </a:solidFill>
+              </a:rPr>
+              <a:t> 18 actions . ~460 hermetic tests + CI . live-validated (Claude/Codex/Ollama/Gemini, real citation backends) . motivation + benchmark plan . dynamic orchestrate.</a:t>
+            </a:r>
+          </a:p>
+          <a:p>
+            <a:pPr>
+              <a:spcAft>
+                <a:spcPts val="700"/>
+              </a:spcAft>
+            </a:pPr>
+            <a:r>
+              <a:rPr b="1" sz="1600">
+                <a:solidFill>
+                  <a:srgbClr val="1F3A5F"/>
+                </a:solidFill>
+              </a:rPr>
+              <a:t>-  Next:</a:t>
+            </a:r>
+            <a:r>
+              <a:rPr sz="1600">
                 <a:solidFill>
                   <a:srgbClr val="444444"/>
                 </a:solidFill>
@@ -3565,7 +4453,7 @@
           <a:p>
             <a:pPr lvl="1">
               <a:spcAft>
-                <a:spcPts val="800"/>
+                <a:spcPts val="700"/>
               </a:spcAft>
             </a:pPr>
             <a:r>
@@ -3574,13 +4462,13 @@
                   <a:srgbClr val="444444"/>
                 </a:solidFill>
               </a:rPr>
-              <a:t>– Demo — prove a host agent (Claude/Codex) invokes AUTHOR as a subagent end-to-end.</a:t>
+              <a:t>   .  Demo - prove a host agent (Claude/Codex) invokes AUTHOR as a subagent end-to-end.</a:t>
             </a:r>
           </a:p>
           <a:p>
             <a:pPr lvl="1">
               <a:spcAft>
-                <a:spcPts val="800"/>
+                <a:spcPts val="700"/>
               </a:spcAft>
             </a:pPr>
             <a:r>
@@ -3589,13 +4477,13 @@
                   <a:srgbClr val="444444"/>
                 </a:solidFill>
               </a:rPr>
-              <a:t>– CLIO integration — thin MCP bridge (CLIO invokes external capability via MCP); file a CLIO feature request for an in-process subagent hook.</a:t>
+              <a:t>   .  CLIO integration - thin MCP bridge (CLIO invokes external capability via MCP); file a CLIO feature request for an in-process subagent hook.</a:t>
             </a:r>
           </a:p>
           <a:p>
             <a:pPr lvl="1">
               <a:spcAft>
-                <a:spcPts val="800"/>
+                <a:spcPts val="700"/>
               </a:spcAft>
             </a:pPr>
             <a:r>
@@ -3604,45 +4492,53 @@
                   <a:srgbClr val="444444"/>
                 </a:solidFill>
               </a:rPr>
-              <a:t>– Benchmarks — run Phase 0 metrics; scope datasets / judge models / human eval.</a:t>
+              <a:t>   .  Benchmarks - run Phase 0 metrics; scope datasets / judge models / human eval.</a:t>
             </a:r>
           </a:p>
           <a:p>
             <a:pPr>
               <a:spcAft>
-                <a:spcPts val="800"/>
+                <a:spcPts val="700"/>
               </a:spcAft>
             </a:pPr>
             <a:r>
-              <a:rPr sz="1700" b="1">
+              <a:rPr b="1" sz="1600">
                 <a:solidFill>
                   <a:srgbClr val="1F3A5F"/>
                 </a:solidFill>
               </a:rPr>
-              <a:t>• Open decisions:</a:t>
-            </a:r>
-            <a:r>
-              <a:rPr sz="1700">
+              <a:t>-  Open decisions:</a:t>
+            </a:r>
+            <a:r>
+              <a:rPr sz="1600">
                 <a:solidFill>
                   <a:srgbClr val="444444"/>
                 </a:solidFill>
               </a:rPr>
-              <a:t> the bar (beat specialists vs parity + unification) · dataset access (PaperBananaBench / PaperWritingBench) · human-eval resourcing.</a:t>
+              <a:t> the bar (beat specialists vs parity + unification) . dataset access (PaperBananaBench / PaperWritingBench) . human-eval resourcing.</a:t>
             </a:r>
           </a:p>
           <a:p>
             <a:pPr>
               <a:spcAft>
-                <a:spcPts val="800"/>
+                <a:spcPts val="700"/>
               </a:spcAft>
             </a:pPr>
             <a:r>
-              <a:rPr sz="1700">
+              <a:rPr b="1" sz="1600">
+                <a:solidFill>
+                  <a:srgbClr val="1F3A5F"/>
+                </a:solidFill>
+              </a:rPr>
+              <a:t>-  Repo:</a:t>
+            </a:r>
+            <a:r>
+              <a:rPr sz="1600">
                 <a:solidFill>
                   <a:srgbClr val="444444"/>
                 </a:solidFill>
               </a:rPr>
-              <a:t>• Repo: github.com/SIslamMun/clio-author  ·  docs/MOTIVATION.md, BENCHMARK-PLAN.md, RUNBOOK.md</a:t>
+              <a:t> github.com/SIslamMun/clio-author  .  docs/MOTIVATION.md, BENCHMARK-PLAN.md, RUNBOOK.md</a:t>
             </a:r>
           </a:p>
         </p:txBody>
@@ -3685,6 +4581,7 @@
           <a:ln>
             <a:noFill/>
           </a:ln>
+          <a:effectLst/>
         </p:spPr>
         <p:style>
           <a:lnRef idx="1">
@@ -3701,17 +4598,17 @@
           </a:fontRef>
         </p:style>
         <p:txBody>
-          <a:bodyPr rtlCol="0" anchor="ctr" wrap="square" lIns="365760"/>
+          <a:bodyPr rtlCol="0" anchor="ctr" lIns="365760"/>
           <a:lstStyle/>
           <a:p>
             <a:pPr algn="ctr"/>
             <a:r>
-              <a:rPr sz="2600" b="1">
+              <a:rPr sz="2500" b="1">
                 <a:solidFill>
                   <a:srgbClr val="FFFFFF"/>
                 </a:solidFill>
               </a:rPr>
-              <a:t>1 · What this is (and the paper)</a:t>
+              <a:t>1 . What this is (and the paper)</a:t>
             </a:r>
           </a:p>
         </p:txBody>
@@ -3724,8 +4621,8 @@
         </p:nvSpPr>
         <p:spPr>
           <a:xfrm>
-            <a:off x="548640" y="1097280"/>
-            <a:ext cx="11064240" cy="5486400"/>
+            <a:off x="11430000" y="6446520"/>
+            <a:ext cx="640080" cy="365760"/>
           </a:xfrm>
           <a:prstGeom prst="rect">
             <a:avLst/>
@@ -3738,95 +4635,128 @@
           </a:bodyPr>
           <a:lstStyle/>
           <a:p>
+            <a:r>
+              <a:rPr sz="1100">
+                <a:solidFill>
+                  <a:srgbClr val="444444"/>
+                </a:solidFill>
+              </a:rPr>
+              <a:t>1</a:t>
+            </a:r>
+          </a:p>
+        </p:txBody>
+      </p:sp>
+      <p:sp>
+        <p:nvSpPr>
+          <p:cNvPr id="4" name="TextBox 3"/>
+          <p:cNvSpPr txBox="1"/>
+          <p:nvPr/>
+        </p:nvSpPr>
+        <p:spPr>
+          <a:xfrm>
+            <a:off x="548640" y="1097280"/>
+            <a:ext cx="11064240" cy="5394960"/>
+          </a:xfrm>
+          <a:prstGeom prst="rect">
+            <a:avLst/>
+          </a:prstGeom>
+          <a:noFill/>
+        </p:spPr>
+        <p:txBody>
+          <a:bodyPr wrap="square">
+            <a:spAutoFit/>
+          </a:bodyPr>
+          <a:lstStyle/>
+          <a:p>
             <a:pPr>
               <a:spcAft>
-                <a:spcPts val="800"/>
+                <a:spcPts val="700"/>
               </a:spcAft>
             </a:pPr>
             <a:r>
-              <a:rPr sz="1700" b="1">
+              <a:rPr b="1" sz="1600">
                 <a:solidFill>
                   <a:srgbClr val="1F3A5F"/>
                 </a:solidFill>
               </a:rPr>
-              <a:t>• AUTHOR:</a:t>
-            </a:r>
-            <a:r>
-              <a:rPr sz="1700">
+              <a:t>-  AUTHOR:</a:t>
+            </a:r>
+            <a:r>
+              <a:rPr sz="1600">
                 <a:solidFill>
                   <a:srgbClr val="444444"/>
                 </a:solidFill>
               </a:rPr>
-              <a:t> one Python package that turns a paper (arXiv link / PDF / title) into clean Markdown + memory blocks, then runs specialized expert agents to answer, verify, review, plan, write, illustrate, and export — behind one interface a host agent can call.</a:t>
+              <a:t> one Python package that turns a paper (arXiv link / PDF / title) into clean Markdown + memory blocks, then runs specialized expert agents to answer, verify, review, plan, write, illustrate, and export - behind one interface a host agent can call.</a:t>
             </a:r>
           </a:p>
           <a:p>
             <a:pPr>
               <a:spcAft>
-                <a:spcPts val="800"/>
+                <a:spcPts val="700"/>
               </a:spcAft>
             </a:pPr>
             <a:r>
-              <a:rPr sz="1700" b="1">
+              <a:rPr b="1" sz="1600">
                 <a:solidFill>
                   <a:srgbClr val="1F3A5F"/>
                 </a:solidFill>
               </a:rPr>
-              <a:t>• Paper title:</a:t>
-            </a:r>
-            <a:r>
-              <a:rPr sz="1700">
+              <a:t>-  Paper title:</a:t>
+            </a:r>
+            <a:r>
+              <a:rPr sz="1600">
                 <a:solidFill>
                   <a:srgbClr val="444444"/>
                 </a:solidFill>
               </a:rPr>
-              <a:t> AUTHOR — Agentic Understanding for Thesis, Hypothesis, and Objective Research.</a:t>
+              <a:t> AUTHOR - Agentic Understanding for Thesis, Hypothesis, and Objective Research.</a:t>
             </a:r>
           </a:p>
           <a:p>
             <a:pPr>
               <a:spcAft>
-                <a:spcPts val="800"/>
+                <a:spcPts val="700"/>
               </a:spcAft>
             </a:pPr>
             <a:r>
-              <a:rPr sz="1700" b="1">
+              <a:rPr b="1" sz="1600">
                 <a:solidFill>
                   <a:srgbClr val="1F3A5F"/>
                 </a:solidFill>
               </a:rPr>
-              <a:t>• Core claim:</a:t>
-            </a:r>
-            <a:r>
-              <a:rPr sz="1700">
+              <a:t>-  Core claim:</a:t>
+            </a:r>
+            <a:r>
+              <a:rPr sz="1600">
                 <a:solidFill>
                   <a:srgbClr val="444444"/>
                 </a:solidFill>
               </a:rPr>
-              <a:t> the contribution is unifying the lifecycle in one grounded, composable package — not any single capability in isolation.</a:t>
+              <a:t> the contribution is unifying the lifecycle in one grounded, composable package - not any single capability in isolation.</a:t>
             </a:r>
           </a:p>
           <a:p>
             <a:pPr>
               <a:spcAft>
-                <a:spcPts val="800"/>
+                <a:spcPts val="700"/>
               </a:spcAft>
             </a:pPr>
             <a:r>
-              <a:rPr sz="1700" b="1">
+              <a:rPr b="1" sz="1600">
                 <a:solidFill>
                   <a:srgbClr val="1F3A5F"/>
                 </a:solidFill>
               </a:rPr>
-              <a:t>• Status:</a:t>
-            </a:r>
-            <a:r>
-              <a:rPr sz="1700">
+              <a:t>-  Status:</a:t>
+            </a:r>
+            <a:r>
+              <a:rPr sz="1600">
                 <a:solidFill>
                   <a:srgbClr val="444444"/>
                 </a:solidFill>
               </a:rPr>
-              <a:t> built end-to-end — 18 actions, ~460 hermetic tests, CI green; validated live (Claude / Codex / Ollama / Gemini vision / live citation backends).</a:t>
+              <a:t> built end-to-end - 18 actions, ~460 hermetic tests, CI green; validated live (Claude / Codex / Ollama / Gemini vision / live citation backends).</a:t>
             </a:r>
           </a:p>
         </p:txBody>
@@ -3869,6 +4799,7 @@
           <a:ln>
             <a:noFill/>
           </a:ln>
+          <a:effectLst/>
         </p:spPr>
         <p:style>
           <a:lnRef idx="1">
@@ -3885,17 +4816,17 @@
           </a:fontRef>
         </p:style>
         <p:txBody>
-          <a:bodyPr rtlCol="0" anchor="ctr" wrap="square" lIns="365760"/>
+          <a:bodyPr rtlCol="0" anchor="ctr" lIns="365760"/>
           <a:lstStyle/>
           <a:p>
             <a:pPr algn="ctr"/>
             <a:r>
-              <a:rPr sz="2600" b="1">
+              <a:rPr sz="2500" b="1">
                 <a:solidFill>
                   <a:srgbClr val="FFFFFF"/>
                 </a:solidFill>
               </a:rPr>
-              <a:t>2 · Motivation — why this is needed</a:t>
+              <a:t>2 . Motivation - why this is needed</a:t>
             </a:r>
           </a:p>
         </p:txBody>
@@ -3908,8 +4839,8 @@
         </p:nvSpPr>
         <p:spPr>
           <a:xfrm>
-            <a:off x="548640" y="1097280"/>
-            <a:ext cx="11064240" cy="5486400"/>
+            <a:off x="11430000" y="6446520"/>
+            <a:ext cx="640080" cy="365760"/>
           </a:xfrm>
           <a:prstGeom prst="rect">
             <a:avLst/>
@@ -3922,95 +4853,166 @@
           </a:bodyPr>
           <a:lstStyle/>
           <a:p>
+            <a:r>
+              <a:rPr sz="1100">
+                <a:solidFill>
+                  <a:srgbClr val="444444"/>
+                </a:solidFill>
+              </a:rPr>
+              <a:t>2</a:t>
+            </a:r>
+          </a:p>
+        </p:txBody>
+      </p:sp>
+      <p:sp>
+        <p:nvSpPr>
+          <p:cNvPr id="4" name="TextBox 3"/>
+          <p:cNvSpPr txBox="1"/>
+          <p:nvPr/>
+        </p:nvSpPr>
+        <p:spPr>
+          <a:xfrm>
+            <a:off x="548640" y="1097280"/>
+            <a:ext cx="11064240" cy="5394960"/>
+          </a:xfrm>
+          <a:prstGeom prst="rect">
+            <a:avLst/>
+          </a:prstGeom>
+          <a:noFill/>
+        </p:spPr>
+        <p:txBody>
+          <a:bodyPr wrap="square">
+            <a:spAutoFit/>
+          </a:bodyPr>
+          <a:lstStyle/>
+          <a:p>
             <a:pPr>
               <a:spcAft>
-                <a:spcPts val="800"/>
+                <a:spcPts val="700"/>
               </a:spcAft>
             </a:pPr>
             <a:r>
-              <a:rPr sz="1700" b="1">
-                <a:solidFill>
-                  <a:srgbClr val="1F3A5F"/>
-                </a:solidFill>
-              </a:rPr>
-              <a:t>• Fragmentation tax:</a:t>
-            </a:r>
-            <a:r>
-              <a:rPr sz="1700">
+              <a:rPr sz="1600">
                 <a:solidFill>
                   <a:srgbClr val="444444"/>
                 </a:solidFill>
               </a:rPr>
-              <a:t> researchers stitch together separate, non-interoperating tools — a parser, a literature-QA tool, a citation auditor, a writing agent, a figure agent, a LaTeX exporter — none sharing a data model.</a:t>
+              <a:t>-  Scientific output is exploding while the tools to process it stay siloed - reading, checking, and writing papers is still mostly manual or glued together by hand.</a:t>
             </a:r>
           </a:p>
           <a:p>
             <a:pPr>
               <a:spcAft>
-                <a:spcPts val="800"/>
+                <a:spcPts val="700"/>
               </a:spcAft>
             </a:pPr>
             <a:r>
-              <a:rPr sz="1700" b="1">
+              <a:rPr b="1" sz="1600">
                 <a:solidFill>
                   <a:srgbClr val="1F3A5F"/>
                 </a:solidFill>
               </a:rPr>
-              <a:t>• Hallucination is the central failure:</a:t>
-            </a:r>
-            <a:r>
-              <a:rPr sz="1700">
+              <a:t>-  Fragmentation tax:</a:t>
+            </a:r>
+            <a:r>
+              <a:rPr sz="1600">
                 <a:solidFill>
                   <a:srgbClr val="444444"/>
                 </a:solidFill>
               </a:rPr>
-              <a:t> LLM writing fabricates citations at high rates (78–90% reported for GPT-4o); survey generators are uniformly weak on reference quality. Trust requires grounding, not generation.</a:t>
+              <a:t> a researcher stitches together a PDF parser, a literature-QA tool, a citation auditor, a writing agent, a figure agent, and a LaTeX exporter - none sharing a data model, each re-parsing the same paper.</a:t>
             </a:r>
           </a:p>
           <a:p>
             <a:pPr>
               <a:spcAft>
-                <a:spcPts val="800"/>
+                <a:spcPts val="700"/>
               </a:spcAft>
             </a:pPr>
             <a:r>
-              <a:rPr sz="1700" b="1">
+              <a:rPr b="1" sz="1600">
                 <a:solidFill>
                   <a:srgbClr val="1F3A5F"/>
                 </a:solidFill>
               </a:rPr>
-              <a:t>• Hosts need a composable capability, not a closed pipeline:</a:t>
-            </a:r>
-            <a:r>
-              <a:rPr sz="1700">
+              <a:t>-  Hallucination is the central failure mode:</a:t>
+            </a:r>
+            <a:r>
+              <a:rPr sz="1600">
                 <a:solidFill>
                   <a:srgbClr val="444444"/>
                 </a:solidFill>
               </a:rPr>
-              <a:t> a larger agent (CLIO) should invoke paper processing/writing on demand — load, use, drop.</a:t>
+              <a:t> LLM writing fabricates citations at high rates (78-90% reported for GPT-4o); survey generators are uniformly weak on reference quality. Adoption demands grounding, not free-form generation.</a:t>
             </a:r>
           </a:p>
           <a:p>
             <a:pPr>
               <a:spcAft>
-                <a:spcPts val="800"/>
+                <a:spcPts val="700"/>
               </a:spcAft>
             </a:pPr>
             <a:r>
-              <a:rPr sz="1700" b="1">
+              <a:rPr b="1" sz="1600">
                 <a:solidFill>
                   <a:srgbClr val="1F3A5F"/>
                 </a:solidFill>
               </a:rPr>
-              <a:t>• One substrate, reused:</a:t>
-            </a:r>
-            <a:r>
-              <a:rPr sz="1700">
+              <a:t>-  Closed pipelines don't compose:</a:t>
+            </a:r>
+            <a:r>
+              <a:rPr sz="1600">
                 <a:solidFill>
                   <a:srgbClr val="444444"/>
                 </a:solidFill>
               </a:rPr>
-              <a:t> ingest once → the same memory blocks feed Q&amp;A, review, and writing.</a:t>
+              <a:t> end-to-end 'AI scientist' systems emit one artifact and stop - a host agent can't reach in and invoke just the review step, or just ingestion.</a:t>
+            </a:r>
+          </a:p>
+          <a:p>
+            <a:pPr>
+              <a:spcAft>
+                <a:spcPts val="700"/>
+              </a:spcAft>
+            </a:pPr>
+            <a:r>
+              <a:rPr b="1" sz="1600">
+                <a:solidFill>
+                  <a:srgbClr val="1F3A5F"/>
+                </a:solidFill>
+              </a:rPr>
+              <a:t>-  Hosts need an on-demand capability:</a:t>
+            </a:r>
+            <a:r>
+              <a:rPr sz="1600">
+                <a:solidFill>
+                  <a:srgbClr val="444444"/>
+                </a:solidFill>
+              </a:rPr>
+              <a:t> a larger agent (CLIO) should load paper processing/writing, use it, and drop it - like calling a library, not running a monolith.</a:t>
+            </a:r>
+          </a:p>
+          <a:p>
+            <a:pPr>
+              <a:spcAft>
+                <a:spcPts val="700"/>
+              </a:spcAft>
+            </a:pPr>
+            <a:r>
+              <a:rPr b="1" sz="1600">
+                <a:solidFill>
+                  <a:srgbClr val="1F3A5F"/>
+                </a:solidFill>
+              </a:rPr>
+              <a:t>-  One substrate, reused:</a:t>
+            </a:r>
+            <a:r>
+              <a:rPr sz="1600">
+                <a:solidFill>
+                  <a:srgbClr val="444444"/>
+                </a:solidFill>
+              </a:rPr>
+              <a:t> ingest once -&gt; the same memory blocks feed Q&amp;A, review, planning, and writing - no lossy re-parsing between stages.</a:t>
             </a:r>
           </a:p>
         </p:txBody>
@@ -4053,6 +5055,7 @@
           <a:ln>
             <a:noFill/>
           </a:ln>
+          <a:effectLst/>
         </p:spPr>
         <p:style>
           <a:lnRef idx="1">
@@ -4069,355 +5072,31 @@
           </a:fontRef>
         </p:style>
         <p:txBody>
-          <a:bodyPr rtlCol="0" anchor="ctr" wrap="square" lIns="365760"/>
+          <a:bodyPr rtlCol="0" anchor="ctr" lIns="365760"/>
           <a:lstStyle/>
           <a:p>
             <a:pPr algn="ctr"/>
             <a:r>
-              <a:rPr sz="2600" b="1">
+              <a:rPr sz="2500" b="1">
                 <a:solidFill>
                   <a:srgbClr val="FFFFFF"/>
                 </a:solidFill>
               </a:rPr>
-              <a:t>3 · The gap — nobody unifies the lifecycle</a:t>
-            </a:r>
-          </a:p>
-        </p:txBody>
-      </p:sp>
-      <p:graphicFrame>
-        <p:nvGraphicFramePr>
-          <p:cNvPr id="3" name="Table 2"/>
-          <p:cNvGraphicFramePr>
-            <a:graphicFrameLocks noGrp="1"/>
-          </p:cNvGraphicFramePr>
-          <p:nvPr/>
-        </p:nvGraphicFramePr>
-        <p:xfrm>
-          <a:off x="457200" y="1143000"/>
-          <a:ext cx="11274552" cy="1645920"/>
-        </p:xfrm>
-        <a:graphic>
-          <a:graphicData uri="http://schemas.openxmlformats.org/drawingml/2006/table">
-            <a:tbl>
-              <a:tblPr firstRow="1" bandRow="1">
-                <a:tableStyleId>{5C22544A-7EE6-4342-B048-85BDC9FD1C3A}</a:tableStyleId>
-              </a:tblPr>
-              <a:tblGrid>
-                <a:gridCol w="3291840"/>
-                <a:gridCol w="2660904"/>
-                <a:gridCol w="2660904"/>
-                <a:gridCol w="2660904"/>
-              </a:tblGrid>
-              <a:tr h="411480">
-                <a:tc>
-                  <a:txBody>
-                    <a:bodyPr/>
-                    <a:lstStyle/>
-                    <a:p>
-                      <a:r>
-                        <a:rPr sz="1300" b="1">
-                          <a:solidFill>
-                            <a:srgbClr val="FFFFFF"/>
-                          </a:solidFill>
-                        </a:rPr>
-                        <a:t>Camp</a:t>
-                      </a:r>
-                    </a:p>
-                  </a:txBody>
-                  <a:tcPr>
-                    <a:solidFill>
-                      <a:srgbClr val="1F3A5F"/>
-                    </a:solidFill>
-                  </a:tcPr>
-                </a:tc>
-                <a:tc>
-                  <a:txBody>
-                    <a:bodyPr/>
-                    <a:lstStyle/>
-                    <a:p>
-                      <a:r>
-                        <a:rPr sz="1300" b="1">
-                          <a:solidFill>
-                            <a:srgbClr val="FFFFFF"/>
-                          </a:solidFill>
-                        </a:rPr>
-                        <a:t>Examples</a:t>
-                      </a:r>
-                    </a:p>
-                  </a:txBody>
-                  <a:tcPr>
-                    <a:solidFill>
-                      <a:srgbClr val="1F3A5F"/>
-                    </a:solidFill>
-                  </a:tcPr>
-                </a:tc>
-                <a:tc>
-                  <a:txBody>
-                    <a:bodyPr/>
-                    <a:lstStyle/>
-                    <a:p>
-                      <a:r>
-                        <a:rPr sz="1300" b="1">
-                          <a:solidFill>
-                            <a:srgbClr val="FFFFFF"/>
-                          </a:solidFill>
-                        </a:rPr>
-                        <a:t>Does</a:t>
-                      </a:r>
-                    </a:p>
-                  </a:txBody>
-                  <a:tcPr>
-                    <a:solidFill>
-                      <a:srgbClr val="1F3A5F"/>
-                    </a:solidFill>
-                  </a:tcPr>
-                </a:tc>
-                <a:tc>
-                  <a:txBody>
-                    <a:bodyPr/>
-                    <a:lstStyle/>
-                    <a:p>
-                      <a:r>
-                        <a:rPr sz="1300" b="1">
-                          <a:solidFill>
-                            <a:srgbClr val="FFFFFF"/>
-                          </a:solidFill>
-                        </a:rPr>
-                        <a:t>Omits</a:t>
-                      </a:r>
-                    </a:p>
-                  </a:txBody>
-                  <a:tcPr>
-                    <a:solidFill>
-                      <a:srgbClr val="1F3A5F"/>
-                    </a:solidFill>
-                  </a:tcPr>
-                </a:tc>
-              </a:tr>
-              <a:tr h="411480">
-                <a:tc>
-                  <a:txBody>
-                    <a:bodyPr/>
-                    <a:lstStyle/>
-                    <a:p>
-                      <a:r>
-                        <a:rPr sz="1300" b="1">
-                          <a:solidFill>
-                            <a:srgbClr val="1F3A5F"/>
-                          </a:solidFill>
-                        </a:rPr>
-                        <a:t>Ingest-only parsers</a:t>
-                      </a:r>
-                    </a:p>
-                  </a:txBody>
-                  <a:tcPr/>
-                </a:tc>
-                <a:tc>
-                  <a:txBody>
-                    <a:bodyPr/>
-                    <a:lstStyle/>
-                    <a:p>
-                      <a:r>
-                        <a:rPr sz="1300">
-                          <a:solidFill>
-                            <a:srgbClr val="444444"/>
-                          </a:solidFill>
-                        </a:rPr>
-                        <a:t>Docling, MinerU</a:t>
-                      </a:r>
-                    </a:p>
-                  </a:txBody>
-                  <a:tcPr/>
-                </a:tc>
-                <a:tc>
-                  <a:txBody>
-                    <a:bodyPr/>
-                    <a:lstStyle/>
-                    <a:p>
-                      <a:r>
-                        <a:rPr sz="1300">
-                          <a:solidFill>
-                            <a:srgbClr val="444444"/>
-                          </a:solidFill>
-                        </a:rPr>
-                        <a:t>PDF→MD + vision</a:t>
-                      </a:r>
-                    </a:p>
-                  </a:txBody>
-                  <a:tcPr/>
-                </a:tc>
-                <a:tc>
-                  <a:txBody>
-                    <a:bodyPr/>
-                    <a:lstStyle/>
-                    <a:p>
-                      <a:r>
-                        <a:rPr sz="1300">
-                          <a:solidFill>
-                            <a:srgbClr val="444444"/>
-                          </a:solidFill>
-                        </a:rPr>
-                        <a:t>write / review / verify</a:t>
-                      </a:r>
-                    </a:p>
-                  </a:txBody>
-                  <a:tcPr/>
-                </a:tc>
-              </a:tr>
-              <a:tr h="411480">
-                <a:tc>
-                  <a:txBody>
-                    <a:bodyPr/>
-                    <a:lstStyle/>
-                    <a:p>
-                      <a:r>
-                        <a:rPr sz="1300" b="1">
-                          <a:solidFill>
-                            <a:srgbClr val="1F3A5F"/>
-                          </a:solidFill>
-                        </a:rPr>
-                        <a:t>End-to-end generators</a:t>
-                      </a:r>
-                    </a:p>
-                  </a:txBody>
-                  <a:tcPr/>
-                </a:tc>
-                <a:tc>
-                  <a:txBody>
-                    <a:bodyPr/>
-                    <a:lstStyle/>
-                    <a:p>
-                      <a:r>
-                        <a:rPr sz="1300">
-                          <a:solidFill>
-                            <a:srgbClr val="444444"/>
-                          </a:solidFill>
-                        </a:rPr>
-                        <a:t>AI Scientist, Agent Lab, CycleResearcher</a:t>
-                      </a:r>
-                    </a:p>
-                  </a:txBody>
-                  <a:tcPr/>
-                </a:tc>
-                <a:tc>
-                  <a:txBody>
-                    <a:bodyPr/>
-                    <a:lstStyle/>
-                    <a:p>
-                      <a:r>
-                        <a:rPr sz="1300">
-                          <a:solidFill>
-                            <a:srgbClr val="444444"/>
-                          </a:solidFill>
-                        </a:rPr>
-                        <a:t>ideate→experiment→write (closed)</a:t>
-                      </a:r>
-                    </a:p>
-                  </a:txBody>
-                  <a:tcPr/>
-                </a:tc>
-                <a:tc>
-                  <a:txBody>
-                    <a:bodyPr/>
-                    <a:lstStyle/>
-                    <a:p>
-                      <a:r>
-                        <a:rPr sz="1300">
-                          <a:solidFill>
-                            <a:srgbClr val="444444"/>
-                          </a:solidFill>
-                        </a:rPr>
-                        <a:t>external ingest, cite-verify, host API</a:t>
-                      </a:r>
-                    </a:p>
-                  </a:txBody>
-                  <a:tcPr/>
-                </a:tc>
-              </a:tr>
-              <a:tr h="411480">
-                <a:tc>
-                  <a:txBody>
-                    <a:bodyPr/>
-                    <a:lstStyle/>
-                    <a:p>
-                      <a:r>
-                        <a:rPr sz="1300" b="1">
-                          <a:solidFill>
-                            <a:srgbClr val="1F3A5F"/>
-                          </a:solidFill>
-                        </a:rPr>
-                        <a:t>Single-slice specialists</a:t>
-                      </a:r>
-                    </a:p>
-                  </a:txBody>
-                  <a:tcPr/>
-                </a:tc>
-                <a:tc>
-                  <a:txBody>
-                    <a:bodyPr/>
-                    <a:lstStyle/>
-                    <a:p>
-                      <a:r>
-                        <a:rPr sz="1300">
-                          <a:solidFill>
-                            <a:srgbClr val="444444"/>
-                          </a:solidFill>
-                        </a:rPr>
-                        <a:t>AutoSurvey, PaperBanana, CiteCheck, PaperQA2</a:t>
-                      </a:r>
-                    </a:p>
-                  </a:txBody>
-                  <a:tcPr/>
-                </a:tc>
-                <a:tc>
-                  <a:txBody>
-                    <a:bodyPr/>
-                    <a:lstStyle/>
-                    <a:p>
-                      <a:r>
-                        <a:rPr sz="1300">
-                          <a:solidFill>
-                            <a:srgbClr val="444444"/>
-                          </a:solidFill>
-                        </a:rPr>
-                        <a:t>one capability well</a:t>
-                      </a:r>
-                    </a:p>
-                  </a:txBody>
-                  <a:tcPr/>
-                </a:tc>
-                <a:tc>
-                  <a:txBody>
-                    <a:bodyPr/>
-                    <a:lstStyle/>
-                    <a:p>
-                      <a:r>
-                        <a:rPr sz="1300">
-                          <a:solidFill>
-                            <a:srgbClr val="444444"/>
-                          </a:solidFill>
-                        </a:rPr>
-                        <a:t>everything else</a:t>
-                      </a:r>
-                    </a:p>
-                  </a:txBody>
-                  <a:tcPr/>
-                </a:tc>
-              </a:tr>
-            </a:tbl>
-          </a:graphicData>
-        </a:graphic>
-      </p:graphicFrame>
-      <p:sp>
-        <p:nvSpPr>
-          <p:cNvPr id="4" name="TextBox 3"/>
+              <a:t>2b . The cost today (concretely)</a:t>
+            </a:r>
+          </a:p>
+        </p:txBody>
+      </p:sp>
+      <p:sp>
+        <p:nvSpPr>
+          <p:cNvPr id="3" name="TextBox 2"/>
           <p:cNvSpPr txBox="1"/>
           <p:nvPr/>
         </p:nvSpPr>
         <p:spPr>
           <a:xfrm>
-            <a:off x="457200" y="2880360"/>
-            <a:ext cx="11274552" cy="731520"/>
+            <a:off x="11430000" y="6446520"/>
+            <a:ext cx="640080" cy="365760"/>
           </a:xfrm>
           <a:prstGeom prst="rect">
             <a:avLst/>
@@ -4431,12 +5110,155 @@
           <a:lstStyle/>
           <a:p>
             <a:r>
-              <a:rPr sz="1200" i="1">
-                <a:solidFill>
-                  <a:srgbClr val="2E7D32"/>
-                </a:solidFill>
-              </a:rPr>
-              <a:t>The quadrant {vision ingest + grounded QA + cite-verify + review + write + figures + export} as ONE host-invocable package is held by no one. That is AUTHOR's position.</a:t>
+              <a:rPr sz="1100">
+                <a:solidFill>
+                  <a:srgbClr val="444444"/>
+                </a:solidFill>
+              </a:rPr>
+              <a:t>3</a:t>
+            </a:r>
+          </a:p>
+        </p:txBody>
+      </p:sp>
+      <p:sp>
+        <p:nvSpPr>
+          <p:cNvPr id="4" name="TextBox 3"/>
+          <p:cNvSpPr txBox="1"/>
+          <p:nvPr/>
+        </p:nvSpPr>
+        <p:spPr>
+          <a:xfrm>
+            <a:off x="548640" y="1097280"/>
+            <a:ext cx="11064240" cy="5394960"/>
+          </a:xfrm>
+          <a:prstGeom prst="rect">
+            <a:avLst/>
+          </a:prstGeom>
+          <a:noFill/>
+        </p:spPr>
+        <p:txBody>
+          <a:bodyPr wrap="square">
+            <a:spAutoFit/>
+          </a:bodyPr>
+          <a:lstStyle/>
+          <a:p>
+            <a:pPr>
+              <a:spcAft>
+                <a:spcPts val="700"/>
+              </a:spcAft>
+            </a:pPr>
+            <a:r>
+              <a:rPr sz="1600">
+                <a:solidFill>
+                  <a:srgbClr val="444444"/>
+                </a:solidFill>
+              </a:rPr>
+              <a:t>-  A typical 'process + review + write related work' task today touches 4-6 disjoint tools:</a:t>
+            </a:r>
+          </a:p>
+          <a:p>
+            <a:pPr lvl="1">
+              <a:spcAft>
+                <a:spcPts val="700"/>
+              </a:spcAft>
+            </a:pPr>
+            <a:r>
+              <a:rPr sz="1500">
+                <a:solidFill>
+                  <a:srgbClr val="444444"/>
+                </a:solidFill>
+              </a:rPr>
+              <a:t>   .  PDF -&gt; Markdown: Docling / MinerU (no writing, no citation check)</a:t>
+            </a:r>
+          </a:p>
+          <a:p>
+            <a:pPr lvl="1">
+              <a:spcAft>
+                <a:spcPts val="700"/>
+              </a:spcAft>
+            </a:pPr>
+            <a:r>
+              <a:rPr sz="1500">
+                <a:solidFill>
+                  <a:srgbClr val="444444"/>
+                </a:solidFill>
+              </a:rPr>
+              <a:t>   .  Ask questions about it: PaperQA2 / OpenScholar (separate index, separate API)</a:t>
+            </a:r>
+          </a:p>
+          <a:p>
+            <a:pPr lvl="1">
+              <a:spcAft>
+                <a:spcPts val="700"/>
+              </a:spcAft>
+            </a:pPr>
+            <a:r>
+              <a:rPr sz="1500">
+                <a:solidFill>
+                  <a:srgbClr val="444444"/>
+                </a:solidFill>
+              </a:rPr>
+              <a:t>   .  Check the references: a citation auditor (CiteCheck) - yet another tool, another format</a:t>
+            </a:r>
+          </a:p>
+          <a:p>
+            <a:pPr lvl="1">
+              <a:spcAft>
+                <a:spcPts val="700"/>
+              </a:spcAft>
+            </a:pPr>
+            <a:r>
+              <a:rPr sz="1500">
+                <a:solidFill>
+                  <a:srgbClr val="444444"/>
+                </a:solidFill>
+              </a:rPr>
+              <a:t>   .  Draft text: a survey/writing agent (AutoSurvey / PaperOrchestra) - starts over, re-ingests</a:t>
+            </a:r>
+          </a:p>
+          <a:p>
+            <a:pPr lvl="1">
+              <a:spcAft>
+                <a:spcPts val="700"/>
+              </a:spcAft>
+            </a:pPr>
+            <a:r>
+              <a:rPr sz="1500">
+                <a:solidFill>
+                  <a:srgbClr val="444444"/>
+                </a:solidFill>
+              </a:rPr>
+              <a:t>   .  Make a figure: PaperBanana; export LaTeX: a sixth step</a:t>
+            </a:r>
+          </a:p>
+          <a:p>
+            <a:pPr>
+              <a:spcAft>
+                <a:spcPts val="700"/>
+              </a:spcAft>
+            </a:pPr>
+            <a:r>
+              <a:rPr sz="1600">
+                <a:solidFill>
+                  <a:srgbClr val="444444"/>
+                </a:solidFill>
+              </a:rPr>
+              <a:t>-  Each boundary loses structure, repeats work, and adds a place for hallucinated or unverifiable output to slip in. Nothing carries the paper's grounded representation across all stages.</a:t>
+            </a:r>
+          </a:p>
+          <a:p>
+            <a:pPr>
+              <a:spcAft>
+                <a:spcPts val="700"/>
+              </a:spcAft>
+            </a:pPr>
+            <a:r>
+              <a:rPr sz="1600">
+                <a:solidFill>
+                  <a:srgbClr val="444444"/>
+                </a:solidFill>
+              </a:rPr>
+              <a:t>-  AUTHOR replaces that chain with one grounded substrate and one interface - the integration is the point.</a:t>
             </a:r>
           </a:p>
         </p:txBody>
@@ -4479,6 +5301,7 @@
           <a:ln>
             <a:noFill/>
           </a:ln>
+          <a:effectLst/>
         </p:spPr>
         <p:style>
           <a:lnRef idx="1">
@@ -4495,24 +5318,57 @@
           </a:fontRef>
         </p:style>
         <p:txBody>
-          <a:bodyPr rtlCol="0" anchor="ctr" wrap="square" lIns="365760"/>
+          <a:bodyPr rtlCol="0" anchor="ctr" lIns="365760"/>
           <a:lstStyle/>
           <a:p>
             <a:pPr algn="ctr"/>
             <a:r>
-              <a:rPr sz="2600" b="1">
+              <a:rPr sz="2500" b="1">
                 <a:solidFill>
                   <a:srgbClr val="FFFFFF"/>
                 </a:solidFill>
               </a:rPr>
-              <a:t>4 · Capability coverage (AUTHOR vs the field)</a:t>
+              <a:t>3 . The gap - nobody unifies the lifecycle</a:t>
+            </a:r>
+          </a:p>
+        </p:txBody>
+      </p:sp>
+      <p:sp>
+        <p:nvSpPr>
+          <p:cNvPr id="3" name="TextBox 2"/>
+          <p:cNvSpPr txBox="1"/>
+          <p:nvPr/>
+        </p:nvSpPr>
+        <p:spPr>
+          <a:xfrm>
+            <a:off x="11430000" y="6446520"/>
+            <a:ext cx="640080" cy="365760"/>
+          </a:xfrm>
+          <a:prstGeom prst="rect">
+            <a:avLst/>
+          </a:prstGeom>
+          <a:noFill/>
+        </p:spPr>
+        <p:txBody>
+          <a:bodyPr wrap="square">
+            <a:spAutoFit/>
+          </a:bodyPr>
+          <a:lstStyle/>
+          <a:p>
+            <a:r>
+              <a:rPr sz="1100">
+                <a:solidFill>
+                  <a:srgbClr val="444444"/>
+                </a:solidFill>
+              </a:rPr>
+              <a:t>4</a:t>
             </a:r>
           </a:p>
         </p:txBody>
       </p:sp>
       <p:graphicFrame>
         <p:nvGraphicFramePr>
-          <p:cNvPr id="3" name="Table 2"/>
+          <p:cNvPr id="4" name="Table 3"/>
           <p:cNvGraphicFramePr>
             <a:graphicFrameLocks noGrp="1"/>
           </p:cNvGraphicFramePr>
@@ -4520,7 +5376,7 @@
         </p:nvGraphicFramePr>
         <p:xfrm>
           <a:off x="457200" y="1143000"/>
-          <a:ext cx="11274552" cy="3291840"/>
+          <a:ext cx="11274552" cy="1536192"/>
         </p:xfrm>
         <a:graphic>
           <a:graphicData uri="http://schemas.openxmlformats.org/drawingml/2006/table">
@@ -4529,18 +5385,12 @@
                 <a:tableStyleId>{5C22544A-7EE6-4342-B048-85BDC9FD1C3A}</a:tableStyleId>
               </a:tblPr>
               <a:tblGrid>
-                <a:gridCol w="3291840"/>
-                <a:gridCol w="886968"/>
-                <a:gridCol w="886968"/>
-                <a:gridCol w="886968"/>
-                <a:gridCol w="886968"/>
-                <a:gridCol w="886968"/>
-                <a:gridCol w="886968"/>
-                <a:gridCol w="886968"/>
-                <a:gridCol w="886968"/>
-                <a:gridCol w="886968"/>
+                <a:gridCol w="2818638"/>
+                <a:gridCol w="2818638"/>
+                <a:gridCol w="2818638"/>
+                <a:gridCol w="2818638"/>
               </a:tblGrid>
-              <a:tr h="411480">
+              <a:tr h="384048">
                 <a:tc>
                   <a:txBody>
                     <a:bodyPr/>
@@ -4552,7 +5402,7 @@
                             <a:srgbClr val="FFFFFF"/>
                           </a:solidFill>
                         </a:rPr>
-                        <a:t>System</a:t>
+                        <a:t>Camp</a:t>
                       </a:r>
                     </a:p>
                   </a:txBody>
@@ -4573,7 +5423,7 @@
                             <a:srgbClr val="FFFFFF"/>
                           </a:solidFill>
                         </a:rPr>
-                        <a:t>In</a:t>
+                        <a:t>Examples</a:t>
                       </a:r>
                     </a:p>
                   </a:txBody>
@@ -4594,7 +5444,7 @@
                             <a:srgbClr val="FFFFFF"/>
                           </a:solidFill>
                         </a:rPr>
-                        <a:t>QA</a:t>
+                        <a:t>Does well</a:t>
                       </a:r>
                     </a:p>
                   </a:txBody>
@@ -4615,7 +5465,7 @@
                             <a:srgbClr val="FFFFFF"/>
                           </a:solidFill>
                         </a:rPr>
-                        <a:t>CV</a:t>
+                        <a:t>Omits</a:t>
                       </a:r>
                     </a:p>
                   </a:txBody>
@@ -4625,6 +5475,8 @@
                     </a:solidFill>
                   </a:tcPr>
                 </a:tc>
+              </a:tr>
+              <a:tr h="384048">
                 <a:tc>
                   <a:txBody>
                     <a:bodyPr/>
@@ -4633,19 +5485,84 @@
                       <a:r>
                         <a:rPr sz="1200" b="1">
                           <a:solidFill>
-                            <a:srgbClr val="FFFFFF"/>
-                          </a:solidFill>
-                        </a:rPr>
-                        <a:t>Rv</a:t>
-                      </a:r>
-                    </a:p>
-                  </a:txBody>
-                  <a:tcPr>
-                    <a:solidFill>
-                      <a:srgbClr val="1F3A5F"/>
-                    </a:solidFill>
-                  </a:tcPr>
-                </a:tc>
+                            <a:srgbClr val="1F3A5F"/>
+                          </a:solidFill>
+                        </a:rPr>
+                        <a:t>Ingest-only parsers</a:t>
+                      </a:r>
+                    </a:p>
+                  </a:txBody>
+                  <a:tcPr>
+                    <a:solidFill>
+                      <a:srgbClr val="FFFFFF"/>
+                    </a:solidFill>
+                  </a:tcPr>
+                </a:tc>
+                <a:tc>
+                  <a:txBody>
+                    <a:bodyPr/>
+                    <a:lstStyle/>
+                    <a:p>
+                      <a:r>
+                        <a:rPr sz="1200">
+                          <a:solidFill>
+                            <a:srgbClr val="444444"/>
+                          </a:solidFill>
+                        </a:rPr>
+                        <a:t>Docling, MinerU</a:t>
+                      </a:r>
+                    </a:p>
+                  </a:txBody>
+                  <a:tcPr>
+                    <a:solidFill>
+                      <a:srgbClr val="FFFFFF"/>
+                    </a:solidFill>
+                  </a:tcPr>
+                </a:tc>
+                <a:tc>
+                  <a:txBody>
+                    <a:bodyPr/>
+                    <a:lstStyle/>
+                    <a:p>
+                      <a:r>
+                        <a:rPr sz="1200">
+                          <a:solidFill>
+                            <a:srgbClr val="444444"/>
+                          </a:solidFill>
+                        </a:rPr>
+                        <a:t>PDF-&gt;MD + vision</a:t>
+                      </a:r>
+                    </a:p>
+                  </a:txBody>
+                  <a:tcPr>
+                    <a:solidFill>
+                      <a:srgbClr val="FFFFFF"/>
+                    </a:solidFill>
+                  </a:tcPr>
+                </a:tc>
+                <a:tc>
+                  <a:txBody>
+                    <a:bodyPr/>
+                    <a:lstStyle/>
+                    <a:p>
+                      <a:r>
+                        <a:rPr sz="1200">
+                          <a:solidFill>
+                            <a:srgbClr val="444444"/>
+                          </a:solidFill>
+                        </a:rPr>
+                        <a:t>write / review / verify / host API</a:t>
+                      </a:r>
+                    </a:p>
+                  </a:txBody>
+                  <a:tcPr>
+                    <a:solidFill>
+                      <a:srgbClr val="FFFFFF"/>
+                    </a:solidFill>
+                  </a:tcPr>
+                </a:tc>
+              </a:tr>
+              <a:tr h="384048">
                 <a:tc>
                   <a:txBody>
                     <a:bodyPr/>
@@ -4654,19 +5571,84 @@
                       <a:r>
                         <a:rPr sz="1200" b="1">
                           <a:solidFill>
-                            <a:srgbClr val="FFFFFF"/>
-                          </a:solidFill>
-                        </a:rPr>
-                        <a:t>Wr</a:t>
-                      </a:r>
-                    </a:p>
-                  </a:txBody>
-                  <a:tcPr>
-                    <a:solidFill>
-                      <a:srgbClr val="1F3A5F"/>
-                    </a:solidFill>
-                  </a:tcPr>
-                </a:tc>
+                            <a:srgbClr val="1F3A5F"/>
+                          </a:solidFill>
+                        </a:rPr>
+                        <a:t>End-to-end generators</a:t>
+                      </a:r>
+                    </a:p>
+                  </a:txBody>
+                  <a:tcPr>
+                    <a:solidFill>
+                      <a:srgbClr val="EEF2F7"/>
+                    </a:solidFill>
+                  </a:tcPr>
+                </a:tc>
+                <a:tc>
+                  <a:txBody>
+                    <a:bodyPr/>
+                    <a:lstStyle/>
+                    <a:p>
+                      <a:r>
+                        <a:rPr sz="1200">
+                          <a:solidFill>
+                            <a:srgbClr val="444444"/>
+                          </a:solidFill>
+                        </a:rPr>
+                        <a:t>AI Scientist, Agent Lab, CycleResearcher</a:t>
+                      </a:r>
+                    </a:p>
+                  </a:txBody>
+                  <a:tcPr>
+                    <a:solidFill>
+                      <a:srgbClr val="EEF2F7"/>
+                    </a:solidFill>
+                  </a:tcPr>
+                </a:tc>
+                <a:tc>
+                  <a:txBody>
+                    <a:bodyPr/>
+                    <a:lstStyle/>
+                    <a:p>
+                      <a:r>
+                        <a:rPr sz="1200">
+                          <a:solidFill>
+                            <a:srgbClr val="444444"/>
+                          </a:solidFill>
+                        </a:rPr>
+                        <a:t>ideate-&gt;experiment-&gt;write (closed)</a:t>
+                      </a:r>
+                    </a:p>
+                  </a:txBody>
+                  <a:tcPr>
+                    <a:solidFill>
+                      <a:srgbClr val="EEF2F7"/>
+                    </a:solidFill>
+                  </a:tcPr>
+                </a:tc>
+                <a:tc>
+                  <a:txBody>
+                    <a:bodyPr/>
+                    <a:lstStyle/>
+                    <a:p>
+                      <a:r>
+                        <a:rPr sz="1200">
+                          <a:solidFill>
+                            <a:srgbClr val="444444"/>
+                          </a:solidFill>
+                        </a:rPr>
+                        <a:t>external ingest, cite-verify, host API</a:t>
+                      </a:r>
+                    </a:p>
+                  </a:txBody>
+                  <a:tcPr>
+                    <a:solidFill>
+                      <a:srgbClr val="EEF2F7"/>
+                    </a:solidFill>
+                  </a:tcPr>
+                </a:tc>
+              </a:tr>
+              <a:tr h="384048">
                 <a:tc>
                   <a:txBody>
                     <a:bodyPr/>
@@ -4675,100 +5657,18 @@
                       <a:r>
                         <a:rPr sz="1200" b="1">
                           <a:solidFill>
-                            <a:srgbClr val="FFFFFF"/>
-                          </a:solidFill>
-                        </a:rPr>
-                        <a:t>Fg</a:t>
-                      </a:r>
-                    </a:p>
-                  </a:txBody>
-                  <a:tcPr>
-                    <a:solidFill>
-                      <a:srgbClr val="1F3A5F"/>
-                    </a:solidFill>
-                  </a:tcPr>
-                </a:tc>
-                <a:tc>
-                  <a:txBody>
-                    <a:bodyPr/>
-                    <a:lstStyle/>
-                    <a:p>
-                      <a:r>
-                        <a:rPr sz="1200" b="1">
-                          <a:solidFill>
-                            <a:srgbClr val="FFFFFF"/>
-                          </a:solidFill>
-                        </a:rPr>
-                        <a:t>Ex</a:t>
-                      </a:r>
-                    </a:p>
-                  </a:txBody>
-                  <a:tcPr>
-                    <a:solidFill>
-                      <a:srgbClr val="1F3A5F"/>
-                    </a:solidFill>
-                  </a:tcPr>
-                </a:tc>
-                <a:tc>
-                  <a:txBody>
-                    <a:bodyPr/>
-                    <a:lstStyle/>
-                    <a:p>
-                      <a:r>
-                        <a:rPr sz="1200" b="1">
-                          <a:solidFill>
-                            <a:srgbClr val="FFFFFF"/>
-                          </a:solidFill>
-                        </a:rPr>
-                        <a:t>1pkg</a:t>
-                      </a:r>
-                    </a:p>
-                  </a:txBody>
-                  <a:tcPr>
-                    <a:solidFill>
-                      <a:srgbClr val="1F3A5F"/>
-                    </a:solidFill>
-                  </a:tcPr>
-                </a:tc>
-                <a:tc>
-                  <a:txBody>
-                    <a:bodyPr/>
-                    <a:lstStyle/>
-                    <a:p>
-                      <a:r>
-                        <a:rPr sz="1200" b="1">
-                          <a:solidFill>
-                            <a:srgbClr val="FFFFFF"/>
-                          </a:solidFill>
-                        </a:rPr>
-                        <a:t>Host</a:t>
-                      </a:r>
-                    </a:p>
-                  </a:txBody>
-                  <a:tcPr>
-                    <a:solidFill>
-                      <a:srgbClr val="1F3A5F"/>
-                    </a:solidFill>
-                  </a:tcPr>
-                </a:tc>
-              </a:tr>
-              <a:tr h="411480">
-                <a:tc>
-                  <a:txBody>
-                    <a:bodyPr/>
-                    <a:lstStyle/>
-                    <a:p>
-                      <a:r>
-                        <a:rPr sz="1200" b="1">
-                          <a:solidFill>
                             <a:srgbClr val="1F3A5F"/>
                           </a:solidFill>
                         </a:rPr>
-                        <a:t>AUTHOR</a:t>
-                      </a:r>
-                    </a:p>
-                  </a:txBody>
-                  <a:tcPr/>
+                        <a:t>Single-slice specialists</a:t>
+                      </a:r>
+                    </a:p>
+                  </a:txBody>
+                  <a:tcPr>
+                    <a:solidFill>
+                      <a:srgbClr val="FFFFFF"/>
+                    </a:solidFill>
+                  </a:tcPr>
                 </a:tc>
                 <a:tc>
                   <a:txBody>
@@ -4781,11 +5681,15 @@
                             <a:srgbClr val="444444"/>
                           </a:solidFill>
                         </a:rPr>
-                        <a:t>Y</a:t>
-                      </a:r>
-                    </a:p>
-                  </a:txBody>
-                  <a:tcPr/>
+                        <a:t>AutoSurvey, PaperBanana, CiteCheck, PaperQA2</a:t>
+                      </a:r>
+                    </a:p>
+                  </a:txBody>
+                  <a:tcPr>
+                    <a:solidFill>
+                      <a:srgbClr val="FFFFFF"/>
+                    </a:solidFill>
+                  </a:tcPr>
                 </a:tc>
                 <a:tc>
                   <a:txBody>
@@ -4798,11 +5702,15 @@
                             <a:srgbClr val="444444"/>
                           </a:solidFill>
                         </a:rPr>
-                        <a:t>Y</a:t>
-                      </a:r>
-                    </a:p>
-                  </a:txBody>
-                  <a:tcPr/>
+                        <a:t>one capability, very well</a:t>
+                      </a:r>
+                    </a:p>
+                  </a:txBody>
+                  <a:tcPr>
+                    <a:solidFill>
+                      <a:srgbClr val="FFFFFF"/>
+                    </a:solidFill>
+                  </a:tcPr>
                 </a:tc>
                 <a:tc>
                   <a:txBody>
@@ -4815,1145 +5723,15 @@
                             <a:srgbClr val="444444"/>
                           </a:solidFill>
                         </a:rPr>
-                        <a:t>Y</a:t>
-                      </a:r>
-                    </a:p>
-                  </a:txBody>
-                  <a:tcPr/>
-                </a:tc>
-                <a:tc>
-                  <a:txBody>
-                    <a:bodyPr/>
-                    <a:lstStyle/>
-                    <a:p>
-                      <a:r>
-                        <a:rPr sz="1200">
-                          <a:solidFill>
-                            <a:srgbClr val="444444"/>
-                          </a:solidFill>
-                        </a:rPr>
-                        <a:t>Y</a:t>
-                      </a:r>
-                    </a:p>
-                  </a:txBody>
-                  <a:tcPr/>
-                </a:tc>
-                <a:tc>
-                  <a:txBody>
-                    <a:bodyPr/>
-                    <a:lstStyle/>
-                    <a:p>
-                      <a:r>
-                        <a:rPr sz="1200">
-                          <a:solidFill>
-                            <a:srgbClr val="444444"/>
-                          </a:solidFill>
-                        </a:rPr>
-                        <a:t>Y</a:t>
-                      </a:r>
-                    </a:p>
-                  </a:txBody>
-                  <a:tcPr/>
-                </a:tc>
-                <a:tc>
-                  <a:txBody>
-                    <a:bodyPr/>
-                    <a:lstStyle/>
-                    <a:p>
-                      <a:r>
-                        <a:rPr sz="1200">
-                          <a:solidFill>
-                            <a:srgbClr val="444444"/>
-                          </a:solidFill>
-                        </a:rPr>
-                        <a:t>Y</a:t>
-                      </a:r>
-                    </a:p>
-                  </a:txBody>
-                  <a:tcPr/>
-                </a:tc>
-                <a:tc>
-                  <a:txBody>
-                    <a:bodyPr/>
-                    <a:lstStyle/>
-                    <a:p>
-                      <a:r>
-                        <a:rPr sz="1200">
-                          <a:solidFill>
-                            <a:srgbClr val="444444"/>
-                          </a:solidFill>
-                        </a:rPr>
-                        <a:t>Y</a:t>
-                      </a:r>
-                    </a:p>
-                  </a:txBody>
-                  <a:tcPr/>
-                </a:tc>
-                <a:tc>
-                  <a:txBody>
-                    <a:bodyPr/>
-                    <a:lstStyle/>
-                    <a:p>
-                      <a:r>
-                        <a:rPr sz="1200">
-                          <a:solidFill>
-                            <a:srgbClr val="444444"/>
-                          </a:solidFill>
-                        </a:rPr>
-                        <a:t>Y</a:t>
-                      </a:r>
-                    </a:p>
-                  </a:txBody>
-                  <a:tcPr/>
-                </a:tc>
-                <a:tc>
-                  <a:txBody>
-                    <a:bodyPr/>
-                    <a:lstStyle/>
-                    <a:p>
-                      <a:r>
-                        <a:rPr sz="1200">
-                          <a:solidFill>
-                            <a:srgbClr val="444444"/>
-                          </a:solidFill>
-                        </a:rPr>
-                        <a:t>Y</a:t>
-                      </a:r>
-                    </a:p>
-                  </a:txBody>
-                  <a:tcPr/>
-                </a:tc>
-              </a:tr>
-              <a:tr h="411480">
-                <a:tc>
-                  <a:txBody>
-                    <a:bodyPr/>
-                    <a:lstStyle/>
-                    <a:p>
-                      <a:r>
-                        <a:rPr sz="1200" b="1">
-                          <a:solidFill>
-                            <a:srgbClr val="1F3A5F"/>
-                          </a:solidFill>
-                        </a:rPr>
-                        <a:t>AI Scientist v2</a:t>
-                      </a:r>
-                    </a:p>
-                  </a:txBody>
-                  <a:tcPr/>
-                </a:tc>
-                <a:tc>
-                  <a:txBody>
-                    <a:bodyPr/>
-                    <a:lstStyle/>
-                    <a:p>
-                      <a:r>
-                        <a:rPr sz="1200">
-                          <a:solidFill>
-                            <a:srgbClr val="444444"/>
-                          </a:solidFill>
-                        </a:rPr>
-                        <a:t>N</a:t>
-                      </a:r>
-                    </a:p>
-                  </a:txBody>
-                  <a:tcPr/>
-                </a:tc>
-                <a:tc>
-                  <a:txBody>
-                    <a:bodyPr/>
-                    <a:lstStyle/>
-                    <a:p>
-                      <a:r>
-                        <a:rPr sz="1200">
-                          <a:solidFill>
-                            <a:srgbClr val="444444"/>
-                          </a:solidFill>
-                        </a:rPr>
-                        <a:t>N</a:t>
-                      </a:r>
-                    </a:p>
-                  </a:txBody>
-                  <a:tcPr/>
-                </a:tc>
-                <a:tc>
-                  <a:txBody>
-                    <a:bodyPr/>
-                    <a:lstStyle/>
-                    <a:p>
-                      <a:r>
-                        <a:rPr sz="1200">
-                          <a:solidFill>
-                            <a:srgbClr val="444444"/>
-                          </a:solidFill>
-                        </a:rPr>
-                        <a:t>P</a:t>
-                      </a:r>
-                    </a:p>
-                  </a:txBody>
-                  <a:tcPr/>
-                </a:tc>
-                <a:tc>
-                  <a:txBody>
-                    <a:bodyPr/>
-                    <a:lstStyle/>
-                    <a:p>
-                      <a:r>
-                        <a:rPr sz="1200">
-                          <a:solidFill>
-                            <a:srgbClr val="444444"/>
-                          </a:solidFill>
-                        </a:rPr>
-                        <a:t>Y</a:t>
-                      </a:r>
-                    </a:p>
-                  </a:txBody>
-                  <a:tcPr/>
-                </a:tc>
-                <a:tc>
-                  <a:txBody>
-                    <a:bodyPr/>
-                    <a:lstStyle/>
-                    <a:p>
-                      <a:r>
-                        <a:rPr sz="1200">
-                          <a:solidFill>
-                            <a:srgbClr val="444444"/>
-                          </a:solidFill>
-                        </a:rPr>
-                        <a:t>Y</a:t>
-                      </a:r>
-                    </a:p>
-                  </a:txBody>
-                  <a:tcPr/>
-                </a:tc>
-                <a:tc>
-                  <a:txBody>
-                    <a:bodyPr/>
-                    <a:lstStyle/>
-                    <a:p>
-                      <a:r>
-                        <a:rPr sz="1200">
-                          <a:solidFill>
-                            <a:srgbClr val="444444"/>
-                          </a:solidFill>
-                        </a:rPr>
-                        <a:t>Y</a:t>
-                      </a:r>
-                    </a:p>
-                  </a:txBody>
-                  <a:tcPr/>
-                </a:tc>
-                <a:tc>
-                  <a:txBody>
-                    <a:bodyPr/>
-                    <a:lstStyle/>
-                    <a:p>
-                      <a:r>
-                        <a:rPr sz="1200">
-                          <a:solidFill>
-                            <a:srgbClr val="444444"/>
-                          </a:solidFill>
-                        </a:rPr>
-                        <a:t>Y</a:t>
-                      </a:r>
-                    </a:p>
-                  </a:txBody>
-                  <a:tcPr/>
-                </a:tc>
-                <a:tc>
-                  <a:txBody>
-                    <a:bodyPr/>
-                    <a:lstStyle/>
-                    <a:p>
-                      <a:r>
-                        <a:rPr sz="1200">
-                          <a:solidFill>
-                            <a:srgbClr val="444444"/>
-                          </a:solidFill>
-                        </a:rPr>
-                        <a:t>P</a:t>
-                      </a:r>
-                    </a:p>
-                  </a:txBody>
-                  <a:tcPr/>
-                </a:tc>
-                <a:tc>
-                  <a:txBody>
-                    <a:bodyPr/>
-                    <a:lstStyle/>
-                    <a:p>
-                      <a:r>
-                        <a:rPr sz="1200">
-                          <a:solidFill>
-                            <a:srgbClr val="444444"/>
-                          </a:solidFill>
-                        </a:rPr>
-                        <a:t>N</a:t>
-                      </a:r>
-                    </a:p>
-                  </a:txBody>
-                  <a:tcPr/>
-                </a:tc>
-              </a:tr>
-              <a:tr h="411480">
-                <a:tc>
-                  <a:txBody>
-                    <a:bodyPr/>
-                    <a:lstStyle/>
-                    <a:p>
-                      <a:r>
-                        <a:rPr sz="1200" b="1">
-                          <a:solidFill>
-                            <a:srgbClr val="1F3A5F"/>
-                          </a:solidFill>
-                        </a:rPr>
-                        <a:t>PaperOrchestra</a:t>
-                      </a:r>
-                    </a:p>
-                  </a:txBody>
-                  <a:tcPr/>
-                </a:tc>
-                <a:tc>
-                  <a:txBody>
-                    <a:bodyPr/>
-                    <a:lstStyle/>
-                    <a:p>
-                      <a:r>
-                        <a:rPr sz="1200">
-                          <a:solidFill>
-                            <a:srgbClr val="444444"/>
-                          </a:solidFill>
-                        </a:rPr>
-                        <a:t>N</a:t>
-                      </a:r>
-                    </a:p>
-                  </a:txBody>
-                  <a:tcPr/>
-                </a:tc>
-                <a:tc>
-                  <a:txBody>
-                    <a:bodyPr/>
-                    <a:lstStyle/>
-                    <a:p>
-                      <a:r>
-                        <a:rPr sz="1200">
-                          <a:solidFill>
-                            <a:srgbClr val="444444"/>
-                          </a:solidFill>
-                        </a:rPr>
-                        <a:t>P</a:t>
-                      </a:r>
-                    </a:p>
-                  </a:txBody>
-                  <a:tcPr/>
-                </a:tc>
-                <a:tc>
-                  <a:txBody>
-                    <a:bodyPr/>
-                    <a:lstStyle/>
-                    <a:p>
-                      <a:r>
-                        <a:rPr sz="1200">
-                          <a:solidFill>
-                            <a:srgbClr val="444444"/>
-                          </a:solidFill>
-                        </a:rPr>
-                        <a:t>P</a:t>
-                      </a:r>
-                    </a:p>
-                  </a:txBody>
-                  <a:tcPr/>
-                </a:tc>
-                <a:tc>
-                  <a:txBody>
-                    <a:bodyPr/>
-                    <a:lstStyle/>
-                    <a:p>
-                      <a:r>
-                        <a:rPr sz="1200">
-                          <a:solidFill>
-                            <a:srgbClr val="444444"/>
-                          </a:solidFill>
-                        </a:rPr>
-                        <a:t>P</a:t>
-                      </a:r>
-                    </a:p>
-                  </a:txBody>
-                  <a:tcPr/>
-                </a:tc>
-                <a:tc>
-                  <a:txBody>
-                    <a:bodyPr/>
-                    <a:lstStyle/>
-                    <a:p>
-                      <a:r>
-                        <a:rPr sz="1200">
-                          <a:solidFill>
-                            <a:srgbClr val="444444"/>
-                          </a:solidFill>
-                        </a:rPr>
-                        <a:t>Y</a:t>
-                      </a:r>
-                    </a:p>
-                  </a:txBody>
-                  <a:tcPr/>
-                </a:tc>
-                <a:tc>
-                  <a:txBody>
-                    <a:bodyPr/>
-                    <a:lstStyle/>
-                    <a:p>
-                      <a:r>
-                        <a:rPr sz="1200">
-                          <a:solidFill>
-                            <a:srgbClr val="444444"/>
-                          </a:solidFill>
-                        </a:rPr>
-                        <a:t>Y</a:t>
-                      </a:r>
-                    </a:p>
-                  </a:txBody>
-                  <a:tcPr/>
-                </a:tc>
-                <a:tc>
-                  <a:txBody>
-                    <a:bodyPr/>
-                    <a:lstStyle/>
-                    <a:p>
-                      <a:r>
-                        <a:rPr sz="1200">
-                          <a:solidFill>
-                            <a:srgbClr val="444444"/>
-                          </a:solidFill>
-                        </a:rPr>
-                        <a:t>Y</a:t>
-                      </a:r>
-                    </a:p>
-                  </a:txBody>
-                  <a:tcPr/>
-                </a:tc>
-                <a:tc>
-                  <a:txBody>
-                    <a:bodyPr/>
-                    <a:lstStyle/>
-                    <a:p>
-                      <a:r>
-                        <a:rPr sz="1200">
-                          <a:solidFill>
-                            <a:srgbClr val="444444"/>
-                          </a:solidFill>
-                        </a:rPr>
-                        <a:t>P</a:t>
-                      </a:r>
-                    </a:p>
-                  </a:txBody>
-                  <a:tcPr/>
-                </a:tc>
-                <a:tc>
-                  <a:txBody>
-                    <a:bodyPr/>
-                    <a:lstStyle/>
-                    <a:p>
-                      <a:r>
-                        <a:rPr sz="1200">
-                          <a:solidFill>
-                            <a:srgbClr val="444444"/>
-                          </a:solidFill>
-                        </a:rPr>
-                        <a:t>N</a:t>
-                      </a:r>
-                    </a:p>
-                  </a:txBody>
-                  <a:tcPr/>
-                </a:tc>
-              </a:tr>
-              <a:tr h="411480">
-                <a:tc>
-                  <a:txBody>
-                    <a:bodyPr/>
-                    <a:lstStyle/>
-                    <a:p>
-                      <a:r>
-                        <a:rPr sz="1200" b="1">
-                          <a:solidFill>
-                            <a:srgbClr val="1F3A5F"/>
-                          </a:solidFill>
-                        </a:rPr>
-                        <a:t>AutoSurvey</a:t>
-                      </a:r>
-                    </a:p>
-                  </a:txBody>
-                  <a:tcPr/>
-                </a:tc>
-                <a:tc>
-                  <a:txBody>
-                    <a:bodyPr/>
-                    <a:lstStyle/>
-                    <a:p>
-                      <a:r>
-                        <a:rPr sz="1200">
-                          <a:solidFill>
-                            <a:srgbClr val="444444"/>
-                          </a:solidFill>
-                        </a:rPr>
-                        <a:t>N</a:t>
-                      </a:r>
-                    </a:p>
-                  </a:txBody>
-                  <a:tcPr/>
-                </a:tc>
-                <a:tc>
-                  <a:txBody>
-                    <a:bodyPr/>
-                    <a:lstStyle/>
-                    <a:p>
-                      <a:r>
-                        <a:rPr sz="1200">
-                          <a:solidFill>
-                            <a:srgbClr val="444444"/>
-                          </a:solidFill>
-                        </a:rPr>
-                        <a:t>Y</a:t>
-                      </a:r>
-                    </a:p>
-                  </a:txBody>
-                  <a:tcPr/>
-                </a:tc>
-                <a:tc>
-                  <a:txBody>
-                    <a:bodyPr/>
-                    <a:lstStyle/>
-                    <a:p>
-                      <a:r>
-                        <a:rPr sz="1200">
-                          <a:solidFill>
-                            <a:srgbClr val="444444"/>
-                          </a:solidFill>
-                        </a:rPr>
-                        <a:t>P</a:t>
-                      </a:r>
-                    </a:p>
-                  </a:txBody>
-                  <a:tcPr/>
-                </a:tc>
-                <a:tc>
-                  <a:txBody>
-                    <a:bodyPr/>
-                    <a:lstStyle/>
-                    <a:p>
-                      <a:r>
-                        <a:rPr sz="1200">
-                          <a:solidFill>
-                            <a:srgbClr val="444444"/>
-                          </a:solidFill>
-                        </a:rPr>
-                        <a:t>N</a:t>
-                      </a:r>
-                    </a:p>
-                  </a:txBody>
-                  <a:tcPr/>
-                </a:tc>
-                <a:tc>
-                  <a:txBody>
-                    <a:bodyPr/>
-                    <a:lstStyle/>
-                    <a:p>
-                      <a:r>
-                        <a:rPr sz="1200">
-                          <a:solidFill>
-                            <a:srgbClr val="444444"/>
-                          </a:solidFill>
-                        </a:rPr>
-                        <a:t>Y</a:t>
-                      </a:r>
-                    </a:p>
-                  </a:txBody>
-                  <a:tcPr/>
-                </a:tc>
-                <a:tc>
-                  <a:txBody>
-                    <a:bodyPr/>
-                    <a:lstStyle/>
-                    <a:p>
-                      <a:r>
-                        <a:rPr sz="1200">
-                          <a:solidFill>
-                            <a:srgbClr val="444444"/>
-                          </a:solidFill>
-                        </a:rPr>
-                        <a:t>N</a:t>
-                      </a:r>
-                    </a:p>
-                  </a:txBody>
-                  <a:tcPr/>
-                </a:tc>
-                <a:tc>
-                  <a:txBody>
-                    <a:bodyPr/>
-                    <a:lstStyle/>
-                    <a:p>
-                      <a:r>
-                        <a:rPr sz="1200">
-                          <a:solidFill>
-                            <a:srgbClr val="444444"/>
-                          </a:solidFill>
-                        </a:rPr>
-                        <a:t>N</a:t>
-                      </a:r>
-                    </a:p>
-                  </a:txBody>
-                  <a:tcPr/>
-                </a:tc>
-                <a:tc>
-                  <a:txBody>
-                    <a:bodyPr/>
-                    <a:lstStyle/>
-                    <a:p>
-                      <a:r>
-                        <a:rPr sz="1200">
-                          <a:solidFill>
-                            <a:srgbClr val="444444"/>
-                          </a:solidFill>
-                        </a:rPr>
-                        <a:t>P</a:t>
-                      </a:r>
-                    </a:p>
-                  </a:txBody>
-                  <a:tcPr/>
-                </a:tc>
-                <a:tc>
-                  <a:txBody>
-                    <a:bodyPr/>
-                    <a:lstStyle/>
-                    <a:p>
-                      <a:r>
-                        <a:rPr sz="1200">
-                          <a:solidFill>
-                            <a:srgbClr val="444444"/>
-                          </a:solidFill>
-                        </a:rPr>
-                        <a:t>N</a:t>
-                      </a:r>
-                    </a:p>
-                  </a:txBody>
-                  <a:tcPr/>
-                </a:tc>
-              </a:tr>
-              <a:tr h="411480">
-                <a:tc>
-                  <a:txBody>
-                    <a:bodyPr/>
-                    <a:lstStyle/>
-                    <a:p>
-                      <a:r>
-                        <a:rPr sz="1200" b="1">
-                          <a:solidFill>
-                            <a:srgbClr val="1F3A5F"/>
-                          </a:solidFill>
-                        </a:rPr>
-                        <a:t>PaperBanana</a:t>
-                      </a:r>
-                    </a:p>
-                  </a:txBody>
-                  <a:tcPr/>
-                </a:tc>
-                <a:tc>
-                  <a:txBody>
-                    <a:bodyPr/>
-                    <a:lstStyle/>
-                    <a:p>
-                      <a:r>
-                        <a:rPr sz="1200">
-                          <a:solidFill>
-                            <a:srgbClr val="444444"/>
-                          </a:solidFill>
-                        </a:rPr>
-                        <a:t>N</a:t>
-                      </a:r>
-                    </a:p>
-                  </a:txBody>
-                  <a:tcPr/>
-                </a:tc>
-                <a:tc>
-                  <a:txBody>
-                    <a:bodyPr/>
-                    <a:lstStyle/>
-                    <a:p>
-                      <a:r>
-                        <a:rPr sz="1200">
-                          <a:solidFill>
-                            <a:srgbClr val="444444"/>
-                          </a:solidFill>
-                        </a:rPr>
-                        <a:t>P</a:t>
-                      </a:r>
-                    </a:p>
-                  </a:txBody>
-                  <a:tcPr/>
-                </a:tc>
-                <a:tc>
-                  <a:txBody>
-                    <a:bodyPr/>
-                    <a:lstStyle/>
-                    <a:p>
-                      <a:r>
-                        <a:rPr sz="1200">
-                          <a:solidFill>
-                            <a:srgbClr val="444444"/>
-                          </a:solidFill>
-                        </a:rPr>
-                        <a:t>N</a:t>
-                      </a:r>
-                    </a:p>
-                  </a:txBody>
-                  <a:tcPr/>
-                </a:tc>
-                <a:tc>
-                  <a:txBody>
-                    <a:bodyPr/>
-                    <a:lstStyle/>
-                    <a:p>
-                      <a:r>
-                        <a:rPr sz="1200">
-                          <a:solidFill>
-                            <a:srgbClr val="444444"/>
-                          </a:solidFill>
-                        </a:rPr>
-                        <a:t>P</a:t>
-                      </a:r>
-                    </a:p>
-                  </a:txBody>
-                  <a:tcPr/>
-                </a:tc>
-                <a:tc>
-                  <a:txBody>
-                    <a:bodyPr/>
-                    <a:lstStyle/>
-                    <a:p>
-                      <a:r>
-                        <a:rPr sz="1200">
-                          <a:solidFill>
-                            <a:srgbClr val="444444"/>
-                          </a:solidFill>
-                        </a:rPr>
-                        <a:t>N</a:t>
-                      </a:r>
-                    </a:p>
-                  </a:txBody>
-                  <a:tcPr/>
-                </a:tc>
-                <a:tc>
-                  <a:txBody>
-                    <a:bodyPr/>
-                    <a:lstStyle/>
-                    <a:p>
-                      <a:r>
-                        <a:rPr sz="1200">
-                          <a:solidFill>
-                            <a:srgbClr val="444444"/>
-                          </a:solidFill>
-                        </a:rPr>
-                        <a:t>Y</a:t>
-                      </a:r>
-                    </a:p>
-                  </a:txBody>
-                  <a:tcPr/>
-                </a:tc>
-                <a:tc>
-                  <a:txBody>
-                    <a:bodyPr/>
-                    <a:lstStyle/>
-                    <a:p>
-                      <a:r>
-                        <a:rPr sz="1200">
-                          <a:solidFill>
-                            <a:srgbClr val="444444"/>
-                          </a:solidFill>
-                        </a:rPr>
-                        <a:t>P</a:t>
-                      </a:r>
-                    </a:p>
-                  </a:txBody>
-                  <a:tcPr/>
-                </a:tc>
-                <a:tc>
-                  <a:txBody>
-                    <a:bodyPr/>
-                    <a:lstStyle/>
-                    <a:p>
-                      <a:r>
-                        <a:rPr sz="1200">
-                          <a:solidFill>
-                            <a:srgbClr val="444444"/>
-                          </a:solidFill>
-                        </a:rPr>
-                        <a:t>N</a:t>
-                      </a:r>
-                    </a:p>
-                  </a:txBody>
-                  <a:tcPr/>
-                </a:tc>
-                <a:tc>
-                  <a:txBody>
-                    <a:bodyPr/>
-                    <a:lstStyle/>
-                    <a:p>
-                      <a:r>
-                        <a:rPr sz="1200">
-                          <a:solidFill>
-                            <a:srgbClr val="444444"/>
-                          </a:solidFill>
-                        </a:rPr>
-                        <a:t>P</a:t>
-                      </a:r>
-                    </a:p>
-                  </a:txBody>
-                  <a:tcPr/>
-                </a:tc>
-              </a:tr>
-              <a:tr h="411480">
-                <a:tc>
-                  <a:txBody>
-                    <a:bodyPr/>
-                    <a:lstStyle/>
-                    <a:p>
-                      <a:r>
-                        <a:rPr sz="1200" b="1">
-                          <a:solidFill>
-                            <a:srgbClr val="1F3A5F"/>
-                          </a:solidFill>
-                        </a:rPr>
-                        <a:t>Docling / MinerU</a:t>
-                      </a:r>
-                    </a:p>
-                  </a:txBody>
-                  <a:tcPr/>
-                </a:tc>
-                <a:tc>
-                  <a:txBody>
-                    <a:bodyPr/>
-                    <a:lstStyle/>
-                    <a:p>
-                      <a:r>
-                        <a:rPr sz="1200">
-                          <a:solidFill>
-                            <a:srgbClr val="444444"/>
-                          </a:solidFill>
-                        </a:rPr>
-                        <a:t>Y</a:t>
-                      </a:r>
-                    </a:p>
-                  </a:txBody>
-                  <a:tcPr/>
-                </a:tc>
-                <a:tc>
-                  <a:txBody>
-                    <a:bodyPr/>
-                    <a:lstStyle/>
-                    <a:p>
-                      <a:r>
-                        <a:rPr sz="1200">
-                          <a:solidFill>
-                            <a:srgbClr val="444444"/>
-                          </a:solidFill>
-                        </a:rPr>
-                        <a:t>N</a:t>
-                      </a:r>
-                    </a:p>
-                  </a:txBody>
-                  <a:tcPr/>
-                </a:tc>
-                <a:tc>
-                  <a:txBody>
-                    <a:bodyPr/>
-                    <a:lstStyle/>
-                    <a:p>
-                      <a:r>
-                        <a:rPr sz="1200">
-                          <a:solidFill>
-                            <a:srgbClr val="444444"/>
-                          </a:solidFill>
-                        </a:rPr>
-                        <a:t>N</a:t>
-                      </a:r>
-                    </a:p>
-                  </a:txBody>
-                  <a:tcPr/>
-                </a:tc>
-                <a:tc>
-                  <a:txBody>
-                    <a:bodyPr/>
-                    <a:lstStyle/>
-                    <a:p>
-                      <a:r>
-                        <a:rPr sz="1200">
-                          <a:solidFill>
-                            <a:srgbClr val="444444"/>
-                          </a:solidFill>
-                        </a:rPr>
-                        <a:t>N</a:t>
-                      </a:r>
-                    </a:p>
-                  </a:txBody>
-                  <a:tcPr/>
-                </a:tc>
-                <a:tc>
-                  <a:txBody>
-                    <a:bodyPr/>
-                    <a:lstStyle/>
-                    <a:p>
-                      <a:r>
-                        <a:rPr sz="1200">
-                          <a:solidFill>
-                            <a:srgbClr val="444444"/>
-                          </a:solidFill>
-                        </a:rPr>
-                        <a:t>N</a:t>
-                      </a:r>
-                    </a:p>
-                  </a:txBody>
-                  <a:tcPr/>
-                </a:tc>
-                <a:tc>
-                  <a:txBody>
-                    <a:bodyPr/>
-                    <a:lstStyle/>
-                    <a:p>
-                      <a:r>
-                        <a:rPr sz="1200">
-                          <a:solidFill>
-                            <a:srgbClr val="444444"/>
-                          </a:solidFill>
-                        </a:rPr>
-                        <a:t>N</a:t>
-                      </a:r>
-                    </a:p>
-                  </a:txBody>
-                  <a:tcPr/>
-                </a:tc>
-                <a:tc>
-                  <a:txBody>
-                    <a:bodyPr/>
-                    <a:lstStyle/>
-                    <a:p>
-                      <a:r>
-                        <a:rPr sz="1200">
-                          <a:solidFill>
-                            <a:srgbClr val="444444"/>
-                          </a:solidFill>
-                        </a:rPr>
-                        <a:t>P</a:t>
-                      </a:r>
-                    </a:p>
-                  </a:txBody>
-                  <a:tcPr/>
-                </a:tc>
-                <a:tc>
-                  <a:txBody>
-                    <a:bodyPr/>
-                    <a:lstStyle/>
-                    <a:p>
-                      <a:r>
-                        <a:rPr sz="1200">
-                          <a:solidFill>
-                            <a:srgbClr val="444444"/>
-                          </a:solidFill>
-                        </a:rPr>
-                        <a:t>Y</a:t>
-                      </a:r>
-                    </a:p>
-                  </a:txBody>
-                  <a:tcPr/>
-                </a:tc>
-                <a:tc>
-                  <a:txBody>
-                    <a:bodyPr/>
-                    <a:lstStyle/>
-                    <a:p>
-                      <a:r>
-                        <a:rPr sz="1200">
-                          <a:solidFill>
-                            <a:srgbClr val="444444"/>
-                          </a:solidFill>
-                        </a:rPr>
-                        <a:t>Y</a:t>
-                      </a:r>
-                    </a:p>
-                  </a:txBody>
-                  <a:tcPr/>
-                </a:tc>
-              </a:tr>
-              <a:tr h="411480">
-                <a:tc>
-                  <a:txBody>
-                    <a:bodyPr/>
-                    <a:lstStyle/>
-                    <a:p>
-                      <a:r>
-                        <a:rPr sz="1200" b="1">
-                          <a:solidFill>
-                            <a:srgbClr val="1F3A5F"/>
-                          </a:solidFill>
-                        </a:rPr>
-                        <a:t>PaperQA2</a:t>
-                      </a:r>
-                    </a:p>
-                  </a:txBody>
-                  <a:tcPr/>
-                </a:tc>
-                <a:tc>
-                  <a:txBody>
-                    <a:bodyPr/>
-                    <a:lstStyle/>
-                    <a:p>
-                      <a:r>
-                        <a:rPr sz="1200">
-                          <a:solidFill>
-                            <a:srgbClr val="444444"/>
-                          </a:solidFill>
-                        </a:rPr>
-                        <a:t>N</a:t>
-                      </a:r>
-                    </a:p>
-                  </a:txBody>
-                  <a:tcPr/>
-                </a:tc>
-                <a:tc>
-                  <a:txBody>
-                    <a:bodyPr/>
-                    <a:lstStyle/>
-                    <a:p>
-                      <a:r>
-                        <a:rPr sz="1200">
-                          <a:solidFill>
-                            <a:srgbClr val="444444"/>
-                          </a:solidFill>
-                        </a:rPr>
-                        <a:t>Y</a:t>
-                      </a:r>
-                    </a:p>
-                  </a:txBody>
-                  <a:tcPr/>
-                </a:tc>
-                <a:tc>
-                  <a:txBody>
-                    <a:bodyPr/>
-                    <a:lstStyle/>
-                    <a:p>
-                      <a:r>
-                        <a:rPr sz="1200">
-                          <a:solidFill>
-                            <a:srgbClr val="444444"/>
-                          </a:solidFill>
-                        </a:rPr>
-                        <a:t>P</a:t>
-                      </a:r>
-                    </a:p>
-                  </a:txBody>
-                  <a:tcPr/>
-                </a:tc>
-                <a:tc>
-                  <a:txBody>
-                    <a:bodyPr/>
-                    <a:lstStyle/>
-                    <a:p>
-                      <a:r>
-                        <a:rPr sz="1200">
-                          <a:solidFill>
-                            <a:srgbClr val="444444"/>
-                          </a:solidFill>
-                        </a:rPr>
-                        <a:t>N</a:t>
-                      </a:r>
-                    </a:p>
-                  </a:txBody>
-                  <a:tcPr/>
-                </a:tc>
-                <a:tc>
-                  <a:txBody>
-                    <a:bodyPr/>
-                    <a:lstStyle/>
-                    <a:p>
-                      <a:r>
-                        <a:rPr sz="1200">
-                          <a:solidFill>
-                            <a:srgbClr val="444444"/>
-                          </a:solidFill>
-                        </a:rPr>
-                        <a:t>N</a:t>
-                      </a:r>
-                    </a:p>
-                  </a:txBody>
-                  <a:tcPr/>
-                </a:tc>
-                <a:tc>
-                  <a:txBody>
-                    <a:bodyPr/>
-                    <a:lstStyle/>
-                    <a:p>
-                      <a:r>
-                        <a:rPr sz="1200">
-                          <a:solidFill>
-                            <a:srgbClr val="444444"/>
-                          </a:solidFill>
-                        </a:rPr>
-                        <a:t>N</a:t>
-                      </a:r>
-                    </a:p>
-                  </a:txBody>
-                  <a:tcPr/>
-                </a:tc>
-                <a:tc>
-                  <a:txBody>
-                    <a:bodyPr/>
-                    <a:lstStyle/>
-                    <a:p>
-                      <a:r>
-                        <a:rPr sz="1200">
-                          <a:solidFill>
-                            <a:srgbClr val="444444"/>
-                          </a:solidFill>
-                        </a:rPr>
-                        <a:t>N</a:t>
-                      </a:r>
-                    </a:p>
-                  </a:txBody>
-                  <a:tcPr/>
-                </a:tc>
-                <a:tc>
-                  <a:txBody>
-                    <a:bodyPr/>
-                    <a:lstStyle/>
-                    <a:p>
-                      <a:r>
-                        <a:rPr sz="1200">
-                          <a:solidFill>
-                            <a:srgbClr val="444444"/>
-                          </a:solidFill>
-                        </a:rPr>
-                        <a:t>N</a:t>
-                      </a:r>
-                    </a:p>
-                  </a:txBody>
-                  <a:tcPr/>
-                </a:tc>
-                <a:tc>
-                  <a:txBody>
-                    <a:bodyPr/>
-                    <a:lstStyle/>
-                    <a:p>
-                      <a:r>
-                        <a:rPr sz="1200">
-                          <a:solidFill>
-                            <a:srgbClr val="444444"/>
-                          </a:solidFill>
-                        </a:rPr>
-                        <a:t>Y</a:t>
-                      </a:r>
-                    </a:p>
-                  </a:txBody>
-                  <a:tcPr/>
+                        <a:t>every other capability</a:t>
+                      </a:r>
+                    </a:p>
+                  </a:txBody>
+                  <a:tcPr>
+                    <a:solidFill>
+                      <a:srgbClr val="FFFFFF"/>
+                    </a:solidFill>
+                  </a:tcPr>
                 </a:tc>
               </a:tr>
             </a:tbl>
@@ -5962,14 +5740,14 @@
       </p:graphicFrame>
       <p:sp>
         <p:nvSpPr>
-          <p:cNvPr id="4" name="TextBox 3"/>
+          <p:cNvPr id="5" name="TextBox 4"/>
           <p:cNvSpPr txBox="1"/>
           <p:nvPr/>
         </p:nvSpPr>
         <p:spPr>
           <a:xfrm>
-            <a:off x="457200" y="4526280"/>
-            <a:ext cx="11274552" cy="731520"/>
+            <a:off x="457200" y="2816352"/>
+            <a:ext cx="11274552" cy="1097280"/>
           </a:xfrm>
           <a:prstGeom prst="rect">
             <a:avLst/>
@@ -5988,7 +5766,7 @@
                   <a:srgbClr val="2E7D32"/>
                 </a:solidFill>
               </a:rPr>
-              <a:t>No row but AUTHOR is all-Y. In=ingest QA=grounded-QA CV=cite-verify Rv=review Wr=write Fg=figures Ex=export. Full matrix + a source per cell: docs/MOTIVATION.md</a:t>
+              <a:t>The quadrant {vision ingest + grounded QA + cite-verify + review + write + figures + export} as ONE host-invocable package is held by no one. That is AUTHOR's position.</a:t>
             </a:r>
           </a:p>
         </p:txBody>
@@ -6031,6 +5809,7 @@
           <a:ln>
             <a:noFill/>
           </a:ln>
+          <a:effectLst/>
         </p:spPr>
         <p:style>
           <a:lnRef idx="1">
@@ -6047,17 +5826,17 @@
           </a:fontRef>
         </p:style>
         <p:txBody>
-          <a:bodyPr rtlCol="0" anchor="ctr" wrap="square" lIns="365760"/>
+          <a:bodyPr rtlCol="0" anchor="ctr" lIns="365760"/>
           <a:lstStyle/>
           <a:p>
             <a:pPr algn="ctr"/>
             <a:r>
-              <a:rPr sz="2600" b="1">
+              <a:rPr sz="2500" b="1">
                 <a:solidFill>
                   <a:srgbClr val="FFFFFF"/>
                 </a:solidFill>
               </a:rPr>
-              <a:t>5 · What we built — the 18 actions</a:t>
+              <a:t>3b . Gap - even the closest systems miss most of it</a:t>
             </a:r>
           </a:p>
         </p:txBody>
@@ -6070,8 +5849,8 @@
         </p:nvSpPr>
         <p:spPr>
           <a:xfrm>
-            <a:off x="548640" y="1097280"/>
-            <a:ext cx="11064240" cy="5486400"/>
+            <a:off x="11430000" y="6446520"/>
+            <a:ext cx="640080" cy="365760"/>
           </a:xfrm>
           <a:prstGeom prst="rect">
             <a:avLst/>
@@ -6084,156 +5863,142 @@
           </a:bodyPr>
           <a:lstStyle/>
           <a:p>
+            <a:r>
+              <a:rPr sz="1100">
+                <a:solidFill>
+                  <a:srgbClr val="444444"/>
+                </a:solidFill>
+              </a:rPr>
+              <a:t>5</a:t>
+            </a:r>
+          </a:p>
+        </p:txBody>
+      </p:sp>
+      <p:sp>
+        <p:nvSpPr>
+          <p:cNvPr id="4" name="TextBox 3"/>
+          <p:cNvSpPr txBox="1"/>
+          <p:nvPr/>
+        </p:nvSpPr>
+        <p:spPr>
+          <a:xfrm>
+            <a:off x="548640" y="1097280"/>
+            <a:ext cx="11064240" cy="5394960"/>
+          </a:xfrm>
+          <a:prstGeom prst="rect">
+            <a:avLst/>
+          </a:prstGeom>
+          <a:noFill/>
+        </p:spPr>
+        <p:txBody>
+          <a:bodyPr wrap="square">
+            <a:spAutoFit/>
+          </a:bodyPr>
+          <a:lstStyle/>
+          <a:p>
             <a:pPr>
               <a:spcAft>
-                <a:spcPts val="800"/>
+                <a:spcPts val="700"/>
               </a:spcAft>
             </a:pPr>
             <a:r>
-              <a:rPr sz="1700" b="1">
-                <a:solidFill>
-                  <a:srgbClr val="1F3A5F"/>
-                </a:solidFill>
-              </a:rPr>
-              <a:t>• Read / understand:</a:t>
-            </a:r>
-            <a:r>
-              <a:rPr sz="1700">
+              <a:rPr sz="1600">
                 <a:solidFill>
                   <a:srgbClr val="444444"/>
                 </a:solidFill>
               </a:rPr>
-              <a:t> ingest (PDF→MD + blocks + figures), ask (grounded Q&amp;A), kg (content knowledge graph)</a:t>
+              <a:t>-  AI Scientist v2 - generates NEW research end-to-end and reviews its own output, but does not ingest external PDFs, does no grounded Q&amp;A, does not verify citations against scholarly DBs, and is a closed CLI with no host tool-surface.</a:t>
             </a:r>
           </a:p>
           <a:p>
             <a:pPr>
               <a:spcAft>
-                <a:spcPts val="800"/>
+                <a:spcPts val="700"/>
               </a:spcAft>
             </a:pPr>
             <a:r>
-              <a:rPr sz="1700" b="1">
-                <a:solidFill>
-                  <a:srgbClr val="1F3A5F"/>
-                </a:solidFill>
-              </a:rPr>
-              <a:t>• Verify:</a:t>
-            </a:r>
-            <a:r>
-              <a:rPr sz="1700">
+              <a:rPr sz="1600">
                 <a:solidFill>
                   <a:srgbClr val="444444"/>
                 </a:solidFill>
               </a:rPr>
-              <a:t> cite (Semantic Scholar → OpenAlex → Crossref → arXiv cascade; suggestions only, never edits)</a:t>
+              <a:t>-  PaperOrchestra - strongest writing system (write + figures + export), but: no ingest, only partial QA, only partial citation-verify, no review, no host API.</a:t>
             </a:r>
           </a:p>
           <a:p>
             <a:pPr>
               <a:spcAft>
-                <a:spcPts val="800"/>
+                <a:spcPts val="700"/>
               </a:spcAft>
             </a:pPr>
             <a:r>
-              <a:rPr sz="1700" b="1">
-                <a:solidFill>
-                  <a:srgbClr val="1F3A5F"/>
-                </a:solidFill>
-              </a:rPr>
-              <a:t>• Review:</a:t>
-            </a:r>
-            <a:r>
-              <a:rPr sz="1700">
+              <a:rPr sz="1600">
                 <a:solidFill>
                   <a:srgbClr val="444444"/>
                 </a:solidFill>
               </a:rPr>
-              <a:t> review (decision + scores + --ground), meta_review (panel), write_review (loop)</a:t>
+              <a:t>-  AutoSurvey / SurveyForge - write cited surveys from a curated abstract DB; cannot ingest arbitrary PDFs with vision, do not verify against external DBs, no review/figures/export.</a:t>
             </a:r>
           </a:p>
           <a:p>
             <a:pPr>
               <a:spcAft>
-                <a:spcPts val="800"/>
+                <a:spcPts val="700"/>
               </a:spcAft>
             </a:pPr>
             <a:r>
-              <a:rPr sz="1700" b="1">
-                <a:solidFill>
-                  <a:srgbClr val="1F3A5F"/>
-                </a:solidFill>
-              </a:rPr>
-              <a:t>• Write:</a:t>
-            </a:r>
-            <a:r>
-              <a:rPr sz="1700">
+              <a:rPr sz="1600">
                 <a:solidFill>
                   <a:srgbClr val="444444"/>
                 </a:solidFill>
               </a:rPr>
-              <a:t> plan (tasks/claims/sources), write, edit, polish, coherence, compose (whole paper), export (→ LaTeX)</a:t>
+              <a:t>-  PaperQA2 / OpenScholar - excellent grounded literature-QA and host-invocable, but verify their OWN answers against a corpus, not a manuscript's bibliography; no ingest-with-vision, review, writing, figures, or export.</a:t>
             </a:r>
           </a:p>
           <a:p>
             <a:pPr>
               <a:spcAft>
-                <a:spcPts val="800"/>
+                <a:spcPts val="700"/>
               </a:spcAft>
             </a:pPr>
             <a:r>
-              <a:rPr sz="1700" b="1">
+              <a:rPr b="1" sz="1600">
                 <a:solidFill>
                   <a:srgbClr val="1F3A5F"/>
                 </a:solidFill>
               </a:rPr>
-              <a:t>• Illustrate:</a:t>
-            </a:r>
-            <a:r>
-              <a:rPr sz="1700">
+              <a:t>-  Docling / MinerU - best-in-class ingest, then stop:</a:t>
+            </a:r>
+            <a:r>
+              <a:rPr sz="1600">
                 <a:solidFill>
                   <a:srgbClr val="444444"/>
                 </a:solidFill>
               </a:rPr>
-              <a:t> plot, describe_figures (Gemini vision), figure_refine (loop)</a:t>
+              <a:t> nothing downstream.</a:t>
             </a:r>
           </a:p>
           <a:p>
             <a:pPr>
               <a:spcAft>
-                <a:spcPts val="800"/>
+                <a:spcPts val="700"/>
               </a:spcAft>
             </a:pPr>
             <a:r>
-              <a:rPr sz="1700" b="1">
+              <a:rPr b="1" sz="1600">
                 <a:solidFill>
                   <a:srgbClr val="1F3A5F"/>
                 </a:solidFill>
               </a:rPr>
-              <a:t>• Drive:</a:t>
-            </a:r>
-            <a:r>
-              <a:rPr sz="1700">
+              <a:t>-  Takeaway:</a:t>
+            </a:r>
+            <a:r>
+              <a:rPr sz="1600">
                 <a:solidFill>
                   <a:srgbClr val="444444"/>
                 </a:solidFill>
               </a:rPr>
-              <a:t> orchestrate (goal → plan a sequence of the above → execute)</a:t>
-            </a:r>
-          </a:p>
-          <a:p>
-            <a:pPr>
-              <a:spcAft>
-                <a:spcPts val="800"/>
-              </a:spcAft>
-            </a:pPr>
-            <a:r>
-              <a:rPr sz="1700">
-                <a:solidFill>
-                  <a:srgbClr val="444444"/>
-                </a:solidFill>
-              </a:rPr>
-              <a:t>• One adapter (capabilities() + run(action, payload)) + a CLI — stateless, JSON in/out, never raises.</a:t>
+              <a:t> the capabilities exist but are disjoint across systems and don't interoperate - exactly the integration gap AUTHOR closes.</a:t>
             </a:r>
           </a:p>
         </p:txBody>
@@ -6276,6 +6041,7 @@
           <a:ln>
             <a:noFill/>
           </a:ln>
+          <a:effectLst/>
         </p:spPr>
         <p:style>
           <a:lnRef idx="1">
@@ -6292,17 +6058,17 @@
           </a:fontRef>
         </p:style>
         <p:txBody>
-          <a:bodyPr rtlCol="0" anchor="ctr" wrap="square" lIns="365760"/>
+          <a:bodyPr rtlCol="0" anchor="ctr" lIns="365760"/>
           <a:lstStyle/>
           <a:p>
             <a:pPr algn="ctr"/>
             <a:r>
-              <a:rPr sz="2600" b="1">
+              <a:rPr sz="2500" b="1">
                 <a:solidFill>
                   <a:srgbClr val="FFFFFF"/>
                 </a:solidFill>
               </a:rPr>
-              <a:t>6 · References &amp; artifacts we built on</a:t>
+              <a:t>4 . Capability coverage (AUTHOR vs the field)</a:t>
             </a:r>
           </a:p>
         </p:txBody>
@@ -6315,8 +6081,8 @@
         </p:nvSpPr>
         <p:spPr>
           <a:xfrm>
-            <a:off x="548640" y="1097280"/>
-            <a:ext cx="11064240" cy="5486400"/>
+            <a:off x="11430000" y="6446520"/>
+            <a:ext cx="640080" cy="365760"/>
           </a:xfrm>
           <a:prstGeom prst="rect">
             <a:avLst/>
@@ -6329,124 +6095,1776 @@
           </a:bodyPr>
           <a:lstStyle/>
           <a:p>
-            <a:pPr>
-              <a:spcAft>
-                <a:spcPts val="800"/>
-              </a:spcAft>
-            </a:pPr>
-            <a:r>
-              <a:rPr sz="1700" b="1">
-                <a:solidFill>
-                  <a:srgbClr val="1F3A5F"/>
-                </a:solidFill>
-              </a:rPr>
-              <a:t>• Combined (the mandate):</a:t>
-            </a:r>
-            <a:r>
-              <a:rPr sz="1700">
+            <a:r>
+              <a:rPr sz="1100">
                 <a:solidFill>
                   <a:srgbClr val="444444"/>
                 </a:solidFill>
               </a:rPr>
-              <a:t/>
-            </a:r>
-          </a:p>
-          <a:p>
-            <a:pPr lvl="1">
-              <a:spcAft>
-                <a:spcPts val="800"/>
-              </a:spcAft>
-            </a:pPr>
-            <a:r>
-              <a:rPr sz="1500">
-                <a:solidFill>
-                  <a:srgbClr val="444444"/>
-                </a:solidFill>
-              </a:rPr>
-              <a:t>– Processing — paper-to-md (+ phagocyte) and PaperBanana (arXiv 2601.23265)</a:t>
-            </a:r>
-          </a:p>
-          <a:p>
-            <a:pPr lvl="1">
-              <a:spcAft>
-                <a:spcPts val="800"/>
-              </a:spcAft>
-            </a:pPr>
-            <a:r>
-              <a:rPr sz="1500">
-                <a:solidFill>
-                  <a:srgbClr val="444444"/>
-                </a:solidFill>
-              </a:rPr>
-              <a:t>– Writing / editing — wtf-p and PaperOrchestra (arXiv 2604.05018)</a:t>
-            </a:r>
-          </a:p>
-          <a:p>
-            <a:pPr>
-              <a:spcAft>
-                <a:spcPts val="800"/>
-              </a:spcAft>
-            </a:pPr>
-            <a:r>
-              <a:rPr sz="1700" b="1">
-                <a:solidFill>
-                  <a:srgbClr val="1F3A5F"/>
-                </a:solidFill>
-              </a:rPr>
-              <a:t>• Harness references (concepts re-implemented, not copied):</a:t>
-            </a:r>
-            <a:r>
-              <a:rPr sz="1700">
-                <a:solidFill>
-                  <a:srgbClr val="444444"/>
-                </a:solidFill>
-              </a:rPr>
-              <a:t/>
-            </a:r>
-          </a:p>
-          <a:p>
-            <a:pPr lvl="1">
-              <a:spcAft>
-                <a:spcPts val="800"/>
-              </a:spcAft>
-            </a:pPr>
-            <a:r>
-              <a:rPr sz="1500">
-                <a:solidFill>
-                  <a:srgbClr val="444444"/>
-                </a:solidFill>
-              </a:rPr>
-              <a:t>– papervizagent — orchestrator + expert agents + critic loop → CriticRefine + figure_agent</a:t>
-            </a:r>
-          </a:p>
-          <a:p>
-            <a:pPr lvl="1">
-              <a:spcAft>
-                <a:spcPts val="800"/>
-              </a:spcAft>
-            </a:pPr>
-            <a:r>
-              <a:rPr sz="1500">
-                <a:solidFill>
-                  <a:srgbClr val="444444"/>
-                </a:solidFill>
-              </a:rPr>
-              <a:t>– protoneo/knowledge (AGPL) — BaseAgent / deliberation patterns / KG → harness/ + kg</a:t>
-            </a:r>
-          </a:p>
-          <a:p>
-            <a:pPr>
-              <a:spcAft>
-                <a:spcPts val="800"/>
-              </a:spcAft>
-            </a:pPr>
-            <a:r>
-              <a:rPr sz="1700">
-                <a:solidFill>
-                  <a:srgbClr val="444444"/>
-                </a:solidFill>
-              </a:rPr>
-              <a:t>• All cloned in artifact/repos/; both papers in artifact/papers/; deep-study notes in artifact/notes/. License-clean (BSD-3-Clause; no AGPL code copied).</a:t>
+              <a:t>6</a:t>
+            </a:r>
+          </a:p>
+        </p:txBody>
+      </p:sp>
+      <p:graphicFrame>
+        <p:nvGraphicFramePr>
+          <p:cNvPr id="4" name="Table 3"/>
+          <p:cNvGraphicFramePr>
+            <a:graphicFrameLocks noGrp="1"/>
+          </p:cNvGraphicFramePr>
+          <p:nvPr/>
+        </p:nvGraphicFramePr>
+        <p:xfrm>
+          <a:off x="457200" y="1143000"/>
+          <a:ext cx="11274552" cy="3072384"/>
+        </p:xfrm>
+        <a:graphic>
+          <a:graphicData uri="http://schemas.openxmlformats.org/drawingml/2006/table">
+            <a:tbl>
+              <a:tblPr firstRow="1" bandRow="1">
+                <a:tableStyleId>{5C22544A-7EE6-4342-B048-85BDC9FD1C3A}</a:tableStyleId>
+              </a:tblPr>
+              <a:tblGrid>
+                <a:gridCol w="1127455"/>
+                <a:gridCol w="1127455"/>
+                <a:gridCol w="1127455"/>
+                <a:gridCol w="1127455"/>
+                <a:gridCol w="1127455"/>
+                <a:gridCol w="1127455"/>
+                <a:gridCol w="1127455"/>
+                <a:gridCol w="1127455"/>
+                <a:gridCol w="1127455"/>
+                <a:gridCol w="1127457"/>
+              </a:tblGrid>
+              <a:tr h="384048">
+                <a:tc>
+                  <a:txBody>
+                    <a:bodyPr/>
+                    <a:lstStyle/>
+                    <a:p>
+                      <a:r>
+                        <a:rPr sz="1200" b="1">
+                          <a:solidFill>
+                            <a:srgbClr val="FFFFFF"/>
+                          </a:solidFill>
+                        </a:rPr>
+                        <a:t>System</a:t>
+                      </a:r>
+                    </a:p>
+                  </a:txBody>
+                  <a:tcPr>
+                    <a:solidFill>
+                      <a:srgbClr val="1F3A5F"/>
+                    </a:solidFill>
+                  </a:tcPr>
+                </a:tc>
+                <a:tc>
+                  <a:txBody>
+                    <a:bodyPr/>
+                    <a:lstStyle/>
+                    <a:p>
+                      <a:r>
+                        <a:rPr sz="1200" b="1">
+                          <a:solidFill>
+                            <a:srgbClr val="FFFFFF"/>
+                          </a:solidFill>
+                        </a:rPr>
+                        <a:t>In</a:t>
+                      </a:r>
+                    </a:p>
+                  </a:txBody>
+                  <a:tcPr>
+                    <a:solidFill>
+                      <a:srgbClr val="1F3A5F"/>
+                    </a:solidFill>
+                  </a:tcPr>
+                </a:tc>
+                <a:tc>
+                  <a:txBody>
+                    <a:bodyPr/>
+                    <a:lstStyle/>
+                    <a:p>
+                      <a:r>
+                        <a:rPr sz="1200" b="1">
+                          <a:solidFill>
+                            <a:srgbClr val="FFFFFF"/>
+                          </a:solidFill>
+                        </a:rPr>
+                        <a:t>QA</a:t>
+                      </a:r>
+                    </a:p>
+                  </a:txBody>
+                  <a:tcPr>
+                    <a:solidFill>
+                      <a:srgbClr val="1F3A5F"/>
+                    </a:solidFill>
+                  </a:tcPr>
+                </a:tc>
+                <a:tc>
+                  <a:txBody>
+                    <a:bodyPr/>
+                    <a:lstStyle/>
+                    <a:p>
+                      <a:r>
+                        <a:rPr sz="1200" b="1">
+                          <a:solidFill>
+                            <a:srgbClr val="FFFFFF"/>
+                          </a:solidFill>
+                        </a:rPr>
+                        <a:t>CV</a:t>
+                      </a:r>
+                    </a:p>
+                  </a:txBody>
+                  <a:tcPr>
+                    <a:solidFill>
+                      <a:srgbClr val="1F3A5F"/>
+                    </a:solidFill>
+                  </a:tcPr>
+                </a:tc>
+                <a:tc>
+                  <a:txBody>
+                    <a:bodyPr/>
+                    <a:lstStyle/>
+                    <a:p>
+                      <a:r>
+                        <a:rPr sz="1200" b="1">
+                          <a:solidFill>
+                            <a:srgbClr val="FFFFFF"/>
+                          </a:solidFill>
+                        </a:rPr>
+                        <a:t>Rv</a:t>
+                      </a:r>
+                    </a:p>
+                  </a:txBody>
+                  <a:tcPr>
+                    <a:solidFill>
+                      <a:srgbClr val="1F3A5F"/>
+                    </a:solidFill>
+                  </a:tcPr>
+                </a:tc>
+                <a:tc>
+                  <a:txBody>
+                    <a:bodyPr/>
+                    <a:lstStyle/>
+                    <a:p>
+                      <a:r>
+                        <a:rPr sz="1200" b="1">
+                          <a:solidFill>
+                            <a:srgbClr val="FFFFFF"/>
+                          </a:solidFill>
+                        </a:rPr>
+                        <a:t>Wr</a:t>
+                      </a:r>
+                    </a:p>
+                  </a:txBody>
+                  <a:tcPr>
+                    <a:solidFill>
+                      <a:srgbClr val="1F3A5F"/>
+                    </a:solidFill>
+                  </a:tcPr>
+                </a:tc>
+                <a:tc>
+                  <a:txBody>
+                    <a:bodyPr/>
+                    <a:lstStyle/>
+                    <a:p>
+                      <a:r>
+                        <a:rPr sz="1200" b="1">
+                          <a:solidFill>
+                            <a:srgbClr val="FFFFFF"/>
+                          </a:solidFill>
+                        </a:rPr>
+                        <a:t>Fg</a:t>
+                      </a:r>
+                    </a:p>
+                  </a:txBody>
+                  <a:tcPr>
+                    <a:solidFill>
+                      <a:srgbClr val="1F3A5F"/>
+                    </a:solidFill>
+                  </a:tcPr>
+                </a:tc>
+                <a:tc>
+                  <a:txBody>
+                    <a:bodyPr/>
+                    <a:lstStyle/>
+                    <a:p>
+                      <a:r>
+                        <a:rPr sz="1200" b="1">
+                          <a:solidFill>
+                            <a:srgbClr val="FFFFFF"/>
+                          </a:solidFill>
+                        </a:rPr>
+                        <a:t>Ex</a:t>
+                      </a:r>
+                    </a:p>
+                  </a:txBody>
+                  <a:tcPr>
+                    <a:solidFill>
+                      <a:srgbClr val="1F3A5F"/>
+                    </a:solidFill>
+                  </a:tcPr>
+                </a:tc>
+                <a:tc>
+                  <a:txBody>
+                    <a:bodyPr/>
+                    <a:lstStyle/>
+                    <a:p>
+                      <a:r>
+                        <a:rPr sz="1200" b="1">
+                          <a:solidFill>
+                            <a:srgbClr val="FFFFFF"/>
+                          </a:solidFill>
+                        </a:rPr>
+                        <a:t>1pkg</a:t>
+                      </a:r>
+                    </a:p>
+                  </a:txBody>
+                  <a:tcPr>
+                    <a:solidFill>
+                      <a:srgbClr val="1F3A5F"/>
+                    </a:solidFill>
+                  </a:tcPr>
+                </a:tc>
+                <a:tc>
+                  <a:txBody>
+                    <a:bodyPr/>
+                    <a:lstStyle/>
+                    <a:p>
+                      <a:r>
+                        <a:rPr sz="1200" b="1">
+                          <a:solidFill>
+                            <a:srgbClr val="FFFFFF"/>
+                          </a:solidFill>
+                        </a:rPr>
+                        <a:t>Host</a:t>
+                      </a:r>
+                    </a:p>
+                  </a:txBody>
+                  <a:tcPr>
+                    <a:solidFill>
+                      <a:srgbClr val="1F3A5F"/>
+                    </a:solidFill>
+                  </a:tcPr>
+                </a:tc>
+              </a:tr>
+              <a:tr h="384048">
+                <a:tc>
+                  <a:txBody>
+                    <a:bodyPr/>
+                    <a:lstStyle/>
+                    <a:p>
+                      <a:r>
+                        <a:rPr sz="1200" b="1">
+                          <a:solidFill>
+                            <a:srgbClr val="1F3A5F"/>
+                          </a:solidFill>
+                        </a:rPr>
+                        <a:t>AUTHOR</a:t>
+                      </a:r>
+                    </a:p>
+                  </a:txBody>
+                  <a:tcPr>
+                    <a:solidFill>
+                      <a:srgbClr val="FFFFFF"/>
+                    </a:solidFill>
+                  </a:tcPr>
+                </a:tc>
+                <a:tc>
+                  <a:txBody>
+                    <a:bodyPr/>
+                    <a:lstStyle/>
+                    <a:p>
+                      <a:r>
+                        <a:rPr sz="1200">
+                          <a:solidFill>
+                            <a:srgbClr val="444444"/>
+                          </a:solidFill>
+                        </a:rPr>
+                        <a:t>Y</a:t>
+                      </a:r>
+                    </a:p>
+                  </a:txBody>
+                  <a:tcPr>
+                    <a:solidFill>
+                      <a:srgbClr val="FFFFFF"/>
+                    </a:solidFill>
+                  </a:tcPr>
+                </a:tc>
+                <a:tc>
+                  <a:txBody>
+                    <a:bodyPr/>
+                    <a:lstStyle/>
+                    <a:p>
+                      <a:r>
+                        <a:rPr sz="1200">
+                          <a:solidFill>
+                            <a:srgbClr val="444444"/>
+                          </a:solidFill>
+                        </a:rPr>
+                        <a:t>Y</a:t>
+                      </a:r>
+                    </a:p>
+                  </a:txBody>
+                  <a:tcPr>
+                    <a:solidFill>
+                      <a:srgbClr val="FFFFFF"/>
+                    </a:solidFill>
+                  </a:tcPr>
+                </a:tc>
+                <a:tc>
+                  <a:txBody>
+                    <a:bodyPr/>
+                    <a:lstStyle/>
+                    <a:p>
+                      <a:r>
+                        <a:rPr sz="1200">
+                          <a:solidFill>
+                            <a:srgbClr val="444444"/>
+                          </a:solidFill>
+                        </a:rPr>
+                        <a:t>Y</a:t>
+                      </a:r>
+                    </a:p>
+                  </a:txBody>
+                  <a:tcPr>
+                    <a:solidFill>
+                      <a:srgbClr val="FFFFFF"/>
+                    </a:solidFill>
+                  </a:tcPr>
+                </a:tc>
+                <a:tc>
+                  <a:txBody>
+                    <a:bodyPr/>
+                    <a:lstStyle/>
+                    <a:p>
+                      <a:r>
+                        <a:rPr sz="1200">
+                          <a:solidFill>
+                            <a:srgbClr val="444444"/>
+                          </a:solidFill>
+                        </a:rPr>
+                        <a:t>Y</a:t>
+                      </a:r>
+                    </a:p>
+                  </a:txBody>
+                  <a:tcPr>
+                    <a:solidFill>
+                      <a:srgbClr val="FFFFFF"/>
+                    </a:solidFill>
+                  </a:tcPr>
+                </a:tc>
+                <a:tc>
+                  <a:txBody>
+                    <a:bodyPr/>
+                    <a:lstStyle/>
+                    <a:p>
+                      <a:r>
+                        <a:rPr sz="1200">
+                          <a:solidFill>
+                            <a:srgbClr val="444444"/>
+                          </a:solidFill>
+                        </a:rPr>
+                        <a:t>Y</a:t>
+                      </a:r>
+                    </a:p>
+                  </a:txBody>
+                  <a:tcPr>
+                    <a:solidFill>
+                      <a:srgbClr val="FFFFFF"/>
+                    </a:solidFill>
+                  </a:tcPr>
+                </a:tc>
+                <a:tc>
+                  <a:txBody>
+                    <a:bodyPr/>
+                    <a:lstStyle/>
+                    <a:p>
+                      <a:r>
+                        <a:rPr sz="1200">
+                          <a:solidFill>
+                            <a:srgbClr val="444444"/>
+                          </a:solidFill>
+                        </a:rPr>
+                        <a:t>Y</a:t>
+                      </a:r>
+                    </a:p>
+                  </a:txBody>
+                  <a:tcPr>
+                    <a:solidFill>
+                      <a:srgbClr val="FFFFFF"/>
+                    </a:solidFill>
+                  </a:tcPr>
+                </a:tc>
+                <a:tc>
+                  <a:txBody>
+                    <a:bodyPr/>
+                    <a:lstStyle/>
+                    <a:p>
+                      <a:r>
+                        <a:rPr sz="1200">
+                          <a:solidFill>
+                            <a:srgbClr val="444444"/>
+                          </a:solidFill>
+                        </a:rPr>
+                        <a:t>Y</a:t>
+                      </a:r>
+                    </a:p>
+                  </a:txBody>
+                  <a:tcPr>
+                    <a:solidFill>
+                      <a:srgbClr val="FFFFFF"/>
+                    </a:solidFill>
+                  </a:tcPr>
+                </a:tc>
+                <a:tc>
+                  <a:txBody>
+                    <a:bodyPr/>
+                    <a:lstStyle/>
+                    <a:p>
+                      <a:r>
+                        <a:rPr sz="1200">
+                          <a:solidFill>
+                            <a:srgbClr val="444444"/>
+                          </a:solidFill>
+                        </a:rPr>
+                        <a:t>Y</a:t>
+                      </a:r>
+                    </a:p>
+                  </a:txBody>
+                  <a:tcPr>
+                    <a:solidFill>
+                      <a:srgbClr val="FFFFFF"/>
+                    </a:solidFill>
+                  </a:tcPr>
+                </a:tc>
+                <a:tc>
+                  <a:txBody>
+                    <a:bodyPr/>
+                    <a:lstStyle/>
+                    <a:p>
+                      <a:r>
+                        <a:rPr sz="1200">
+                          <a:solidFill>
+                            <a:srgbClr val="444444"/>
+                          </a:solidFill>
+                        </a:rPr>
+                        <a:t>Y</a:t>
+                      </a:r>
+                    </a:p>
+                  </a:txBody>
+                  <a:tcPr>
+                    <a:solidFill>
+                      <a:srgbClr val="FFFFFF"/>
+                    </a:solidFill>
+                  </a:tcPr>
+                </a:tc>
+              </a:tr>
+              <a:tr h="384048">
+                <a:tc>
+                  <a:txBody>
+                    <a:bodyPr/>
+                    <a:lstStyle/>
+                    <a:p>
+                      <a:r>
+                        <a:rPr sz="1200" b="1">
+                          <a:solidFill>
+                            <a:srgbClr val="1F3A5F"/>
+                          </a:solidFill>
+                        </a:rPr>
+                        <a:t>AI Scientist v2</a:t>
+                      </a:r>
+                    </a:p>
+                  </a:txBody>
+                  <a:tcPr>
+                    <a:solidFill>
+                      <a:srgbClr val="EEF2F7"/>
+                    </a:solidFill>
+                  </a:tcPr>
+                </a:tc>
+                <a:tc>
+                  <a:txBody>
+                    <a:bodyPr/>
+                    <a:lstStyle/>
+                    <a:p>
+                      <a:r>
+                        <a:rPr sz="1200">
+                          <a:solidFill>
+                            <a:srgbClr val="444444"/>
+                          </a:solidFill>
+                        </a:rPr>
+                        <a:t>N</a:t>
+                      </a:r>
+                    </a:p>
+                  </a:txBody>
+                  <a:tcPr>
+                    <a:solidFill>
+                      <a:srgbClr val="EEF2F7"/>
+                    </a:solidFill>
+                  </a:tcPr>
+                </a:tc>
+                <a:tc>
+                  <a:txBody>
+                    <a:bodyPr/>
+                    <a:lstStyle/>
+                    <a:p>
+                      <a:r>
+                        <a:rPr sz="1200">
+                          <a:solidFill>
+                            <a:srgbClr val="444444"/>
+                          </a:solidFill>
+                        </a:rPr>
+                        <a:t>N</a:t>
+                      </a:r>
+                    </a:p>
+                  </a:txBody>
+                  <a:tcPr>
+                    <a:solidFill>
+                      <a:srgbClr val="EEF2F7"/>
+                    </a:solidFill>
+                  </a:tcPr>
+                </a:tc>
+                <a:tc>
+                  <a:txBody>
+                    <a:bodyPr/>
+                    <a:lstStyle/>
+                    <a:p>
+                      <a:r>
+                        <a:rPr sz="1200">
+                          <a:solidFill>
+                            <a:srgbClr val="444444"/>
+                          </a:solidFill>
+                        </a:rPr>
+                        <a:t>P</a:t>
+                      </a:r>
+                    </a:p>
+                  </a:txBody>
+                  <a:tcPr>
+                    <a:solidFill>
+                      <a:srgbClr val="EEF2F7"/>
+                    </a:solidFill>
+                  </a:tcPr>
+                </a:tc>
+                <a:tc>
+                  <a:txBody>
+                    <a:bodyPr/>
+                    <a:lstStyle/>
+                    <a:p>
+                      <a:r>
+                        <a:rPr sz="1200">
+                          <a:solidFill>
+                            <a:srgbClr val="444444"/>
+                          </a:solidFill>
+                        </a:rPr>
+                        <a:t>Y</a:t>
+                      </a:r>
+                    </a:p>
+                  </a:txBody>
+                  <a:tcPr>
+                    <a:solidFill>
+                      <a:srgbClr val="EEF2F7"/>
+                    </a:solidFill>
+                  </a:tcPr>
+                </a:tc>
+                <a:tc>
+                  <a:txBody>
+                    <a:bodyPr/>
+                    <a:lstStyle/>
+                    <a:p>
+                      <a:r>
+                        <a:rPr sz="1200">
+                          <a:solidFill>
+                            <a:srgbClr val="444444"/>
+                          </a:solidFill>
+                        </a:rPr>
+                        <a:t>Y</a:t>
+                      </a:r>
+                    </a:p>
+                  </a:txBody>
+                  <a:tcPr>
+                    <a:solidFill>
+                      <a:srgbClr val="EEF2F7"/>
+                    </a:solidFill>
+                  </a:tcPr>
+                </a:tc>
+                <a:tc>
+                  <a:txBody>
+                    <a:bodyPr/>
+                    <a:lstStyle/>
+                    <a:p>
+                      <a:r>
+                        <a:rPr sz="1200">
+                          <a:solidFill>
+                            <a:srgbClr val="444444"/>
+                          </a:solidFill>
+                        </a:rPr>
+                        <a:t>Y</a:t>
+                      </a:r>
+                    </a:p>
+                  </a:txBody>
+                  <a:tcPr>
+                    <a:solidFill>
+                      <a:srgbClr val="EEF2F7"/>
+                    </a:solidFill>
+                  </a:tcPr>
+                </a:tc>
+                <a:tc>
+                  <a:txBody>
+                    <a:bodyPr/>
+                    <a:lstStyle/>
+                    <a:p>
+                      <a:r>
+                        <a:rPr sz="1200">
+                          <a:solidFill>
+                            <a:srgbClr val="444444"/>
+                          </a:solidFill>
+                        </a:rPr>
+                        <a:t>Y</a:t>
+                      </a:r>
+                    </a:p>
+                  </a:txBody>
+                  <a:tcPr>
+                    <a:solidFill>
+                      <a:srgbClr val="EEF2F7"/>
+                    </a:solidFill>
+                  </a:tcPr>
+                </a:tc>
+                <a:tc>
+                  <a:txBody>
+                    <a:bodyPr/>
+                    <a:lstStyle/>
+                    <a:p>
+                      <a:r>
+                        <a:rPr sz="1200">
+                          <a:solidFill>
+                            <a:srgbClr val="444444"/>
+                          </a:solidFill>
+                        </a:rPr>
+                        <a:t>P</a:t>
+                      </a:r>
+                    </a:p>
+                  </a:txBody>
+                  <a:tcPr>
+                    <a:solidFill>
+                      <a:srgbClr val="EEF2F7"/>
+                    </a:solidFill>
+                  </a:tcPr>
+                </a:tc>
+                <a:tc>
+                  <a:txBody>
+                    <a:bodyPr/>
+                    <a:lstStyle/>
+                    <a:p>
+                      <a:r>
+                        <a:rPr sz="1200">
+                          <a:solidFill>
+                            <a:srgbClr val="444444"/>
+                          </a:solidFill>
+                        </a:rPr>
+                        <a:t>N</a:t>
+                      </a:r>
+                    </a:p>
+                  </a:txBody>
+                  <a:tcPr>
+                    <a:solidFill>
+                      <a:srgbClr val="EEF2F7"/>
+                    </a:solidFill>
+                  </a:tcPr>
+                </a:tc>
+              </a:tr>
+              <a:tr h="384048">
+                <a:tc>
+                  <a:txBody>
+                    <a:bodyPr/>
+                    <a:lstStyle/>
+                    <a:p>
+                      <a:r>
+                        <a:rPr sz="1200" b="1">
+                          <a:solidFill>
+                            <a:srgbClr val="1F3A5F"/>
+                          </a:solidFill>
+                        </a:rPr>
+                        <a:t>PaperOrchestra</a:t>
+                      </a:r>
+                    </a:p>
+                  </a:txBody>
+                  <a:tcPr>
+                    <a:solidFill>
+                      <a:srgbClr val="FFFFFF"/>
+                    </a:solidFill>
+                  </a:tcPr>
+                </a:tc>
+                <a:tc>
+                  <a:txBody>
+                    <a:bodyPr/>
+                    <a:lstStyle/>
+                    <a:p>
+                      <a:r>
+                        <a:rPr sz="1200">
+                          <a:solidFill>
+                            <a:srgbClr val="444444"/>
+                          </a:solidFill>
+                        </a:rPr>
+                        <a:t>N</a:t>
+                      </a:r>
+                    </a:p>
+                  </a:txBody>
+                  <a:tcPr>
+                    <a:solidFill>
+                      <a:srgbClr val="FFFFFF"/>
+                    </a:solidFill>
+                  </a:tcPr>
+                </a:tc>
+                <a:tc>
+                  <a:txBody>
+                    <a:bodyPr/>
+                    <a:lstStyle/>
+                    <a:p>
+                      <a:r>
+                        <a:rPr sz="1200">
+                          <a:solidFill>
+                            <a:srgbClr val="444444"/>
+                          </a:solidFill>
+                        </a:rPr>
+                        <a:t>P</a:t>
+                      </a:r>
+                    </a:p>
+                  </a:txBody>
+                  <a:tcPr>
+                    <a:solidFill>
+                      <a:srgbClr val="FFFFFF"/>
+                    </a:solidFill>
+                  </a:tcPr>
+                </a:tc>
+                <a:tc>
+                  <a:txBody>
+                    <a:bodyPr/>
+                    <a:lstStyle/>
+                    <a:p>
+                      <a:r>
+                        <a:rPr sz="1200">
+                          <a:solidFill>
+                            <a:srgbClr val="444444"/>
+                          </a:solidFill>
+                        </a:rPr>
+                        <a:t>P</a:t>
+                      </a:r>
+                    </a:p>
+                  </a:txBody>
+                  <a:tcPr>
+                    <a:solidFill>
+                      <a:srgbClr val="FFFFFF"/>
+                    </a:solidFill>
+                  </a:tcPr>
+                </a:tc>
+                <a:tc>
+                  <a:txBody>
+                    <a:bodyPr/>
+                    <a:lstStyle/>
+                    <a:p>
+                      <a:r>
+                        <a:rPr sz="1200">
+                          <a:solidFill>
+                            <a:srgbClr val="444444"/>
+                          </a:solidFill>
+                        </a:rPr>
+                        <a:t>P</a:t>
+                      </a:r>
+                    </a:p>
+                  </a:txBody>
+                  <a:tcPr>
+                    <a:solidFill>
+                      <a:srgbClr val="FFFFFF"/>
+                    </a:solidFill>
+                  </a:tcPr>
+                </a:tc>
+                <a:tc>
+                  <a:txBody>
+                    <a:bodyPr/>
+                    <a:lstStyle/>
+                    <a:p>
+                      <a:r>
+                        <a:rPr sz="1200">
+                          <a:solidFill>
+                            <a:srgbClr val="444444"/>
+                          </a:solidFill>
+                        </a:rPr>
+                        <a:t>Y</a:t>
+                      </a:r>
+                    </a:p>
+                  </a:txBody>
+                  <a:tcPr>
+                    <a:solidFill>
+                      <a:srgbClr val="FFFFFF"/>
+                    </a:solidFill>
+                  </a:tcPr>
+                </a:tc>
+                <a:tc>
+                  <a:txBody>
+                    <a:bodyPr/>
+                    <a:lstStyle/>
+                    <a:p>
+                      <a:r>
+                        <a:rPr sz="1200">
+                          <a:solidFill>
+                            <a:srgbClr val="444444"/>
+                          </a:solidFill>
+                        </a:rPr>
+                        <a:t>Y</a:t>
+                      </a:r>
+                    </a:p>
+                  </a:txBody>
+                  <a:tcPr>
+                    <a:solidFill>
+                      <a:srgbClr val="FFFFFF"/>
+                    </a:solidFill>
+                  </a:tcPr>
+                </a:tc>
+                <a:tc>
+                  <a:txBody>
+                    <a:bodyPr/>
+                    <a:lstStyle/>
+                    <a:p>
+                      <a:r>
+                        <a:rPr sz="1200">
+                          <a:solidFill>
+                            <a:srgbClr val="444444"/>
+                          </a:solidFill>
+                        </a:rPr>
+                        <a:t>Y</a:t>
+                      </a:r>
+                    </a:p>
+                  </a:txBody>
+                  <a:tcPr>
+                    <a:solidFill>
+                      <a:srgbClr val="FFFFFF"/>
+                    </a:solidFill>
+                  </a:tcPr>
+                </a:tc>
+                <a:tc>
+                  <a:txBody>
+                    <a:bodyPr/>
+                    <a:lstStyle/>
+                    <a:p>
+                      <a:r>
+                        <a:rPr sz="1200">
+                          <a:solidFill>
+                            <a:srgbClr val="444444"/>
+                          </a:solidFill>
+                        </a:rPr>
+                        <a:t>P</a:t>
+                      </a:r>
+                    </a:p>
+                  </a:txBody>
+                  <a:tcPr>
+                    <a:solidFill>
+                      <a:srgbClr val="FFFFFF"/>
+                    </a:solidFill>
+                  </a:tcPr>
+                </a:tc>
+                <a:tc>
+                  <a:txBody>
+                    <a:bodyPr/>
+                    <a:lstStyle/>
+                    <a:p>
+                      <a:r>
+                        <a:rPr sz="1200">
+                          <a:solidFill>
+                            <a:srgbClr val="444444"/>
+                          </a:solidFill>
+                        </a:rPr>
+                        <a:t>N</a:t>
+                      </a:r>
+                    </a:p>
+                  </a:txBody>
+                  <a:tcPr>
+                    <a:solidFill>
+                      <a:srgbClr val="FFFFFF"/>
+                    </a:solidFill>
+                  </a:tcPr>
+                </a:tc>
+              </a:tr>
+              <a:tr h="384048">
+                <a:tc>
+                  <a:txBody>
+                    <a:bodyPr/>
+                    <a:lstStyle/>
+                    <a:p>
+                      <a:r>
+                        <a:rPr sz="1200" b="1">
+                          <a:solidFill>
+                            <a:srgbClr val="1F3A5F"/>
+                          </a:solidFill>
+                        </a:rPr>
+                        <a:t>AutoSurvey</a:t>
+                      </a:r>
+                    </a:p>
+                  </a:txBody>
+                  <a:tcPr>
+                    <a:solidFill>
+                      <a:srgbClr val="EEF2F7"/>
+                    </a:solidFill>
+                  </a:tcPr>
+                </a:tc>
+                <a:tc>
+                  <a:txBody>
+                    <a:bodyPr/>
+                    <a:lstStyle/>
+                    <a:p>
+                      <a:r>
+                        <a:rPr sz="1200">
+                          <a:solidFill>
+                            <a:srgbClr val="444444"/>
+                          </a:solidFill>
+                        </a:rPr>
+                        <a:t>N</a:t>
+                      </a:r>
+                    </a:p>
+                  </a:txBody>
+                  <a:tcPr>
+                    <a:solidFill>
+                      <a:srgbClr val="EEF2F7"/>
+                    </a:solidFill>
+                  </a:tcPr>
+                </a:tc>
+                <a:tc>
+                  <a:txBody>
+                    <a:bodyPr/>
+                    <a:lstStyle/>
+                    <a:p>
+                      <a:r>
+                        <a:rPr sz="1200">
+                          <a:solidFill>
+                            <a:srgbClr val="444444"/>
+                          </a:solidFill>
+                        </a:rPr>
+                        <a:t>Y</a:t>
+                      </a:r>
+                    </a:p>
+                  </a:txBody>
+                  <a:tcPr>
+                    <a:solidFill>
+                      <a:srgbClr val="EEF2F7"/>
+                    </a:solidFill>
+                  </a:tcPr>
+                </a:tc>
+                <a:tc>
+                  <a:txBody>
+                    <a:bodyPr/>
+                    <a:lstStyle/>
+                    <a:p>
+                      <a:r>
+                        <a:rPr sz="1200">
+                          <a:solidFill>
+                            <a:srgbClr val="444444"/>
+                          </a:solidFill>
+                        </a:rPr>
+                        <a:t>P</a:t>
+                      </a:r>
+                    </a:p>
+                  </a:txBody>
+                  <a:tcPr>
+                    <a:solidFill>
+                      <a:srgbClr val="EEF2F7"/>
+                    </a:solidFill>
+                  </a:tcPr>
+                </a:tc>
+                <a:tc>
+                  <a:txBody>
+                    <a:bodyPr/>
+                    <a:lstStyle/>
+                    <a:p>
+                      <a:r>
+                        <a:rPr sz="1200">
+                          <a:solidFill>
+                            <a:srgbClr val="444444"/>
+                          </a:solidFill>
+                        </a:rPr>
+                        <a:t>N</a:t>
+                      </a:r>
+                    </a:p>
+                  </a:txBody>
+                  <a:tcPr>
+                    <a:solidFill>
+                      <a:srgbClr val="EEF2F7"/>
+                    </a:solidFill>
+                  </a:tcPr>
+                </a:tc>
+                <a:tc>
+                  <a:txBody>
+                    <a:bodyPr/>
+                    <a:lstStyle/>
+                    <a:p>
+                      <a:r>
+                        <a:rPr sz="1200">
+                          <a:solidFill>
+                            <a:srgbClr val="444444"/>
+                          </a:solidFill>
+                        </a:rPr>
+                        <a:t>Y</a:t>
+                      </a:r>
+                    </a:p>
+                  </a:txBody>
+                  <a:tcPr>
+                    <a:solidFill>
+                      <a:srgbClr val="EEF2F7"/>
+                    </a:solidFill>
+                  </a:tcPr>
+                </a:tc>
+                <a:tc>
+                  <a:txBody>
+                    <a:bodyPr/>
+                    <a:lstStyle/>
+                    <a:p>
+                      <a:r>
+                        <a:rPr sz="1200">
+                          <a:solidFill>
+                            <a:srgbClr val="444444"/>
+                          </a:solidFill>
+                        </a:rPr>
+                        <a:t>N</a:t>
+                      </a:r>
+                    </a:p>
+                  </a:txBody>
+                  <a:tcPr>
+                    <a:solidFill>
+                      <a:srgbClr val="EEF2F7"/>
+                    </a:solidFill>
+                  </a:tcPr>
+                </a:tc>
+                <a:tc>
+                  <a:txBody>
+                    <a:bodyPr/>
+                    <a:lstStyle/>
+                    <a:p>
+                      <a:r>
+                        <a:rPr sz="1200">
+                          <a:solidFill>
+                            <a:srgbClr val="444444"/>
+                          </a:solidFill>
+                        </a:rPr>
+                        <a:t>N</a:t>
+                      </a:r>
+                    </a:p>
+                  </a:txBody>
+                  <a:tcPr>
+                    <a:solidFill>
+                      <a:srgbClr val="EEF2F7"/>
+                    </a:solidFill>
+                  </a:tcPr>
+                </a:tc>
+                <a:tc>
+                  <a:txBody>
+                    <a:bodyPr/>
+                    <a:lstStyle/>
+                    <a:p>
+                      <a:r>
+                        <a:rPr sz="1200">
+                          <a:solidFill>
+                            <a:srgbClr val="444444"/>
+                          </a:solidFill>
+                        </a:rPr>
+                        <a:t>P</a:t>
+                      </a:r>
+                    </a:p>
+                  </a:txBody>
+                  <a:tcPr>
+                    <a:solidFill>
+                      <a:srgbClr val="EEF2F7"/>
+                    </a:solidFill>
+                  </a:tcPr>
+                </a:tc>
+                <a:tc>
+                  <a:txBody>
+                    <a:bodyPr/>
+                    <a:lstStyle/>
+                    <a:p>
+                      <a:r>
+                        <a:rPr sz="1200">
+                          <a:solidFill>
+                            <a:srgbClr val="444444"/>
+                          </a:solidFill>
+                        </a:rPr>
+                        <a:t>N</a:t>
+                      </a:r>
+                    </a:p>
+                  </a:txBody>
+                  <a:tcPr>
+                    <a:solidFill>
+                      <a:srgbClr val="EEF2F7"/>
+                    </a:solidFill>
+                  </a:tcPr>
+                </a:tc>
+              </a:tr>
+              <a:tr h="384048">
+                <a:tc>
+                  <a:txBody>
+                    <a:bodyPr/>
+                    <a:lstStyle/>
+                    <a:p>
+                      <a:r>
+                        <a:rPr sz="1200" b="1">
+                          <a:solidFill>
+                            <a:srgbClr val="1F3A5F"/>
+                          </a:solidFill>
+                        </a:rPr>
+                        <a:t>PaperBanana</a:t>
+                      </a:r>
+                    </a:p>
+                  </a:txBody>
+                  <a:tcPr>
+                    <a:solidFill>
+                      <a:srgbClr val="FFFFFF"/>
+                    </a:solidFill>
+                  </a:tcPr>
+                </a:tc>
+                <a:tc>
+                  <a:txBody>
+                    <a:bodyPr/>
+                    <a:lstStyle/>
+                    <a:p>
+                      <a:r>
+                        <a:rPr sz="1200">
+                          <a:solidFill>
+                            <a:srgbClr val="444444"/>
+                          </a:solidFill>
+                        </a:rPr>
+                        <a:t>N</a:t>
+                      </a:r>
+                    </a:p>
+                  </a:txBody>
+                  <a:tcPr>
+                    <a:solidFill>
+                      <a:srgbClr val="FFFFFF"/>
+                    </a:solidFill>
+                  </a:tcPr>
+                </a:tc>
+                <a:tc>
+                  <a:txBody>
+                    <a:bodyPr/>
+                    <a:lstStyle/>
+                    <a:p>
+                      <a:r>
+                        <a:rPr sz="1200">
+                          <a:solidFill>
+                            <a:srgbClr val="444444"/>
+                          </a:solidFill>
+                        </a:rPr>
+                        <a:t>P</a:t>
+                      </a:r>
+                    </a:p>
+                  </a:txBody>
+                  <a:tcPr>
+                    <a:solidFill>
+                      <a:srgbClr val="FFFFFF"/>
+                    </a:solidFill>
+                  </a:tcPr>
+                </a:tc>
+                <a:tc>
+                  <a:txBody>
+                    <a:bodyPr/>
+                    <a:lstStyle/>
+                    <a:p>
+                      <a:r>
+                        <a:rPr sz="1200">
+                          <a:solidFill>
+                            <a:srgbClr val="444444"/>
+                          </a:solidFill>
+                        </a:rPr>
+                        <a:t>N</a:t>
+                      </a:r>
+                    </a:p>
+                  </a:txBody>
+                  <a:tcPr>
+                    <a:solidFill>
+                      <a:srgbClr val="FFFFFF"/>
+                    </a:solidFill>
+                  </a:tcPr>
+                </a:tc>
+                <a:tc>
+                  <a:txBody>
+                    <a:bodyPr/>
+                    <a:lstStyle/>
+                    <a:p>
+                      <a:r>
+                        <a:rPr sz="1200">
+                          <a:solidFill>
+                            <a:srgbClr val="444444"/>
+                          </a:solidFill>
+                        </a:rPr>
+                        <a:t>P</a:t>
+                      </a:r>
+                    </a:p>
+                  </a:txBody>
+                  <a:tcPr>
+                    <a:solidFill>
+                      <a:srgbClr val="FFFFFF"/>
+                    </a:solidFill>
+                  </a:tcPr>
+                </a:tc>
+                <a:tc>
+                  <a:txBody>
+                    <a:bodyPr/>
+                    <a:lstStyle/>
+                    <a:p>
+                      <a:r>
+                        <a:rPr sz="1200">
+                          <a:solidFill>
+                            <a:srgbClr val="444444"/>
+                          </a:solidFill>
+                        </a:rPr>
+                        <a:t>N</a:t>
+                      </a:r>
+                    </a:p>
+                  </a:txBody>
+                  <a:tcPr>
+                    <a:solidFill>
+                      <a:srgbClr val="FFFFFF"/>
+                    </a:solidFill>
+                  </a:tcPr>
+                </a:tc>
+                <a:tc>
+                  <a:txBody>
+                    <a:bodyPr/>
+                    <a:lstStyle/>
+                    <a:p>
+                      <a:r>
+                        <a:rPr sz="1200">
+                          <a:solidFill>
+                            <a:srgbClr val="444444"/>
+                          </a:solidFill>
+                        </a:rPr>
+                        <a:t>Y</a:t>
+                      </a:r>
+                    </a:p>
+                  </a:txBody>
+                  <a:tcPr>
+                    <a:solidFill>
+                      <a:srgbClr val="FFFFFF"/>
+                    </a:solidFill>
+                  </a:tcPr>
+                </a:tc>
+                <a:tc>
+                  <a:txBody>
+                    <a:bodyPr/>
+                    <a:lstStyle/>
+                    <a:p>
+                      <a:r>
+                        <a:rPr sz="1200">
+                          <a:solidFill>
+                            <a:srgbClr val="444444"/>
+                          </a:solidFill>
+                        </a:rPr>
+                        <a:t>P</a:t>
+                      </a:r>
+                    </a:p>
+                  </a:txBody>
+                  <a:tcPr>
+                    <a:solidFill>
+                      <a:srgbClr val="FFFFFF"/>
+                    </a:solidFill>
+                  </a:tcPr>
+                </a:tc>
+                <a:tc>
+                  <a:txBody>
+                    <a:bodyPr/>
+                    <a:lstStyle/>
+                    <a:p>
+                      <a:r>
+                        <a:rPr sz="1200">
+                          <a:solidFill>
+                            <a:srgbClr val="444444"/>
+                          </a:solidFill>
+                        </a:rPr>
+                        <a:t>N</a:t>
+                      </a:r>
+                    </a:p>
+                  </a:txBody>
+                  <a:tcPr>
+                    <a:solidFill>
+                      <a:srgbClr val="FFFFFF"/>
+                    </a:solidFill>
+                  </a:tcPr>
+                </a:tc>
+                <a:tc>
+                  <a:txBody>
+                    <a:bodyPr/>
+                    <a:lstStyle/>
+                    <a:p>
+                      <a:r>
+                        <a:rPr sz="1200">
+                          <a:solidFill>
+                            <a:srgbClr val="444444"/>
+                          </a:solidFill>
+                        </a:rPr>
+                        <a:t>P</a:t>
+                      </a:r>
+                    </a:p>
+                  </a:txBody>
+                  <a:tcPr>
+                    <a:solidFill>
+                      <a:srgbClr val="FFFFFF"/>
+                    </a:solidFill>
+                  </a:tcPr>
+                </a:tc>
+              </a:tr>
+              <a:tr h="384048">
+                <a:tc>
+                  <a:txBody>
+                    <a:bodyPr/>
+                    <a:lstStyle/>
+                    <a:p>
+                      <a:r>
+                        <a:rPr sz="1200" b="1">
+                          <a:solidFill>
+                            <a:srgbClr val="1F3A5F"/>
+                          </a:solidFill>
+                        </a:rPr>
+                        <a:t>Docling / MinerU</a:t>
+                      </a:r>
+                    </a:p>
+                  </a:txBody>
+                  <a:tcPr>
+                    <a:solidFill>
+                      <a:srgbClr val="EEF2F7"/>
+                    </a:solidFill>
+                  </a:tcPr>
+                </a:tc>
+                <a:tc>
+                  <a:txBody>
+                    <a:bodyPr/>
+                    <a:lstStyle/>
+                    <a:p>
+                      <a:r>
+                        <a:rPr sz="1200">
+                          <a:solidFill>
+                            <a:srgbClr val="444444"/>
+                          </a:solidFill>
+                        </a:rPr>
+                        <a:t>Y</a:t>
+                      </a:r>
+                    </a:p>
+                  </a:txBody>
+                  <a:tcPr>
+                    <a:solidFill>
+                      <a:srgbClr val="EEF2F7"/>
+                    </a:solidFill>
+                  </a:tcPr>
+                </a:tc>
+                <a:tc>
+                  <a:txBody>
+                    <a:bodyPr/>
+                    <a:lstStyle/>
+                    <a:p>
+                      <a:r>
+                        <a:rPr sz="1200">
+                          <a:solidFill>
+                            <a:srgbClr val="444444"/>
+                          </a:solidFill>
+                        </a:rPr>
+                        <a:t>N</a:t>
+                      </a:r>
+                    </a:p>
+                  </a:txBody>
+                  <a:tcPr>
+                    <a:solidFill>
+                      <a:srgbClr val="EEF2F7"/>
+                    </a:solidFill>
+                  </a:tcPr>
+                </a:tc>
+                <a:tc>
+                  <a:txBody>
+                    <a:bodyPr/>
+                    <a:lstStyle/>
+                    <a:p>
+                      <a:r>
+                        <a:rPr sz="1200">
+                          <a:solidFill>
+                            <a:srgbClr val="444444"/>
+                          </a:solidFill>
+                        </a:rPr>
+                        <a:t>N</a:t>
+                      </a:r>
+                    </a:p>
+                  </a:txBody>
+                  <a:tcPr>
+                    <a:solidFill>
+                      <a:srgbClr val="EEF2F7"/>
+                    </a:solidFill>
+                  </a:tcPr>
+                </a:tc>
+                <a:tc>
+                  <a:txBody>
+                    <a:bodyPr/>
+                    <a:lstStyle/>
+                    <a:p>
+                      <a:r>
+                        <a:rPr sz="1200">
+                          <a:solidFill>
+                            <a:srgbClr val="444444"/>
+                          </a:solidFill>
+                        </a:rPr>
+                        <a:t>N</a:t>
+                      </a:r>
+                    </a:p>
+                  </a:txBody>
+                  <a:tcPr>
+                    <a:solidFill>
+                      <a:srgbClr val="EEF2F7"/>
+                    </a:solidFill>
+                  </a:tcPr>
+                </a:tc>
+                <a:tc>
+                  <a:txBody>
+                    <a:bodyPr/>
+                    <a:lstStyle/>
+                    <a:p>
+                      <a:r>
+                        <a:rPr sz="1200">
+                          <a:solidFill>
+                            <a:srgbClr val="444444"/>
+                          </a:solidFill>
+                        </a:rPr>
+                        <a:t>N</a:t>
+                      </a:r>
+                    </a:p>
+                  </a:txBody>
+                  <a:tcPr>
+                    <a:solidFill>
+                      <a:srgbClr val="EEF2F7"/>
+                    </a:solidFill>
+                  </a:tcPr>
+                </a:tc>
+                <a:tc>
+                  <a:txBody>
+                    <a:bodyPr/>
+                    <a:lstStyle/>
+                    <a:p>
+                      <a:r>
+                        <a:rPr sz="1200">
+                          <a:solidFill>
+                            <a:srgbClr val="444444"/>
+                          </a:solidFill>
+                        </a:rPr>
+                        <a:t>N</a:t>
+                      </a:r>
+                    </a:p>
+                  </a:txBody>
+                  <a:tcPr>
+                    <a:solidFill>
+                      <a:srgbClr val="EEF2F7"/>
+                    </a:solidFill>
+                  </a:tcPr>
+                </a:tc>
+                <a:tc>
+                  <a:txBody>
+                    <a:bodyPr/>
+                    <a:lstStyle/>
+                    <a:p>
+                      <a:r>
+                        <a:rPr sz="1200">
+                          <a:solidFill>
+                            <a:srgbClr val="444444"/>
+                          </a:solidFill>
+                        </a:rPr>
+                        <a:t>P</a:t>
+                      </a:r>
+                    </a:p>
+                  </a:txBody>
+                  <a:tcPr>
+                    <a:solidFill>
+                      <a:srgbClr val="EEF2F7"/>
+                    </a:solidFill>
+                  </a:tcPr>
+                </a:tc>
+                <a:tc>
+                  <a:txBody>
+                    <a:bodyPr/>
+                    <a:lstStyle/>
+                    <a:p>
+                      <a:r>
+                        <a:rPr sz="1200">
+                          <a:solidFill>
+                            <a:srgbClr val="444444"/>
+                          </a:solidFill>
+                        </a:rPr>
+                        <a:t>Y</a:t>
+                      </a:r>
+                    </a:p>
+                  </a:txBody>
+                  <a:tcPr>
+                    <a:solidFill>
+                      <a:srgbClr val="EEF2F7"/>
+                    </a:solidFill>
+                  </a:tcPr>
+                </a:tc>
+                <a:tc>
+                  <a:txBody>
+                    <a:bodyPr/>
+                    <a:lstStyle/>
+                    <a:p>
+                      <a:r>
+                        <a:rPr sz="1200">
+                          <a:solidFill>
+                            <a:srgbClr val="444444"/>
+                          </a:solidFill>
+                        </a:rPr>
+                        <a:t>Y</a:t>
+                      </a:r>
+                    </a:p>
+                  </a:txBody>
+                  <a:tcPr>
+                    <a:solidFill>
+                      <a:srgbClr val="EEF2F7"/>
+                    </a:solidFill>
+                  </a:tcPr>
+                </a:tc>
+              </a:tr>
+              <a:tr h="384048">
+                <a:tc>
+                  <a:txBody>
+                    <a:bodyPr/>
+                    <a:lstStyle/>
+                    <a:p>
+                      <a:r>
+                        <a:rPr sz="1200" b="1">
+                          <a:solidFill>
+                            <a:srgbClr val="1F3A5F"/>
+                          </a:solidFill>
+                        </a:rPr>
+                        <a:t>PaperQA2</a:t>
+                      </a:r>
+                    </a:p>
+                  </a:txBody>
+                  <a:tcPr>
+                    <a:solidFill>
+                      <a:srgbClr val="FFFFFF"/>
+                    </a:solidFill>
+                  </a:tcPr>
+                </a:tc>
+                <a:tc>
+                  <a:txBody>
+                    <a:bodyPr/>
+                    <a:lstStyle/>
+                    <a:p>
+                      <a:r>
+                        <a:rPr sz="1200">
+                          <a:solidFill>
+                            <a:srgbClr val="444444"/>
+                          </a:solidFill>
+                        </a:rPr>
+                        <a:t>N</a:t>
+                      </a:r>
+                    </a:p>
+                  </a:txBody>
+                  <a:tcPr>
+                    <a:solidFill>
+                      <a:srgbClr val="FFFFFF"/>
+                    </a:solidFill>
+                  </a:tcPr>
+                </a:tc>
+                <a:tc>
+                  <a:txBody>
+                    <a:bodyPr/>
+                    <a:lstStyle/>
+                    <a:p>
+                      <a:r>
+                        <a:rPr sz="1200">
+                          <a:solidFill>
+                            <a:srgbClr val="444444"/>
+                          </a:solidFill>
+                        </a:rPr>
+                        <a:t>Y</a:t>
+                      </a:r>
+                    </a:p>
+                  </a:txBody>
+                  <a:tcPr>
+                    <a:solidFill>
+                      <a:srgbClr val="FFFFFF"/>
+                    </a:solidFill>
+                  </a:tcPr>
+                </a:tc>
+                <a:tc>
+                  <a:txBody>
+                    <a:bodyPr/>
+                    <a:lstStyle/>
+                    <a:p>
+                      <a:r>
+                        <a:rPr sz="1200">
+                          <a:solidFill>
+                            <a:srgbClr val="444444"/>
+                          </a:solidFill>
+                        </a:rPr>
+                        <a:t>P</a:t>
+                      </a:r>
+                    </a:p>
+                  </a:txBody>
+                  <a:tcPr>
+                    <a:solidFill>
+                      <a:srgbClr val="FFFFFF"/>
+                    </a:solidFill>
+                  </a:tcPr>
+                </a:tc>
+                <a:tc>
+                  <a:txBody>
+                    <a:bodyPr/>
+                    <a:lstStyle/>
+                    <a:p>
+                      <a:r>
+                        <a:rPr sz="1200">
+                          <a:solidFill>
+                            <a:srgbClr val="444444"/>
+                          </a:solidFill>
+                        </a:rPr>
+                        <a:t>N</a:t>
+                      </a:r>
+                    </a:p>
+                  </a:txBody>
+                  <a:tcPr>
+                    <a:solidFill>
+                      <a:srgbClr val="FFFFFF"/>
+                    </a:solidFill>
+                  </a:tcPr>
+                </a:tc>
+                <a:tc>
+                  <a:txBody>
+                    <a:bodyPr/>
+                    <a:lstStyle/>
+                    <a:p>
+                      <a:r>
+                        <a:rPr sz="1200">
+                          <a:solidFill>
+                            <a:srgbClr val="444444"/>
+                          </a:solidFill>
+                        </a:rPr>
+                        <a:t>N</a:t>
+                      </a:r>
+                    </a:p>
+                  </a:txBody>
+                  <a:tcPr>
+                    <a:solidFill>
+                      <a:srgbClr val="FFFFFF"/>
+                    </a:solidFill>
+                  </a:tcPr>
+                </a:tc>
+                <a:tc>
+                  <a:txBody>
+                    <a:bodyPr/>
+                    <a:lstStyle/>
+                    <a:p>
+                      <a:r>
+                        <a:rPr sz="1200">
+                          <a:solidFill>
+                            <a:srgbClr val="444444"/>
+                          </a:solidFill>
+                        </a:rPr>
+                        <a:t>N</a:t>
+                      </a:r>
+                    </a:p>
+                  </a:txBody>
+                  <a:tcPr>
+                    <a:solidFill>
+                      <a:srgbClr val="FFFFFF"/>
+                    </a:solidFill>
+                  </a:tcPr>
+                </a:tc>
+                <a:tc>
+                  <a:txBody>
+                    <a:bodyPr/>
+                    <a:lstStyle/>
+                    <a:p>
+                      <a:r>
+                        <a:rPr sz="1200">
+                          <a:solidFill>
+                            <a:srgbClr val="444444"/>
+                          </a:solidFill>
+                        </a:rPr>
+                        <a:t>N</a:t>
+                      </a:r>
+                    </a:p>
+                  </a:txBody>
+                  <a:tcPr>
+                    <a:solidFill>
+                      <a:srgbClr val="FFFFFF"/>
+                    </a:solidFill>
+                  </a:tcPr>
+                </a:tc>
+                <a:tc>
+                  <a:txBody>
+                    <a:bodyPr/>
+                    <a:lstStyle/>
+                    <a:p>
+                      <a:r>
+                        <a:rPr sz="1200">
+                          <a:solidFill>
+                            <a:srgbClr val="444444"/>
+                          </a:solidFill>
+                        </a:rPr>
+                        <a:t>N</a:t>
+                      </a:r>
+                    </a:p>
+                  </a:txBody>
+                  <a:tcPr>
+                    <a:solidFill>
+                      <a:srgbClr val="FFFFFF"/>
+                    </a:solidFill>
+                  </a:tcPr>
+                </a:tc>
+                <a:tc>
+                  <a:txBody>
+                    <a:bodyPr/>
+                    <a:lstStyle/>
+                    <a:p>
+                      <a:r>
+                        <a:rPr sz="1200">
+                          <a:solidFill>
+                            <a:srgbClr val="444444"/>
+                          </a:solidFill>
+                        </a:rPr>
+                        <a:t>Y</a:t>
+                      </a:r>
+                    </a:p>
+                  </a:txBody>
+                  <a:tcPr>
+                    <a:solidFill>
+                      <a:srgbClr val="FFFFFF"/>
+                    </a:solidFill>
+                  </a:tcPr>
+                </a:tc>
+              </a:tr>
+            </a:tbl>
+          </a:graphicData>
+        </a:graphic>
+      </p:graphicFrame>
+      <p:sp>
+        <p:nvSpPr>
+          <p:cNvPr id="5" name="TextBox 4"/>
+          <p:cNvSpPr txBox="1"/>
+          <p:nvPr/>
+        </p:nvSpPr>
+        <p:spPr>
+          <a:xfrm>
+            <a:off x="457200" y="4352544"/>
+            <a:ext cx="11274552" cy="1097280"/>
+          </a:xfrm>
+          <a:prstGeom prst="rect">
+            <a:avLst/>
+          </a:prstGeom>
+          <a:noFill/>
+        </p:spPr>
+        <p:txBody>
+          <a:bodyPr wrap="square">
+            <a:spAutoFit/>
+          </a:bodyPr>
+          <a:lstStyle/>
+          <a:p>
+            <a:r>
+              <a:rPr sz="1200" i="1">
+                <a:solidFill>
+                  <a:srgbClr val="2E7D32"/>
+                </a:solidFill>
+              </a:rPr>
+              <a:t>No row but AUTHOR is all-Y.  In=ingest QA=grounded-QA CV=cite-verify Rv=review Wr=write Fg=figures Ex=export.  Full matrix + a source per cell: docs/MOTIVATION.md</a:t>
             </a:r>
           </a:p>
         </p:txBody>
@@ -6489,6 +7907,7 @@
           <a:ln>
             <a:noFill/>
           </a:ln>
+          <a:effectLst/>
         </p:spPr>
         <p:style>
           <a:lnRef idx="1">
@@ -6505,17 +7924,17 @@
           </a:fontRef>
         </p:style>
         <p:txBody>
-          <a:bodyPr rtlCol="0" anchor="ctr" wrap="square" lIns="365760"/>
+          <a:bodyPr rtlCol="0" anchor="ctr" lIns="365760"/>
           <a:lstStyle/>
           <a:p>
             <a:pPr algn="ctr"/>
             <a:r>
-              <a:rPr sz="2600" b="1">
+              <a:rPr sz="2500" b="1">
                 <a:solidFill>
                   <a:srgbClr val="FFFFFF"/>
                 </a:solidFill>
               </a:rPr>
-              <a:t>7 · Design — how it's put together</a:t>
+              <a:t>5 . What we built - the 18 actions</a:t>
             </a:r>
           </a:p>
         </p:txBody>
@@ -6528,8 +7947,8 @@
         </p:nvSpPr>
         <p:spPr>
           <a:xfrm>
-            <a:off x="548640" y="1097280"/>
-            <a:ext cx="11064240" cy="3291840"/>
+            <a:off x="11430000" y="6446520"/>
+            <a:ext cx="640080" cy="365760"/>
           </a:xfrm>
           <a:prstGeom prst="rect">
             <a:avLst/>
@@ -6543,22 +7962,12 @@
           <a:lstStyle/>
           <a:p>
             <a:r>
-              <a:rPr sz="1300">
-                <a:solidFill>
-                  <a:srgbClr val="1F3A5F"/>
-                </a:solidFill>
-                <a:latin typeface="Courier New"/>
-              </a:rPr>
-              <a:t>host (CLIO)  ──►  ClioAuthorSubagent   (capabilities + run; JSON; never-raises)
-                        │
-                   Main agent (router)  +  orchestrate (goal → plan → execute)
-                        │
-        expert agents:  ingestor · paper_qa · citation · reviewer/meta ·
-        planner · writer/editor · polish · coherence · figure_agent · kg ·
-        compose · export
-                        │
-        backends:  retrieval (RAG + scholarly cascade) · vision (Gemini) ·
-        SafeFiles (read/write/edit, sandboxed) · LLM (claude/codex/ollama/echo)</a:t>
+              <a:rPr sz="1100">
+                <a:solidFill>
+                  <a:srgbClr val="444444"/>
+                </a:solidFill>
+              </a:rPr>
+              <a:t>7</a:t>
             </a:r>
           </a:p>
         </p:txBody>
@@ -6571,8 +7980,8 @@
         </p:nvSpPr>
         <p:spPr>
           <a:xfrm>
-            <a:off x="548640" y="4754880"/>
-            <a:ext cx="11064240" cy="1645920"/>
+            <a:off x="548640" y="1097280"/>
+            <a:ext cx="11064240" cy="5394960"/>
           </a:xfrm>
           <a:prstGeom prst="rect">
             <a:avLst/>
@@ -6585,13 +7994,156 @@
           </a:bodyPr>
           <a:lstStyle/>
           <a:p>
-            <a:r>
-              <a:rPr sz="1500">
+            <a:pPr>
+              <a:spcAft>
+                <a:spcPts val="700"/>
+              </a:spcAft>
+            </a:pPr>
+            <a:r>
+              <a:rPr b="1" sz="1600">
+                <a:solidFill>
+                  <a:srgbClr val="1F3A5F"/>
+                </a:solidFill>
+              </a:rPr>
+              <a:t>-  Read / understand:</a:t>
+            </a:r>
+            <a:r>
+              <a:rPr sz="1600">
                 <a:solidFill>
                   <a:srgbClr val="444444"/>
                 </a:solidFill>
               </a:rPr>
-              <a:t>Principles:  expert agents + retrieval + read/write/edit tools  ·  grounded (verify, source-bound)  ·  standalone harness, thin host bridge  ·  hermetic-first (offline echo model; heavy paths gated).</a:t>
+              <a:t> ingest (PDF-&gt;MD + blocks + figures), ask (grounded Q&amp;A), kg (content knowledge graph)</a:t>
+            </a:r>
+          </a:p>
+          <a:p>
+            <a:pPr>
+              <a:spcAft>
+                <a:spcPts val="700"/>
+              </a:spcAft>
+            </a:pPr>
+            <a:r>
+              <a:rPr b="1" sz="1600">
+                <a:solidFill>
+                  <a:srgbClr val="1F3A5F"/>
+                </a:solidFill>
+              </a:rPr>
+              <a:t>-  Verify:</a:t>
+            </a:r>
+            <a:r>
+              <a:rPr sz="1600">
+                <a:solidFill>
+                  <a:srgbClr val="444444"/>
+                </a:solidFill>
+              </a:rPr>
+              <a:t> cite (Semantic Scholar -&gt; OpenAlex -&gt; Crossref -&gt; arXiv cascade; suggestions only, never edits)</a:t>
+            </a:r>
+          </a:p>
+          <a:p>
+            <a:pPr>
+              <a:spcAft>
+                <a:spcPts val="700"/>
+              </a:spcAft>
+            </a:pPr>
+            <a:r>
+              <a:rPr b="1" sz="1600">
+                <a:solidFill>
+                  <a:srgbClr val="1F3A5F"/>
+                </a:solidFill>
+              </a:rPr>
+              <a:t>-  Review:</a:t>
+            </a:r>
+            <a:r>
+              <a:rPr sz="1600">
+                <a:solidFill>
+                  <a:srgbClr val="444444"/>
+                </a:solidFill>
+              </a:rPr>
+              <a:t> review (decision + scores + --ground), meta_review (panel), write_review (loop)</a:t>
+            </a:r>
+          </a:p>
+          <a:p>
+            <a:pPr>
+              <a:spcAft>
+                <a:spcPts val="700"/>
+              </a:spcAft>
+            </a:pPr>
+            <a:r>
+              <a:rPr b="1" sz="1600">
+                <a:solidFill>
+                  <a:srgbClr val="1F3A5F"/>
+                </a:solidFill>
+              </a:rPr>
+              <a:t>-  Write:</a:t>
+            </a:r>
+            <a:r>
+              <a:rPr sz="1600">
+                <a:solidFill>
+                  <a:srgbClr val="444444"/>
+                </a:solidFill>
+              </a:rPr>
+              <a:t> plan (tasks/claims/sources), write, edit, polish, coherence, compose (whole paper), export (-&gt; LaTeX)</a:t>
+            </a:r>
+          </a:p>
+          <a:p>
+            <a:pPr>
+              <a:spcAft>
+                <a:spcPts val="700"/>
+              </a:spcAft>
+            </a:pPr>
+            <a:r>
+              <a:rPr b="1" sz="1600">
+                <a:solidFill>
+                  <a:srgbClr val="1F3A5F"/>
+                </a:solidFill>
+              </a:rPr>
+              <a:t>-  Illustrate:</a:t>
+            </a:r>
+            <a:r>
+              <a:rPr sz="1600">
+                <a:solidFill>
+                  <a:srgbClr val="444444"/>
+                </a:solidFill>
+              </a:rPr>
+              <a:t> plot, describe_figures (Gemini vision), figure_refine (loop)</a:t>
+            </a:r>
+          </a:p>
+          <a:p>
+            <a:pPr>
+              <a:spcAft>
+                <a:spcPts val="700"/>
+              </a:spcAft>
+            </a:pPr>
+            <a:r>
+              <a:rPr b="1" sz="1600">
+                <a:solidFill>
+                  <a:srgbClr val="1F3A5F"/>
+                </a:solidFill>
+              </a:rPr>
+              <a:t>-  Drive:</a:t>
+            </a:r>
+            <a:r>
+              <a:rPr sz="1600">
+                <a:solidFill>
+                  <a:srgbClr val="444444"/>
+                </a:solidFill>
+              </a:rPr>
+              <a:t> orchestrate (goal -&gt; plan a sequence of the above -&gt; execute)</a:t>
+            </a:r>
+          </a:p>
+          <a:p>
+            <a:pPr>
+              <a:spcAft>
+                <a:spcPts val="700"/>
+              </a:spcAft>
+            </a:pPr>
+            <a:r>
+              <a:rPr sz="1600">
+                <a:solidFill>
+                  <a:srgbClr val="444444"/>
+                </a:solidFill>
+              </a:rPr>
+              <a:t>-  One adapter (capabilities() + run(action, payload)) + a CLI - stateless, JSON in/out, never raises.</a:t>
             </a:r>
           </a:p>
         </p:txBody>
@@ -6634,6 +8186,7 @@
           <a:ln>
             <a:noFill/>
           </a:ln>
+          <a:effectLst/>
         </p:spPr>
         <p:style>
           <a:lnRef idx="1">
@@ -6650,441 +8203,31 @@
           </a:fontRef>
         </p:style>
         <p:txBody>
-          <a:bodyPr rtlCol="0" anchor="ctr" wrap="square" lIns="365760"/>
+          <a:bodyPr rtlCol="0" anchor="ctr" lIns="365760"/>
           <a:lstStyle/>
           <a:p>
             <a:pPr algn="ctr"/>
             <a:r>
-              <a:rPr sz="2600" b="1">
+              <a:rPr sz="2500" b="1">
                 <a:solidFill>
                   <a:srgbClr val="FFFFFF"/>
                 </a:solidFill>
               </a:rPr>
-              <a:t>8 · How we'll prove it — evaluation plan (why each matters)</a:t>
-            </a:r>
-          </a:p>
-        </p:txBody>
-      </p:sp>
-      <p:graphicFrame>
-        <p:nvGraphicFramePr>
-          <p:cNvPr id="3" name="Table 2"/>
-          <p:cNvGraphicFramePr>
-            <a:graphicFrameLocks noGrp="1"/>
-          </p:cNvGraphicFramePr>
-          <p:nvPr/>
-        </p:nvGraphicFramePr>
-        <p:xfrm>
-          <a:off x="457200" y="1143000"/>
-          <a:ext cx="11274552" cy="2880360"/>
-        </p:xfrm>
-        <a:graphic>
-          <a:graphicData uri="http://schemas.openxmlformats.org/drawingml/2006/table">
-            <a:tbl>
-              <a:tblPr firstRow="1" bandRow="1">
-                <a:tableStyleId>{5C22544A-7EE6-4342-B048-85BDC9FD1C3A}</a:tableStyleId>
-              </a:tblPr>
-              <a:tblGrid>
-                <a:gridCol w="3291840"/>
-                <a:gridCol w="3991356"/>
-                <a:gridCol w="3991356"/>
-              </a:tblGrid>
-              <a:tr h="411480">
-                <a:tc>
-                  <a:txBody>
-                    <a:bodyPr/>
-                    <a:lstStyle/>
-                    <a:p>
-                      <a:r>
-                        <a:rPr sz="1200" b="1">
-                          <a:solidFill>
-                            <a:srgbClr val="FFFFFF"/>
-                          </a:solidFill>
-                        </a:rPr>
-                        <a:t>Track</a:t>
-                      </a:r>
-                    </a:p>
-                  </a:txBody>
-                  <a:tcPr>
-                    <a:solidFill>
-                      <a:srgbClr val="1F3A5F"/>
-                    </a:solidFill>
-                  </a:tcPr>
-                </a:tc>
-                <a:tc>
-                  <a:txBody>
-                    <a:bodyPr/>
-                    <a:lstStyle/>
-                    <a:p>
-                      <a:r>
-                        <a:rPr sz="1200" b="1">
-                          <a:solidFill>
-                            <a:srgbClr val="FFFFFF"/>
-                          </a:solidFill>
-                        </a:rPr>
-                        <a:t>Why we need it</a:t>
-                      </a:r>
-                    </a:p>
-                  </a:txBody>
-                  <a:tcPr>
-                    <a:solidFill>
-                      <a:srgbClr val="1F3A5F"/>
-                    </a:solidFill>
-                  </a:tcPr>
-                </a:tc>
-                <a:tc>
-                  <a:txBody>
-                    <a:bodyPr/>
-                    <a:lstStyle/>
-                    <a:p>
-                      <a:r>
-                        <a:rPr sz="1200" b="1">
-                          <a:solidFill>
-                            <a:srgbClr val="FFFFFF"/>
-                          </a:solidFill>
-                        </a:rPr>
-                        <a:t>Baselines</a:t>
-                      </a:r>
-                    </a:p>
-                  </a:txBody>
-                  <a:tcPr>
-                    <a:solidFill>
-                      <a:srgbClr val="1F3A5F"/>
-                    </a:solidFill>
-                  </a:tcPr>
-                </a:tc>
-              </a:tr>
-              <a:tr h="411480">
-                <a:tc>
-                  <a:txBody>
-                    <a:bodyPr/>
-                    <a:lstStyle/>
-                    <a:p>
-                      <a:r>
-                        <a:rPr sz="1200" b="1">
-                          <a:solidFill>
-                            <a:srgbClr val="1F3A5F"/>
-                          </a:solidFill>
-                        </a:rPr>
-                        <a:t>PDF→MD fidelity</a:t>
-                      </a:r>
-                    </a:p>
-                  </a:txBody>
-                  <a:tcPr/>
-                </a:tc>
-                <a:tc>
-                  <a:txBody>
-                    <a:bodyPr/>
-                    <a:lstStyle/>
-                    <a:p>
-                      <a:r>
-                        <a:rPr sz="1200">
-                          <a:solidFill>
-                            <a:srgbClr val="444444"/>
-                          </a:solidFill>
-                        </a:rPr>
-                        <a:t>ingest errors propagate to every action</a:t>
-                      </a:r>
-                    </a:p>
-                  </a:txBody>
-                  <a:tcPr/>
-                </a:tc>
-                <a:tc>
-                  <a:txBody>
-                    <a:bodyPr/>
-                    <a:lstStyle/>
-                    <a:p>
-                      <a:r>
-                        <a:rPr sz="1200">
-                          <a:solidFill>
-                            <a:srgbClr val="444444"/>
-                          </a:solidFill>
-                        </a:rPr>
-                        <a:t>paper-to-md, Docling, MinerU</a:t>
-                      </a:r>
-                    </a:p>
-                  </a:txBody>
-                  <a:tcPr/>
-                </a:tc>
-              </a:tr>
-              <a:tr h="411480">
-                <a:tc>
-                  <a:txBody>
-                    <a:bodyPr/>
-                    <a:lstStyle/>
-                    <a:p>
-                      <a:r>
-                        <a:rPr sz="1200" b="1">
-                          <a:solidFill>
-                            <a:srgbClr val="1F3A5F"/>
-                          </a:solidFill>
-                        </a:rPr>
-                        <a:t>Figures</a:t>
-                      </a:r>
-                    </a:p>
-                  </a:txBody>
-                  <a:tcPr/>
-                </a:tc>
-                <a:tc>
-                  <a:txBody>
-                    <a:bodyPr/>
-                    <a:lstStyle/>
-                    <a:p>
-                      <a:r>
-                        <a:rPr sz="1200">
-                          <a:solidFill>
-                            <a:srgbClr val="444444"/>
-                          </a:solidFill>
-                        </a:rPr>
-                        <a:t>high-bar, easily-judged; backs 'writes a paper'</a:t>
-                      </a:r>
-                    </a:p>
-                  </a:txBody>
-                  <a:tcPr/>
-                </a:tc>
-                <a:tc>
-                  <a:txBody>
-                    <a:bodyPr/>
-                    <a:lstStyle/>
-                    <a:p>
-                      <a:r>
-                        <a:rPr sz="1200">
-                          <a:solidFill>
-                            <a:srgbClr val="444444"/>
-                          </a:solidFill>
-                        </a:rPr>
-                        <a:t>PaperBanana, DeTikZify</a:t>
-                      </a:r>
-                    </a:p>
-                  </a:txBody>
-                  <a:tcPr/>
-                </a:tc>
-              </a:tr>
-              <a:tr h="411480">
-                <a:tc>
-                  <a:txBody>
-                    <a:bodyPr/>
-                    <a:lstStyle/>
-                    <a:p>
-                      <a:r>
-                        <a:rPr sz="1200" b="1">
-                          <a:solidFill>
-                            <a:srgbClr val="1F3A5F"/>
-                          </a:solidFill>
-                        </a:rPr>
-                        <a:t>Citation verify</a:t>
-                      </a:r>
-                    </a:p>
-                  </a:txBody>
-                  <a:tcPr/>
-                </a:tc>
-                <a:tc>
-                  <a:txBody>
-                    <a:bodyPr/>
-                    <a:lstStyle/>
-                    <a:p>
-                      <a:r>
-                        <a:rPr sz="1200">
-                          <a:solidFill>
-                            <a:srgbClr val="444444"/>
-                          </a:solidFill>
-                        </a:rPr>
-                        <a:t>the grounding claim; hallucination is the top failure</a:t>
-                      </a:r>
-                    </a:p>
-                  </a:txBody>
-                  <a:tcPr/>
-                </a:tc>
-                <a:tc>
-                  <a:txBody>
-                    <a:bodyPr/>
-                    <a:lstStyle/>
-                    <a:p>
-                      <a:r>
-                        <a:rPr sz="1200">
-                          <a:solidFill>
-                            <a:srgbClr val="444444"/>
-                          </a:solidFill>
-                        </a:rPr>
-                        <a:t>CiteCheck, PaperOrchestra</a:t>
-                      </a:r>
-                    </a:p>
-                  </a:txBody>
-                  <a:tcPr/>
-                </a:tc>
-              </a:tr>
-              <a:tr h="411480">
-                <a:tc>
-                  <a:txBody>
-                    <a:bodyPr/>
-                    <a:lstStyle/>
-                    <a:p>
-                      <a:r>
-                        <a:rPr sz="1200" b="1">
-                          <a:solidFill>
-                            <a:srgbClr val="1F3A5F"/>
-                          </a:solidFill>
-                        </a:rPr>
-                        <a:t>Review</a:t>
-                      </a:r>
-                    </a:p>
-                  </a:txBody>
-                  <a:tcPr/>
-                </a:tc>
-                <a:tc>
-                  <a:txBody>
-                    <a:bodyPr/>
-                    <a:lstStyle/>
-                    <a:p>
-                      <a:r>
-                        <a:rPr sz="1200">
-                          <a:solidFill>
-                            <a:srgbClr val="444444"/>
-                          </a:solidFill>
-                        </a:rPr>
-                        <a:t>must track ground-truth decisions; does --ground help?</a:t>
-                      </a:r>
-                    </a:p>
-                  </a:txBody>
-                  <a:tcPr/>
-                </a:tc>
-                <a:tc>
-                  <a:txBody>
-                    <a:bodyPr/>
-                    <a:lstStyle/>
-                    <a:p>
-                      <a:r>
-                        <a:rPr sz="1200">
-                          <a:solidFill>
-                            <a:srgbClr val="444444"/>
-                          </a:solidFill>
-                        </a:rPr>
-                        <a:t>AgentReview, DeepReview</a:t>
-                      </a:r>
-                    </a:p>
-                  </a:txBody>
-                  <a:tcPr/>
-                </a:tc>
-              </a:tr>
-              <a:tr h="411480">
-                <a:tc>
-                  <a:txBody>
-                    <a:bodyPr/>
-                    <a:lstStyle/>
-                    <a:p>
-                      <a:r>
-                        <a:rPr sz="1200" b="1">
-                          <a:solidFill>
-                            <a:srgbClr val="1F3A5F"/>
-                          </a:solidFill>
-                        </a:rPr>
-                        <a:t>Writing</a:t>
-                      </a:r>
-                    </a:p>
-                  </a:txBody>
-                  <a:tcPr/>
-                </a:tc>
-                <a:tc>
-                  <a:txBody>
-                    <a:bodyPr/>
-                    <a:lstStyle/>
-                    <a:p>
-                      <a:r>
-                        <a:rPr sz="1200">
-                          <a:solidFill>
-                            <a:srgbClr val="444444"/>
-                          </a:solidFill>
-                        </a:rPr>
-                        <a:t>most visible output; parity = credible, not marketing</a:t>
-                      </a:r>
-                    </a:p>
-                  </a:txBody>
-                  <a:tcPr/>
-                </a:tc>
-                <a:tc>
-                  <a:txBody>
-                    <a:bodyPr/>
-                    <a:lstStyle/>
-                    <a:p>
-                      <a:r>
-                        <a:rPr sz="1200">
-                          <a:solidFill>
-                            <a:srgbClr val="444444"/>
-                          </a:solidFill>
-                        </a:rPr>
-                        <a:t>PaperOrchestra, AutoSurvey</a:t>
-                      </a:r>
-                    </a:p>
-                  </a:txBody>
-                  <a:tcPr/>
-                </a:tc>
-              </a:tr>
-              <a:tr h="411480">
-                <a:tc>
-                  <a:txBody>
-                    <a:bodyPr/>
-                    <a:lstStyle/>
-                    <a:p>
-                      <a:r>
-                        <a:rPr sz="1200" b="1">
-                          <a:solidFill>
-                            <a:srgbClr val="1F3A5F"/>
-                          </a:solidFill>
-                        </a:rPr>
-                        <a:t>Orchestration + cost</a:t>
-                      </a:r>
-                    </a:p>
-                  </a:txBody>
-                  <a:tcPr/>
-                </a:tc>
-                <a:tc>
-                  <a:txBody>
-                    <a:bodyPr/>
-                    <a:lstStyle/>
-                    <a:p>
-                      <a:r>
-                        <a:rPr sz="1200">
-                          <a:solidFill>
-                            <a:srgbClr val="444444"/>
-                          </a:solidFill>
-                        </a:rPr>
-                        <a:t>composability is part of the novelty; budgets</a:t>
-                      </a:r>
-                    </a:p>
-                  </a:txBody>
-                  <a:tcPr/>
-                </a:tc>
-                <a:tc>
-                  <a:txBody>
-                    <a:bodyPr/>
-                    <a:lstStyle/>
-                    <a:p>
-                      <a:r>
-                        <a:rPr sz="1200">
-                          <a:solidFill>
-                            <a:srgbClr val="444444"/>
-                          </a:solidFill>
-                        </a:rPr>
-                        <a:t>—</a:t>
-                      </a:r>
-                    </a:p>
-                  </a:txBody>
-                  <a:tcPr/>
-                </a:tc>
-              </a:tr>
-            </a:tbl>
-          </a:graphicData>
-        </a:graphic>
-      </p:graphicFrame>
-      <p:sp>
-        <p:nvSpPr>
-          <p:cNvPr id="4" name="TextBox 3"/>
+              <a:t>6 . References &amp; artifacts we built on</a:t>
+            </a:r>
+          </a:p>
+        </p:txBody>
+      </p:sp>
+      <p:sp>
+        <p:nvSpPr>
+          <p:cNvPr id="3" name="TextBox 2"/>
           <p:cNvSpPr txBox="1"/>
           <p:nvPr/>
         </p:nvSpPr>
         <p:spPr>
           <a:xfrm>
-            <a:off x="457200" y="4114800"/>
-            <a:ext cx="11274552" cy="731520"/>
+            <a:off x="11430000" y="6446520"/>
+            <a:ext cx="640080" cy="365760"/>
           </a:xfrm>
           <a:prstGeom prst="rect">
             <a:avLst/>
@@ -7098,12 +8241,171 @@
           <a:lstStyle/>
           <a:p>
             <a:r>
-              <a:rPr sz="1200" i="1">
-                <a:solidFill>
-                  <a:srgbClr val="2E7D32"/>
-                </a:solidFill>
-              </a:rPr>
-              <a:t>Phasing: Phase 0 automated metrics (now) → Phase 1 LLM/VLM-as-Judge → Phase 2 human win-rates. Full plan: docs/BENCHMARK-PLAN.md</a:t>
+              <a:rPr sz="1100">
+                <a:solidFill>
+                  <a:srgbClr val="444444"/>
+                </a:solidFill>
+              </a:rPr>
+              <a:t>8</a:t>
+            </a:r>
+          </a:p>
+        </p:txBody>
+      </p:sp>
+      <p:sp>
+        <p:nvSpPr>
+          <p:cNvPr id="4" name="TextBox 3"/>
+          <p:cNvSpPr txBox="1"/>
+          <p:nvPr/>
+        </p:nvSpPr>
+        <p:spPr>
+          <a:xfrm>
+            <a:off x="548640" y="1097280"/>
+            <a:ext cx="11064240" cy="5394960"/>
+          </a:xfrm>
+          <a:prstGeom prst="rect">
+            <a:avLst/>
+          </a:prstGeom>
+          <a:noFill/>
+        </p:spPr>
+        <p:txBody>
+          <a:bodyPr wrap="square">
+            <a:spAutoFit/>
+          </a:bodyPr>
+          <a:lstStyle/>
+          <a:p>
+            <a:pPr>
+              <a:spcAft>
+                <a:spcPts val="700"/>
+              </a:spcAft>
+            </a:pPr>
+            <a:r>
+              <a:rPr b="1" sz="1600">
+                <a:solidFill>
+                  <a:srgbClr val="1F3A5F"/>
+                </a:solidFill>
+              </a:rPr>
+              <a:t>-  Combined (the mandate):</a:t>
+            </a:r>
+            <a:r>
+              <a:rPr sz="1600">
+                <a:solidFill>
+                  <a:srgbClr val="444444"/>
+                </a:solidFill>
+              </a:rPr>
+              <a:t/>
+            </a:r>
+          </a:p>
+          <a:p>
+            <a:pPr lvl="1">
+              <a:spcAft>
+                <a:spcPts val="700"/>
+              </a:spcAft>
+            </a:pPr>
+            <a:r>
+              <a:rPr sz="1500">
+                <a:solidFill>
+                  <a:srgbClr val="444444"/>
+                </a:solidFill>
+              </a:rPr>
+              <a:t>   .  Processing - paper-to-md (+ phagocyte) and PaperBanana (arXiv 2601.23265)</a:t>
+            </a:r>
+          </a:p>
+          <a:p>
+            <a:pPr lvl="1">
+              <a:spcAft>
+                <a:spcPts val="700"/>
+              </a:spcAft>
+            </a:pPr>
+            <a:r>
+              <a:rPr sz="1500">
+                <a:solidFill>
+                  <a:srgbClr val="444444"/>
+                </a:solidFill>
+              </a:rPr>
+              <a:t>   .  Writing / editing - wtf-p and PaperOrchestra (arXiv 2604.05018)</a:t>
+            </a:r>
+          </a:p>
+          <a:p>
+            <a:pPr>
+              <a:spcAft>
+                <a:spcPts val="700"/>
+              </a:spcAft>
+            </a:pPr>
+            <a:r>
+              <a:rPr b="1" sz="1600">
+                <a:solidFill>
+                  <a:srgbClr val="1F3A5F"/>
+                </a:solidFill>
+              </a:rPr>
+              <a:t>-  Harness references (concepts re-implemented, not copied):</a:t>
+            </a:r>
+            <a:r>
+              <a:rPr sz="1600">
+                <a:solidFill>
+                  <a:srgbClr val="444444"/>
+                </a:solidFill>
+              </a:rPr>
+              <a:t/>
+            </a:r>
+          </a:p>
+          <a:p>
+            <a:pPr lvl="1">
+              <a:spcAft>
+                <a:spcPts val="700"/>
+              </a:spcAft>
+            </a:pPr>
+            <a:r>
+              <a:rPr sz="1500">
+                <a:solidFill>
+                  <a:srgbClr val="444444"/>
+                </a:solidFill>
+              </a:rPr>
+              <a:t>   .  papervizagent - orchestrator + expert agents + critic loop -&gt; CriticRefine + figure_agent</a:t>
+            </a:r>
+          </a:p>
+          <a:p>
+            <a:pPr lvl="1">
+              <a:spcAft>
+                <a:spcPts val="700"/>
+              </a:spcAft>
+            </a:pPr>
+            <a:r>
+              <a:rPr sz="1500">
+                <a:solidFill>
+                  <a:srgbClr val="444444"/>
+                </a:solidFill>
+              </a:rPr>
+              <a:t>   .  protoneo/knowledge (AGPL) - BaseAgent / deliberation patterns / KG -&gt; harness/ + kg</a:t>
+            </a:r>
+          </a:p>
+          <a:p>
+            <a:pPr>
+              <a:spcAft>
+                <a:spcPts val="700"/>
+              </a:spcAft>
+            </a:pPr>
+            <a:r>
+              <a:rPr sz="1600">
+                <a:solidFill>
+                  <a:srgbClr val="444444"/>
+                </a:solidFill>
+              </a:rPr>
+              <a:t>-  All cloned in artifact/repos/; both papers in artifact/papers/; deep-study notes in artifact/notes/.</a:t>
+            </a:r>
+          </a:p>
+          <a:p>
+            <a:pPr>
+              <a:spcAft>
+                <a:spcPts val="700"/>
+              </a:spcAft>
+            </a:pPr>
+            <a:r>
+              <a:rPr sz="1600">
+                <a:solidFill>
+                  <a:srgbClr val="444444"/>
+                </a:solidFill>
+              </a:rPr>
+              <a:t>-  License-clean (BSD-3-Clause; no AGPL code copied - protoneo concepts re-implemented from scratch).</a:t>
             </a:r>
           </a:p>
         </p:txBody>

--- a/docs/AUTHOR.pptx
+++ b/docs/AUTHOR.pptx
@@ -3237,7 +3237,7 @@
                   <a:srgbClr val="2E7D32"/>
                 </a:solidFill>
               </a:rPr>
-              <a:t>Invoked by the CLIO agent as a subagent   .   18 actions   .   grounded, not hallucinated</a:t>
+              <a:t>Invoked by the CLIO agent as a subagent   .   19 actions   .   grounded, not hallucinated</a:t>
             </a:r>
           </a:p>
         </p:txBody>
@@ -3861,7 +3861,7 @@
                             <a:srgbClr val="444444"/>
                           </a:solidFill>
                         </a:rPr>
-                        <a:t>AgentReview, DeepReview</a:t>
+                        <a:t>AgentReview, DeepReview (data: ASAP-Review, PeerRead, ORB, MMReview)</a:t>
                       </a:r>
                     </a:p>
                   </a:txBody>
@@ -4034,7 +4034,7 @@
                   <a:srgbClr val="2E7D32"/>
                 </a:solidFill>
               </a:rPr>
-              <a:t>Phasing: Phase 0 automated metrics (now) -&gt; Phase 1 LLM/VLM-as-Judge -&gt; Phase 2 human win-rates.  Full plan: docs/BENCHMARK-PLAN.md</a:t>
+              <a:t>Review datasets secured: PeerRead, ASAP-Review, NLPeer, MOPRD, ORB, MMReview (cross-domain + multimodal).  Phasing: Phase 0 automated metrics (now) -&gt; Phase 1 LLM/VLM-as-Judge -&gt; Phase 2 human win-rates.  Full plan: docs/BENCHMARK-PLAN.md</a:t>
             </a:r>
           </a:p>
         </p:txBody>
@@ -4267,6 +4267,29 @@
                   <a:srgbClr val="1F3A5F"/>
                 </a:solidFill>
               </a:rPr>
+              <a:t>-  External validation:</a:t>
+            </a:r>
+            <a:r>
+              <a:rPr sz="1600">
+                <a:solidFill>
+                  <a:srgbClr val="444444"/>
+                </a:solidFill>
+              </a:rPr>
+              <a:t> the newest cross-domain + multimodal review benchmark (MMReview) tests exactly our edge - vision-grounded review across 17 domains, which text-only reviewers structurally can't do.</a:t>
+            </a:r>
+          </a:p>
+          <a:p>
+            <a:pPr>
+              <a:spcAft>
+                <a:spcPts val="700"/>
+              </a:spcAft>
+            </a:pPr>
+            <a:r>
+              <a:rPr b="1" sz="1600">
+                <a:solidFill>
+                  <a:srgbClr val="1F3A5F"/>
+                </a:solidFill>
+              </a:rPr>
               <a:t>-  Objection - 'isn't this just tool orchestration?':</a:t>
             </a:r>
             <a:r>
@@ -4424,7 +4447,7 @@
                   <a:srgbClr val="444444"/>
                 </a:solidFill>
               </a:rPr>
-              <a:t> 18 actions . ~460 hermetic tests + CI . live-validated (Claude/Codex/Ollama/Gemini, real citation backends) . motivation + benchmark plan . dynamic orchestrate.</a:t>
+              <a:t> 19 actions . ~470 hermetic tests + CI . live-validated (Claude/Codex/Ollama/Gemini, real citation backends) . motivation + benchmark plan . dynamic orchestrate.</a:t>
             </a:r>
           </a:p>
           <a:p>
@@ -4756,7 +4779,7 @@
                   <a:srgbClr val="444444"/>
                 </a:solidFill>
               </a:rPr>
-              <a:t> built end-to-end - 18 actions, ~460 hermetic tests, CI green; validated live (Claude / Codex / Ollama / Gemini vision / live citation backends).</a:t>
+              <a:t> built end-to-end - 19 actions, ~470 hermetic tests, CI green; validated live (Claude / Codex / Ollama / Gemini vision / live citation backends).</a:t>
             </a:r>
           </a:p>
         </p:txBody>
@@ -7934,7 +7957,7 @@
                   <a:srgbClr val="FFFFFF"/>
                 </a:solidFill>
               </a:rPr>
-              <a:t>5 . What we built - the 18 actions</a:t>
+              <a:t>5 . What we built - the 19 actions</a:t>
             </a:r>
           </a:p>
         </p:txBody>
@@ -8059,7 +8082,7 @@
                   <a:srgbClr val="444444"/>
                 </a:solidFill>
               </a:rPr>
-              <a:t> review (decision + scores + --ground), meta_review (panel), write_review (loop)</a:t>
+              <a:t> review (decision + scores + --ground; multimodal - sees figures via vision), meta_review (panel), rebuttal (point-by-point), write_review (loop)</a:t>
             </a:r>
           </a:p>
           <a:p>

--- a/docs/AUTHOR.pptx
+++ b/docs/AUTHOR.pptx
@@ -3237,7 +3237,7 @@
                   <a:srgbClr val="2E7D32"/>
                 </a:solidFill>
               </a:rPr>
-              <a:t>Invoked by the CLIO agent as a subagent   .   19 actions   .   grounded, not hallucinated</a:t>
+              <a:t>Invoked by the CLIO agent as a subagent   .   24 actions   .   grounded, not hallucinated</a:t>
             </a:r>
           </a:p>
         </p:txBody>
@@ -4447,7 +4447,7 @@
                   <a:srgbClr val="444444"/>
                 </a:solidFill>
               </a:rPr>
-              <a:t> 19 actions . ~470 hermetic tests + CI . live-validated (Claude/Codex/Ollama/Gemini, real citation backends) . motivation + benchmark plan . dynamic orchestrate.</a:t>
+              <a:t> 24 actions . ~470 hermetic tests + CI . live-validated (Claude/Codex/Ollama/Gemini, real citation backends) . motivation + benchmark plan . dynamic orchestrate.</a:t>
             </a:r>
           </a:p>
           <a:p>
@@ -4779,7 +4779,7 @@
                   <a:srgbClr val="444444"/>
                 </a:solidFill>
               </a:rPr>
-              <a:t> built end-to-end - 19 actions, ~470 hermetic tests, CI green; validated live (Claude / Codex / Ollama / Gemini vision / live citation backends).</a:t>
+              <a:t> built end-to-end - 24 actions, ~530 hermetic tests, CI green; validated live (Claude / Codex / Ollama / Gemini vision / live citation backends).</a:t>
             </a:r>
           </a:p>
         </p:txBody>
@@ -7957,7 +7957,7 @@
                   <a:srgbClr val="FFFFFF"/>
                 </a:solidFill>
               </a:rPr>
-              <a:t>5 . What we built - the 19 actions</a:t>
+              <a:t>5 . What we built - the 24 actions</a:t>
             </a:r>
           </a:p>
         </p:txBody>
@@ -8105,7 +8105,7 @@
                   <a:srgbClr val="444444"/>
                 </a:solidFill>
               </a:rPr>
-              <a:t> plan (tasks/claims/sources), write, edit, polish, coherence, compose (whole paper), export (-&gt; LaTeX)</a:t>
+              <a:t> plan, write, edit, polish, coherence, compose (whole paper), export (-&gt; LaTeX)</a:t>
             </a:r>
           </a:p>
           <a:p>
@@ -8129,6 +8129,52 @@
                 </a:solidFill>
               </a:rPr>
               <a:t> plot, describe_figures (Gemini vision), figure_refine (loop)</a:t>
+            </a:r>
+          </a:p>
+          <a:p>
+            <a:pPr>
+              <a:spcAft>
+                <a:spcPts val="700"/>
+              </a:spcAft>
+            </a:pPr>
+            <a:r>
+              <a:rPr b="1" sz="1600">
+                <a:solidFill>
+                  <a:srgbClr val="1F3A5F"/>
+                </a:solidFill>
+              </a:rPr>
+              <a:t>-  Research/verify:</a:t>
+            </a:r>
+            <a:r>
+              <a:rPr sz="1600">
+                <a:solidFill>
+                  <a:srgbClr val="444444"/>
+                </a:solidFill>
+              </a:rPr>
+              <a:t> research (grounded lit brief), verify_work (claim coverage), check_refs (BibTeX audit), section_review (3-layer), audit (pre-submission)</a:t>
+            </a:r>
+          </a:p>
+          <a:p>
+            <a:pPr>
+              <a:spcAft>
+                <a:spcPts val="700"/>
+              </a:spcAft>
+            </a:pPr>
+            <a:r>
+              <a:rPr b="1" sz="1600">
+                <a:solidFill>
+                  <a:srgbClr val="1F3A5F"/>
+                </a:solidFill>
+              </a:rPr>
+              <a:t>-  Knowledge graph:</a:t>
+            </a:r>
+            <a:r>
+              <a:rPr sz="1600">
+                <a:solidFill>
+                  <a:srgbClr val="444444"/>
+                </a:solidFill>
+              </a:rPr>
+              <a:t> kg (single-shot) and kg --full (6-stage pipeline: ontology-&gt;extraction-&gt;coref-&gt;verification, clean-room protoneo)</a:t>
             </a:r>
           </a:p>
           <a:p>

--- a/docs/AUTHOR.pptx
+++ b/docs/AUTHOR.pptx
@@ -3237,7 +3237,7 @@
                   <a:srgbClr val="2E7D32"/>
                 </a:solidFill>
               </a:rPr>
-              <a:t>Invoked by the CLIO agent as a subagent   .   24 actions   .   grounded, not hallucinated</a:t>
+              <a:t>Invoked by the CLIO agent as a subagent   .   25 actions   .   grounded, not hallucinated</a:t>
             </a:r>
           </a:p>
         </p:txBody>
@@ -4447,7 +4447,7 @@
                   <a:srgbClr val="444444"/>
                 </a:solidFill>
               </a:rPr>
-              <a:t> 24 actions . ~470 hermetic tests + CI . live-validated (Claude/Codex/Ollama/Gemini, real citation backends) . motivation + benchmark plan . dynamic orchestrate.</a:t>
+              <a:t> 25 actions . ~470 hermetic tests + CI . live-validated (Claude/Codex/Ollama/Gemini, real citation backends) . motivation + benchmark plan . dynamic orchestrate.</a:t>
             </a:r>
           </a:p>
           <a:p>
@@ -4779,7 +4779,7 @@
                   <a:srgbClr val="444444"/>
                 </a:solidFill>
               </a:rPr>
-              <a:t> built end-to-end - 24 actions, ~530 hermetic tests, CI green; validated live (Claude / Codex / Ollama / Gemini vision / live citation backends).</a:t>
+              <a:t> built end-to-end - 25 actions, ~556 hermetic tests, CI green; validated live (Claude / Codex / Ollama / Gemini vision / live citation backends).</a:t>
             </a:r>
           </a:p>
         </p:txBody>
@@ -7957,7 +7957,7 @@
                   <a:srgbClr val="FFFFFF"/>
                 </a:solidFill>
               </a:rPr>
-              <a:t>5 . What we built - the 24 actions</a:t>
+              <a:t>5 . What we built - the 25 actions</a:t>
             </a:r>
           </a:p>
         </p:txBody>
@@ -8051,7 +8051,7 @@
                   <a:srgbClr val="1F3A5F"/>
                 </a:solidFill>
               </a:rPr>
-              <a:t>-  Verify:</a:t>
+              <a:t>-  Discover/verify:</a:t>
             </a:r>
             <a:r>
               <a:rPr sz="1600">
@@ -8059,7 +8059,7 @@
                   <a:srgbClr val="444444"/>
                 </a:solidFill>
               </a:rPr>
-              <a:t> cite (Semantic Scholar -&gt; OpenAlex -&gt; Crossref -&gt; arXiv cascade; suggestions only, never edits)</a:t>
+              <a:t> discover (find real papers via scholarly search), cite (verify; 4-source cascade), check_refs (BibTeX audit)</a:t>
             </a:r>
           </a:p>
           <a:p>
@@ -8105,7 +8105,7 @@
                   <a:srgbClr val="444444"/>
                 </a:solidFill>
               </a:rPr>
-              <a:t> plan, write, edit, polish, coherence, compose (whole paper), export (-&gt; LaTeX)</a:t>
+              <a:t> plan, write, edit, polish, coherence, compose (whole paper), export (-&gt; LaTeX + PDF via --pdf)</a:t>
             </a:r>
           </a:p>
           <a:p>

--- a/docs/AUTHOR.pptx
+++ b/docs/AUTHOR.pptx
@@ -3237,7 +3237,7 @@
                   <a:srgbClr val="2E7D32"/>
                 </a:solidFill>
               </a:rPr>
-              <a:t>Invoked by the CLIO agent as a subagent   .   25 actions   .   grounded, not hallucinated</a:t>
+              <a:t>Invoked by the CLIO agent as a subagent   .   26 actions   .   grounded, not hallucinated</a:t>
             </a:r>
           </a:p>
         </p:txBody>
@@ -4447,7 +4447,7 @@
                   <a:srgbClr val="444444"/>
                 </a:solidFill>
               </a:rPr>
-              <a:t> 25 actions . ~470 hermetic tests + CI . live-validated (Claude/Codex/Ollama/Gemini, real citation backends) . motivation + benchmark plan . dynamic orchestrate.</a:t>
+              <a:t> 26 actions . ~579 hermetic tests + CI . live-validated (Claude/Codex/Ollama/Gemini, real citation backends) . motivation + benchmark plan . dynamic orchestrate.</a:t>
             </a:r>
           </a:p>
           <a:p>
@@ -4779,7 +4779,7 @@
                   <a:srgbClr val="444444"/>
                 </a:solidFill>
               </a:rPr>
-              <a:t> built end-to-end - 25 actions, ~556 hermetic tests, CI green; validated live (Claude / Codex / Ollama / Gemini vision / live citation backends).</a:t>
+              <a:t> built end-to-end - 26 actions, ~579 hermetic tests, CI green; validated live (Claude / Codex / Ollama / Gemini vision / live citation backends).</a:t>
             </a:r>
           </a:p>
         </p:txBody>
@@ -7957,7 +7957,7 @@
                   <a:srgbClr val="FFFFFF"/>
                 </a:solidFill>
               </a:rPr>
-              <a:t>5 . What we built - the 25 actions</a:t>
+              <a:t>5 . What we built - the 26 actions</a:t>
             </a:r>
           </a:p>
         </p:txBody>

--- a/docs/AUTHOR.pptx
+++ b/docs/AUTHOR.pptx
@@ -3237,7 +3237,7 @@
                   <a:srgbClr val="2E7D32"/>
                 </a:solidFill>
               </a:rPr>
-              <a:t>Invoked by the CLIO agent as a subagent   .   26 actions   .   grounded, not hallucinated</a:t>
+              <a:t>Invoked by the CLIO agent as a subagent   .   27 actions   .   grounded, not hallucinated</a:t>
             </a:r>
           </a:p>
         </p:txBody>
@@ -4447,7 +4447,7 @@
                   <a:srgbClr val="444444"/>
                 </a:solidFill>
               </a:rPr>
-              <a:t> 26 actions . ~579 hermetic tests + CI . live-validated (Claude/Codex/Ollama/Gemini, real citation backends) . motivation + benchmark plan . dynamic orchestrate.</a:t>
+              <a:t> 27 actions . ~587 hermetic tests + CI . live-validated (Claude/Codex/Ollama/Gemini, real citation backends) . motivation + benchmark plan . dynamic orchestrate.</a:t>
             </a:r>
           </a:p>
           <a:p>
@@ -4779,7 +4779,7 @@
                   <a:srgbClr val="444444"/>
                 </a:solidFill>
               </a:rPr>
-              <a:t> built end-to-end - 26 actions, ~579 hermetic tests, CI green; validated live (Claude / Codex / Ollama / Gemini vision / live citation backends).</a:t>
+              <a:t> built end-to-end - 27 actions, ~587 hermetic tests, CI green; validated live (Claude / Codex / Ollama / Gemini vision / live citation backends).</a:t>
             </a:r>
           </a:p>
         </p:txBody>
@@ -7957,7 +7957,7 @@
                   <a:srgbClr val="FFFFFF"/>
                 </a:solidFill>
               </a:rPr>
-              <a:t>5 . What we built - the 26 actions</a:t>
+              <a:t>5 . What we built - the 27 actions</a:t>
             </a:r>
           </a:p>
         </p:txBody>

--- a/docs/AUTHOR.pptx
+++ b/docs/AUTHOR.pptx
@@ -3237,7 +3237,7 @@
                   <a:srgbClr val="2E7D32"/>
                 </a:solidFill>
               </a:rPr>
-              <a:t>Invoked by the CLIO agent as a subagent   .   27 actions   .   grounded, not hallucinated</a:t>
+              <a:t>Invoked by the CLIO agent as a subagent   .   26 actions   .   grounded, not hallucinated</a:t>
             </a:r>
           </a:p>
         </p:txBody>
@@ -4447,7 +4447,7 @@
                   <a:srgbClr val="444444"/>
                 </a:solidFill>
               </a:rPr>
-              <a:t> 27 actions . ~587 hermetic tests + CI . live-validated (Claude/Codex/Ollama/Gemini, real citation backends) . motivation + benchmark plan . dynamic orchestrate.</a:t>
+              <a:t> 26 actions . ~595 hermetic tests + CI . live-validated (Claude/Codex/Ollama/Gemini, real citation backends) . motivation + benchmark plan . dynamic orchestrate.</a:t>
             </a:r>
           </a:p>
           <a:p>
@@ -4779,7 +4779,7 @@
                   <a:srgbClr val="444444"/>
                 </a:solidFill>
               </a:rPr>
-              <a:t> built end-to-end - 27 actions, ~587 hermetic tests, CI green; validated live (Claude / Codex / Ollama / Gemini vision / live citation backends).</a:t>
+              <a:t> built end-to-end - 26 actions, ~595 hermetic tests, CI green; validated live (Claude / Codex / Ollama / Gemini vision / live citation backends).</a:t>
             </a:r>
           </a:p>
         </p:txBody>
@@ -7957,7 +7957,7 @@
                   <a:srgbClr val="FFFFFF"/>
                 </a:solidFill>
               </a:rPr>
-              <a:t>5 . What we built - the 27 actions</a:t>
+              <a:t>5 . What we built - the 26 actions</a:t>
             </a:r>
           </a:p>
         </p:txBody>
